--- a/2025/12/25/CP/reports/Insight_based_problem_report/tmp.pptx
+++ b/2025/12/25/CP/reports/Insight_based_problem_report/tmp.pptx
@@ -7,6 +7,9 @@
   <p:sldIdLst>
     <p:sldId id="256" r:id="rId3"/>
     <p:sldId id="257" r:id="rId4"/>
+    <p:sldId id="258" r:id="rId5"/>
+    <p:sldId id="259" r:id="rId6"/>
+    <p:sldId id="260" r:id="rId7"/>
   </p:sldIdLst>
   <p:sldSz cx="12192000" cy="6858000"/>
   <p:notesSz cx="6858000" cy="9144000"/>
@@ -3650,6 +3653,7426 @@
 </p:sld>
 </file>
 
+<file path=ppt/slides/slide3.xml><?xml version="1.0" encoding="utf-8"?>
+<p:sld xmlns:a="http://schemas.openxmlformats.org/drawingml/2006/main" xmlns:r="http://schemas.openxmlformats.org/officeDocument/2006/relationships" xmlns:p="http://schemas.openxmlformats.org/presentationml/2006/main">
+  <p:cSld>
+    <p:spTree>
+      <p:nvGrpSpPr>
+        <p:cNvPr id="1" name=""/>
+        <p:cNvGrpSpPr/>
+        <p:nvPr/>
+      </p:nvGrpSpPr>
+      <p:grpSpPr/>
+      <p:sp>
+        <p:nvSpPr>
+          <p:cNvPr id="2" name="标题 1"/>
+          <p:cNvSpPr>
+            <a:spLocks noGrp="1"/>
+          </p:cNvSpPr>
+          <p:nvPr>
+            <p:ph type="title"/>
+          </p:nvPr>
+        </p:nvSpPr>
+        <p:spPr/>
+        <p:txBody>
+          <a:bodyPr/>
+          <a:p>
+            <a:endParaRPr lang="zh-CN" altLang="en-US"/>
+          </a:p>
+        </p:txBody>
+      </p:sp>
+      <p:graphicFrame>
+        <p:nvGraphicFramePr>
+          <p:cNvPr id="4" name="内容占位符 3"/>
+          <p:cNvGraphicFramePr/>
+          <p:nvPr>
+            <p:ph idx="1"/>
+            <p:custDataLst>
+              <p:tags r:id="rId1"/>
+            </p:custDataLst>
+          </p:nvPr>
+        </p:nvGraphicFramePr>
+        <p:xfrm>
+          <a:off x="1754505" y="2287270"/>
+          <a:ext cx="2087880" cy="2016760"/>
+        </p:xfrm>
+        <a:graphic>
+          <a:graphicData uri="http://schemas.openxmlformats.org/drawingml/2006/table">
+            <a:tbl>
+              <a:tblPr firstRow="1" bandRow="1">
+                <a:tableStyleId>{5C22544A-7EE6-4342-B048-85BDC9FD1C3A}</a:tableStyleId>
+              </a:tblPr>
+              <a:tblGrid>
+                <a:gridCol w="540000"/>
+                <a:gridCol w="540000"/>
+                <a:gridCol w="540000"/>
+                <a:gridCol w="540000"/>
+              </a:tblGrid>
+              <a:tr h="540000">
+                <a:tc>
+                  <a:txBody>
+                    <a:bodyPr/>
+                    <a:p>
+                      <a:pPr>
+                        <a:buNone/>
+                      </a:pPr>
+                      <a:endParaRPr lang="zh-CN" altLang="en-US">
+                        <a:solidFill>
+                          <a:schemeClr val="tx1"/>
+                        </a:solidFill>
+                      </a:endParaRPr>
+                    </a:p>
+                  </a:txBody>
+                  <a:tcPr>
+                    <a:lnL w="12700" cmpd="sng">
+                      <a:solidFill>
+                        <a:schemeClr val="tx1"/>
+                      </a:solidFill>
+                      <a:prstDash val="solid"/>
+                    </a:lnL>
+                    <a:lnR w="12700" cmpd="sng">
+                      <a:solidFill>
+                        <a:schemeClr val="tx1"/>
+                      </a:solidFill>
+                      <a:prstDash val="solid"/>
+                    </a:lnR>
+                    <a:lnT w="12700" cmpd="sng">
+                      <a:solidFill>
+                        <a:schemeClr val="tx1"/>
+                      </a:solidFill>
+                      <a:prstDash val="solid"/>
+                    </a:lnT>
+                    <a:lnB w="12700" cmpd="sng">
+                      <a:solidFill>
+                        <a:schemeClr val="tx1"/>
+                      </a:solidFill>
+                      <a:prstDash val="solid"/>
+                    </a:lnB>
+                    <a:solidFill>
+                      <a:schemeClr val="bg1"/>
+                    </a:solidFill>
+                  </a:tcPr>
+                </a:tc>
+                <a:tc>
+                  <a:txBody>
+                    <a:bodyPr/>
+                    <a:p>
+                      <a:pPr>
+                        <a:buNone/>
+                      </a:pPr>
+                      <a:endParaRPr lang="zh-CN" altLang="en-US">
+                        <a:solidFill>
+                          <a:schemeClr val="tx1"/>
+                        </a:solidFill>
+                      </a:endParaRPr>
+                    </a:p>
+                  </a:txBody>
+                  <a:tcPr>
+                    <a:lnL w="12700" cmpd="sng">
+                      <a:solidFill>
+                        <a:schemeClr val="tx1"/>
+                      </a:solidFill>
+                      <a:prstDash val="solid"/>
+                    </a:lnL>
+                    <a:lnR w="12700" cmpd="sng">
+                      <a:solidFill>
+                        <a:schemeClr val="tx1"/>
+                      </a:solidFill>
+                      <a:prstDash val="solid"/>
+                    </a:lnR>
+                    <a:lnT w="12700" cmpd="sng">
+                      <a:solidFill>
+                        <a:schemeClr val="tx1"/>
+                      </a:solidFill>
+                      <a:prstDash val="solid"/>
+                    </a:lnT>
+                    <a:lnB w="12700" cmpd="sng">
+                      <a:solidFill>
+                        <a:schemeClr val="tx1"/>
+                      </a:solidFill>
+                      <a:prstDash val="solid"/>
+                    </a:lnB>
+                    <a:solidFill>
+                      <a:schemeClr val="tx1"/>
+                    </a:solidFill>
+                  </a:tcPr>
+                </a:tc>
+                <a:tc>
+                  <a:txBody>
+                    <a:bodyPr/>
+                    <a:p>
+                      <a:pPr>
+                        <a:buNone/>
+                      </a:pPr>
+                      <a:endParaRPr lang="zh-CN" altLang="en-US">
+                        <a:solidFill>
+                          <a:schemeClr val="tx1"/>
+                        </a:solidFill>
+                      </a:endParaRPr>
+                    </a:p>
+                  </a:txBody>
+                  <a:tcPr>
+                    <a:lnL w="12700" cmpd="sng">
+                      <a:solidFill>
+                        <a:schemeClr val="tx1"/>
+                      </a:solidFill>
+                      <a:prstDash val="solid"/>
+                    </a:lnL>
+                    <a:lnR w="12700" cmpd="sng">
+                      <a:solidFill>
+                        <a:schemeClr val="tx1"/>
+                      </a:solidFill>
+                      <a:prstDash val="solid"/>
+                    </a:lnR>
+                    <a:lnT w="12700" cmpd="sng">
+                      <a:solidFill>
+                        <a:schemeClr val="tx1"/>
+                      </a:solidFill>
+                      <a:prstDash val="solid"/>
+                    </a:lnT>
+                    <a:lnB w="12700" cmpd="sng">
+                      <a:solidFill>
+                        <a:schemeClr val="tx1"/>
+                      </a:solidFill>
+                      <a:prstDash val="solid"/>
+                    </a:lnB>
+                    <a:solidFill>
+                      <a:schemeClr val="bg1"/>
+                    </a:solidFill>
+                  </a:tcPr>
+                </a:tc>
+                <a:tc>
+                  <a:txBody>
+                    <a:bodyPr/>
+                    <a:p>
+                      <a:pPr>
+                        <a:buNone/>
+                      </a:pPr>
+                      <a:endParaRPr lang="zh-CN" altLang="en-US">
+                        <a:solidFill>
+                          <a:schemeClr val="tx1"/>
+                        </a:solidFill>
+                      </a:endParaRPr>
+                    </a:p>
+                  </a:txBody>
+                  <a:tcPr>
+                    <a:lnL w="12700" cmpd="sng">
+                      <a:solidFill>
+                        <a:schemeClr val="tx1"/>
+                      </a:solidFill>
+                      <a:prstDash val="solid"/>
+                    </a:lnL>
+                    <a:lnR w="12700" cmpd="sng">
+                      <a:solidFill>
+                        <a:schemeClr val="tx1"/>
+                      </a:solidFill>
+                      <a:prstDash val="solid"/>
+                    </a:lnR>
+                    <a:lnT w="12700" cmpd="sng">
+                      <a:solidFill>
+                        <a:schemeClr val="tx1"/>
+                      </a:solidFill>
+                      <a:prstDash val="solid"/>
+                    </a:lnT>
+                    <a:lnB w="12700" cmpd="sng">
+                      <a:solidFill>
+                        <a:schemeClr val="tx1"/>
+                      </a:solidFill>
+                      <a:prstDash val="solid"/>
+                    </a:lnB>
+                    <a:solidFill>
+                      <a:schemeClr val="tx1"/>
+                    </a:solidFill>
+                  </a:tcPr>
+                </a:tc>
+              </a:tr>
+              <a:tr h="540000">
+                <a:tc>
+                  <a:txBody>
+                    <a:bodyPr/>
+                    <a:p>
+                      <a:pPr>
+                        <a:buNone/>
+                      </a:pPr>
+                      <a:endParaRPr lang="zh-CN" altLang="en-US">
+                        <a:solidFill>
+                          <a:schemeClr val="tx1"/>
+                        </a:solidFill>
+                      </a:endParaRPr>
+                    </a:p>
+                  </a:txBody>
+                  <a:tcPr>
+                    <a:lnL w="12700" cmpd="sng">
+                      <a:solidFill>
+                        <a:schemeClr val="tx1"/>
+                      </a:solidFill>
+                      <a:prstDash val="solid"/>
+                    </a:lnL>
+                    <a:lnR w="12700" cmpd="sng">
+                      <a:solidFill>
+                        <a:schemeClr val="tx1"/>
+                      </a:solidFill>
+                      <a:prstDash val="solid"/>
+                    </a:lnR>
+                    <a:lnT w="12700" cmpd="sng">
+                      <a:solidFill>
+                        <a:schemeClr val="tx1"/>
+                      </a:solidFill>
+                      <a:prstDash val="solid"/>
+                    </a:lnT>
+                    <a:lnB w="12700" cmpd="sng">
+                      <a:solidFill>
+                        <a:schemeClr val="tx1"/>
+                      </a:solidFill>
+                      <a:prstDash val="solid"/>
+                    </a:lnB>
+                    <a:solidFill>
+                      <a:schemeClr val="tx1"/>
+                    </a:solidFill>
+                  </a:tcPr>
+                </a:tc>
+                <a:tc>
+                  <a:txBody>
+                    <a:bodyPr/>
+                    <a:p>
+                      <a:pPr>
+                        <a:buNone/>
+                      </a:pPr>
+                      <a:endParaRPr lang="zh-CN" altLang="en-US">
+                        <a:solidFill>
+                          <a:schemeClr val="tx1"/>
+                        </a:solidFill>
+                      </a:endParaRPr>
+                    </a:p>
+                  </a:txBody>
+                  <a:tcPr>
+                    <a:lnL w="12700" cmpd="sng">
+                      <a:solidFill>
+                        <a:schemeClr val="tx1"/>
+                      </a:solidFill>
+                      <a:prstDash val="solid"/>
+                    </a:lnL>
+                    <a:lnR w="12700" cmpd="sng">
+                      <a:solidFill>
+                        <a:schemeClr val="tx1"/>
+                      </a:solidFill>
+                      <a:prstDash val="solid"/>
+                    </a:lnR>
+                    <a:lnT w="12700" cmpd="sng">
+                      <a:solidFill>
+                        <a:schemeClr val="tx1"/>
+                      </a:solidFill>
+                      <a:prstDash val="solid"/>
+                    </a:lnT>
+                    <a:lnB w="12700" cmpd="sng">
+                      <a:solidFill>
+                        <a:schemeClr val="tx1"/>
+                      </a:solidFill>
+                      <a:prstDash val="solid"/>
+                    </a:lnB>
+                    <a:solidFill>
+                      <a:schemeClr val="bg1"/>
+                    </a:solidFill>
+                  </a:tcPr>
+                </a:tc>
+                <a:tc>
+                  <a:txBody>
+                    <a:bodyPr/>
+                    <a:p>
+                      <a:pPr>
+                        <a:buNone/>
+                      </a:pPr>
+                      <a:endParaRPr lang="zh-CN" altLang="en-US">
+                        <a:solidFill>
+                          <a:schemeClr val="tx1"/>
+                        </a:solidFill>
+                      </a:endParaRPr>
+                    </a:p>
+                  </a:txBody>
+                  <a:tcPr>
+                    <a:lnL w="12700" cmpd="sng">
+                      <a:solidFill>
+                        <a:schemeClr val="tx1"/>
+                      </a:solidFill>
+                      <a:prstDash val="solid"/>
+                    </a:lnL>
+                    <a:lnR w="12700" cmpd="sng">
+                      <a:solidFill>
+                        <a:schemeClr val="tx1"/>
+                      </a:solidFill>
+                      <a:prstDash val="solid"/>
+                    </a:lnR>
+                    <a:lnT w="12700" cmpd="sng">
+                      <a:solidFill>
+                        <a:schemeClr val="tx1"/>
+                      </a:solidFill>
+                      <a:prstDash val="solid"/>
+                    </a:lnT>
+                    <a:lnB w="12700" cmpd="sng">
+                      <a:solidFill>
+                        <a:schemeClr val="tx1"/>
+                      </a:solidFill>
+                      <a:prstDash val="solid"/>
+                    </a:lnB>
+                    <a:solidFill>
+                      <a:schemeClr val="tx1"/>
+                    </a:solidFill>
+                  </a:tcPr>
+                </a:tc>
+                <a:tc>
+                  <a:txBody>
+                    <a:bodyPr/>
+                    <a:p>
+                      <a:pPr>
+                        <a:buNone/>
+                      </a:pPr>
+                      <a:endParaRPr lang="zh-CN" altLang="en-US">
+                        <a:solidFill>
+                          <a:schemeClr val="tx1"/>
+                        </a:solidFill>
+                      </a:endParaRPr>
+                    </a:p>
+                  </a:txBody>
+                  <a:tcPr>
+                    <a:lnL w="12700" cmpd="sng">
+                      <a:solidFill>
+                        <a:schemeClr val="tx1"/>
+                      </a:solidFill>
+                      <a:prstDash val="solid"/>
+                    </a:lnL>
+                    <a:lnR w="12700" cmpd="sng">
+                      <a:solidFill>
+                        <a:schemeClr val="tx1"/>
+                      </a:solidFill>
+                      <a:prstDash val="solid"/>
+                    </a:lnR>
+                    <a:lnT w="12700" cmpd="sng">
+                      <a:solidFill>
+                        <a:schemeClr val="tx1"/>
+                      </a:solidFill>
+                      <a:prstDash val="solid"/>
+                    </a:lnT>
+                    <a:lnB w="12700" cmpd="sng">
+                      <a:solidFill>
+                        <a:schemeClr val="tx1"/>
+                      </a:solidFill>
+                      <a:prstDash val="solid"/>
+                    </a:lnB>
+                    <a:solidFill>
+                      <a:schemeClr val="bg1"/>
+                    </a:solidFill>
+                  </a:tcPr>
+                </a:tc>
+              </a:tr>
+              <a:tr h="540000">
+                <a:tc>
+                  <a:txBody>
+                    <a:bodyPr/>
+                    <a:p>
+                      <a:pPr>
+                        <a:buNone/>
+                      </a:pPr>
+                      <a:endParaRPr lang="zh-CN" altLang="en-US">
+                        <a:solidFill>
+                          <a:schemeClr val="tx1"/>
+                        </a:solidFill>
+                      </a:endParaRPr>
+                    </a:p>
+                  </a:txBody>
+                  <a:tcPr>
+                    <a:lnL w="12700" cmpd="sng">
+                      <a:solidFill>
+                        <a:schemeClr val="tx1"/>
+                      </a:solidFill>
+                      <a:prstDash val="solid"/>
+                    </a:lnL>
+                    <a:lnR w="12700" cmpd="sng">
+                      <a:solidFill>
+                        <a:schemeClr val="tx1"/>
+                      </a:solidFill>
+                      <a:prstDash val="solid"/>
+                    </a:lnR>
+                    <a:lnT w="12700" cmpd="sng">
+                      <a:solidFill>
+                        <a:schemeClr val="tx1"/>
+                      </a:solidFill>
+                      <a:prstDash val="solid"/>
+                    </a:lnT>
+                    <a:lnB w="12700" cmpd="sng">
+                      <a:solidFill>
+                        <a:schemeClr val="tx1"/>
+                      </a:solidFill>
+                      <a:prstDash val="solid"/>
+                    </a:lnB>
+                    <a:solidFill>
+                      <a:schemeClr val="bg1"/>
+                    </a:solidFill>
+                  </a:tcPr>
+                </a:tc>
+                <a:tc>
+                  <a:txBody>
+                    <a:bodyPr/>
+                    <a:p>
+                      <a:pPr>
+                        <a:buNone/>
+                      </a:pPr>
+                      <a:endParaRPr lang="zh-CN" altLang="en-US">
+                        <a:solidFill>
+                          <a:schemeClr val="tx1"/>
+                        </a:solidFill>
+                      </a:endParaRPr>
+                    </a:p>
+                  </a:txBody>
+                  <a:tcPr>
+                    <a:lnL w="12700" cmpd="sng">
+                      <a:solidFill>
+                        <a:schemeClr val="tx1"/>
+                      </a:solidFill>
+                      <a:prstDash val="solid"/>
+                    </a:lnL>
+                    <a:lnR w="12700" cmpd="sng">
+                      <a:solidFill>
+                        <a:schemeClr val="tx1"/>
+                      </a:solidFill>
+                      <a:prstDash val="solid"/>
+                    </a:lnR>
+                    <a:lnT w="12700" cmpd="sng">
+                      <a:solidFill>
+                        <a:schemeClr val="tx1"/>
+                      </a:solidFill>
+                      <a:prstDash val="solid"/>
+                    </a:lnT>
+                    <a:lnB w="12700" cmpd="sng">
+                      <a:solidFill>
+                        <a:schemeClr val="tx1"/>
+                      </a:solidFill>
+                      <a:prstDash val="solid"/>
+                    </a:lnB>
+                    <a:solidFill>
+                      <a:schemeClr val="tx1"/>
+                    </a:solidFill>
+                  </a:tcPr>
+                </a:tc>
+                <a:tc>
+                  <a:txBody>
+                    <a:bodyPr/>
+                    <a:p>
+                      <a:pPr>
+                        <a:buNone/>
+                      </a:pPr>
+                      <a:endParaRPr lang="zh-CN" altLang="en-US">
+                        <a:solidFill>
+                          <a:schemeClr val="tx1"/>
+                        </a:solidFill>
+                      </a:endParaRPr>
+                    </a:p>
+                  </a:txBody>
+                  <a:tcPr>
+                    <a:lnL w="12700" cmpd="sng">
+                      <a:solidFill>
+                        <a:schemeClr val="tx1"/>
+                      </a:solidFill>
+                      <a:prstDash val="solid"/>
+                    </a:lnL>
+                    <a:lnR w="12700" cmpd="sng">
+                      <a:solidFill>
+                        <a:schemeClr val="tx1"/>
+                      </a:solidFill>
+                      <a:prstDash val="solid"/>
+                    </a:lnR>
+                    <a:lnT w="12700" cmpd="sng">
+                      <a:solidFill>
+                        <a:schemeClr val="tx1"/>
+                      </a:solidFill>
+                      <a:prstDash val="solid"/>
+                    </a:lnT>
+                    <a:lnB w="12700" cmpd="sng">
+                      <a:solidFill>
+                        <a:schemeClr val="tx1"/>
+                      </a:solidFill>
+                      <a:prstDash val="solid"/>
+                    </a:lnB>
+                    <a:solidFill>
+                      <a:schemeClr val="bg1"/>
+                    </a:solidFill>
+                  </a:tcPr>
+                </a:tc>
+                <a:tc>
+                  <a:txBody>
+                    <a:bodyPr/>
+                    <a:p>
+                      <a:pPr>
+                        <a:buNone/>
+                      </a:pPr>
+                      <a:endParaRPr lang="zh-CN" altLang="en-US">
+                        <a:solidFill>
+                          <a:schemeClr val="tx1"/>
+                        </a:solidFill>
+                      </a:endParaRPr>
+                    </a:p>
+                  </a:txBody>
+                  <a:tcPr>
+                    <a:lnL w="12700" cmpd="sng">
+                      <a:solidFill>
+                        <a:schemeClr val="tx1"/>
+                      </a:solidFill>
+                      <a:prstDash val="solid"/>
+                    </a:lnL>
+                    <a:lnR w="12700" cmpd="sng">
+                      <a:solidFill>
+                        <a:schemeClr val="tx1"/>
+                      </a:solidFill>
+                      <a:prstDash val="solid"/>
+                    </a:lnR>
+                    <a:lnT w="12700" cmpd="sng">
+                      <a:solidFill>
+                        <a:schemeClr val="tx1"/>
+                      </a:solidFill>
+                      <a:prstDash val="solid"/>
+                    </a:lnT>
+                    <a:lnB w="12700" cmpd="sng">
+                      <a:solidFill>
+                        <a:schemeClr val="tx1"/>
+                      </a:solidFill>
+                      <a:prstDash val="solid"/>
+                    </a:lnB>
+                    <a:solidFill>
+                      <a:schemeClr val="tx1"/>
+                    </a:solidFill>
+                  </a:tcPr>
+                </a:tc>
+              </a:tr>
+              <a:tr h="540000">
+                <a:tc>
+                  <a:txBody>
+                    <a:bodyPr/>
+                    <a:p>
+                      <a:pPr>
+                        <a:buNone/>
+                      </a:pPr>
+                      <a:endParaRPr lang="zh-CN" altLang="en-US">
+                        <a:solidFill>
+                          <a:schemeClr val="tx1"/>
+                        </a:solidFill>
+                      </a:endParaRPr>
+                    </a:p>
+                  </a:txBody>
+                  <a:tcPr>
+                    <a:lnL w="12700" cmpd="sng">
+                      <a:solidFill>
+                        <a:schemeClr val="tx1"/>
+                      </a:solidFill>
+                      <a:prstDash val="solid"/>
+                    </a:lnL>
+                    <a:lnR w="12700" cmpd="sng">
+                      <a:solidFill>
+                        <a:schemeClr val="tx1"/>
+                      </a:solidFill>
+                      <a:prstDash val="solid"/>
+                    </a:lnR>
+                    <a:lnT w="12700" cmpd="sng">
+                      <a:solidFill>
+                        <a:schemeClr val="tx1"/>
+                      </a:solidFill>
+                      <a:prstDash val="solid"/>
+                    </a:lnT>
+                    <a:lnB w="12700" cmpd="sng">
+                      <a:solidFill>
+                        <a:schemeClr val="tx1"/>
+                      </a:solidFill>
+                      <a:prstDash val="solid"/>
+                    </a:lnB>
+                    <a:solidFill>
+                      <a:schemeClr val="tx1"/>
+                    </a:solidFill>
+                  </a:tcPr>
+                </a:tc>
+                <a:tc>
+                  <a:txBody>
+                    <a:bodyPr/>
+                    <a:p>
+                      <a:pPr>
+                        <a:buNone/>
+                      </a:pPr>
+                      <a:endParaRPr lang="zh-CN" altLang="en-US">
+                        <a:solidFill>
+                          <a:schemeClr val="tx1"/>
+                        </a:solidFill>
+                      </a:endParaRPr>
+                    </a:p>
+                  </a:txBody>
+                  <a:tcPr>
+                    <a:lnL w="12700" cmpd="sng">
+                      <a:solidFill>
+                        <a:schemeClr val="tx1"/>
+                      </a:solidFill>
+                      <a:prstDash val="solid"/>
+                    </a:lnL>
+                    <a:lnR w="12700" cmpd="sng">
+                      <a:solidFill>
+                        <a:schemeClr val="tx1"/>
+                      </a:solidFill>
+                      <a:prstDash val="solid"/>
+                    </a:lnR>
+                    <a:lnT w="12700" cmpd="sng">
+                      <a:solidFill>
+                        <a:schemeClr val="tx1"/>
+                      </a:solidFill>
+                      <a:prstDash val="solid"/>
+                    </a:lnT>
+                    <a:lnB w="12700" cmpd="sng">
+                      <a:solidFill>
+                        <a:schemeClr val="tx1"/>
+                      </a:solidFill>
+                      <a:prstDash val="solid"/>
+                    </a:lnB>
+                    <a:solidFill>
+                      <a:schemeClr val="bg1"/>
+                    </a:solidFill>
+                  </a:tcPr>
+                </a:tc>
+                <a:tc>
+                  <a:txBody>
+                    <a:bodyPr/>
+                    <a:p>
+                      <a:pPr>
+                        <a:buNone/>
+                      </a:pPr>
+                      <a:endParaRPr lang="zh-CN" altLang="en-US">
+                        <a:solidFill>
+                          <a:schemeClr val="tx1"/>
+                        </a:solidFill>
+                      </a:endParaRPr>
+                    </a:p>
+                  </a:txBody>
+                  <a:tcPr>
+                    <a:lnL w="12700" cmpd="sng">
+                      <a:solidFill>
+                        <a:schemeClr val="tx1"/>
+                      </a:solidFill>
+                      <a:prstDash val="solid"/>
+                    </a:lnL>
+                    <a:lnR w="12700" cmpd="sng">
+                      <a:solidFill>
+                        <a:schemeClr val="tx1"/>
+                      </a:solidFill>
+                      <a:prstDash val="solid"/>
+                    </a:lnR>
+                    <a:lnT w="12700" cmpd="sng">
+                      <a:solidFill>
+                        <a:schemeClr val="tx1"/>
+                      </a:solidFill>
+                      <a:prstDash val="solid"/>
+                    </a:lnT>
+                    <a:lnB w="12700" cmpd="sng">
+                      <a:solidFill>
+                        <a:schemeClr val="tx1"/>
+                      </a:solidFill>
+                      <a:prstDash val="solid"/>
+                    </a:lnB>
+                    <a:solidFill>
+                      <a:schemeClr val="tx1"/>
+                    </a:solidFill>
+                  </a:tcPr>
+                </a:tc>
+                <a:tc>
+                  <a:txBody>
+                    <a:bodyPr/>
+                    <a:p>
+                      <a:pPr>
+                        <a:buNone/>
+                      </a:pPr>
+                      <a:endParaRPr lang="zh-CN" altLang="en-US">
+                        <a:solidFill>
+                          <a:schemeClr val="tx1"/>
+                        </a:solidFill>
+                      </a:endParaRPr>
+                    </a:p>
+                  </a:txBody>
+                  <a:tcPr>
+                    <a:lnL w="12700" cmpd="sng">
+                      <a:solidFill>
+                        <a:schemeClr val="tx1"/>
+                      </a:solidFill>
+                      <a:prstDash val="solid"/>
+                    </a:lnL>
+                    <a:lnR w="12700" cmpd="sng">
+                      <a:solidFill>
+                        <a:schemeClr val="tx1"/>
+                      </a:solidFill>
+                      <a:prstDash val="solid"/>
+                    </a:lnR>
+                    <a:lnT w="12700" cmpd="sng">
+                      <a:solidFill>
+                        <a:schemeClr val="tx1"/>
+                      </a:solidFill>
+                      <a:prstDash val="solid"/>
+                    </a:lnT>
+                    <a:lnB w="12700" cmpd="sng">
+                      <a:solidFill>
+                        <a:schemeClr val="tx1"/>
+                      </a:solidFill>
+                      <a:prstDash val="solid"/>
+                    </a:lnB>
+                    <a:solidFill>
+                      <a:schemeClr val="bg1"/>
+                    </a:solidFill>
+                  </a:tcPr>
+                </a:tc>
+              </a:tr>
+            </a:tbl>
+          </a:graphicData>
+        </a:graphic>
+      </p:graphicFrame>
+      <p:graphicFrame>
+        <p:nvGraphicFramePr>
+          <p:cNvPr id="6" name="表格 5"/>
+          <p:cNvGraphicFramePr/>
+          <p:nvPr>
+            <p:custDataLst>
+              <p:tags r:id="rId2"/>
+            </p:custDataLst>
+          </p:nvPr>
+        </p:nvGraphicFramePr>
+        <p:xfrm>
+          <a:off x="5676900" y="2263140"/>
+          <a:ext cx="2087880" cy="3025140"/>
+        </p:xfrm>
+        <a:graphic>
+          <a:graphicData uri="http://schemas.openxmlformats.org/drawingml/2006/table">
+            <a:tbl>
+              <a:tblPr firstRow="1" bandRow="1">
+                <a:tableStyleId>{5C22544A-7EE6-4342-B048-85BDC9FD1C3A}</a:tableStyleId>
+              </a:tblPr>
+              <a:tblGrid>
+                <a:gridCol w="540000"/>
+                <a:gridCol w="540000"/>
+                <a:gridCol w="540000"/>
+                <a:gridCol w="540000"/>
+                <a:gridCol w="540000"/>
+                <a:gridCol w="540000"/>
+              </a:tblGrid>
+              <a:tr h="540000">
+                <a:tc>
+                  <a:txBody>
+                    <a:bodyPr/>
+                    <a:p>
+                      <a:pPr>
+                        <a:buNone/>
+                      </a:pPr>
+                      <a:endParaRPr lang="zh-CN" altLang="en-US">
+                        <a:solidFill>
+                          <a:schemeClr val="tx1"/>
+                        </a:solidFill>
+                      </a:endParaRPr>
+                    </a:p>
+                  </a:txBody>
+                  <a:tcPr>
+                    <a:lnL w="12700" cmpd="sng">
+                      <a:solidFill>
+                        <a:schemeClr val="tx1"/>
+                      </a:solidFill>
+                      <a:prstDash val="solid"/>
+                    </a:lnL>
+                    <a:lnR w="12700" cmpd="sng">
+                      <a:solidFill>
+                        <a:schemeClr val="tx1"/>
+                      </a:solidFill>
+                      <a:prstDash val="solid"/>
+                    </a:lnR>
+                    <a:lnT w="12700" cmpd="sng">
+                      <a:solidFill>
+                        <a:schemeClr val="tx1"/>
+                      </a:solidFill>
+                      <a:prstDash val="solid"/>
+                    </a:lnT>
+                    <a:lnB w="12700" cmpd="sng">
+                      <a:solidFill>
+                        <a:schemeClr val="tx1"/>
+                      </a:solidFill>
+                      <a:prstDash val="solid"/>
+                    </a:lnB>
+                    <a:solidFill>
+                      <a:schemeClr val="bg1"/>
+                    </a:solidFill>
+                  </a:tcPr>
+                </a:tc>
+                <a:tc>
+                  <a:txBody>
+                    <a:bodyPr/>
+                    <a:p>
+                      <a:pPr>
+                        <a:buNone/>
+                      </a:pPr>
+                      <a:endParaRPr lang="zh-CN" altLang="en-US">
+                        <a:solidFill>
+                          <a:schemeClr val="tx1"/>
+                        </a:solidFill>
+                      </a:endParaRPr>
+                    </a:p>
+                  </a:txBody>
+                  <a:tcPr>
+                    <a:lnL w="12700" cmpd="sng">
+                      <a:solidFill>
+                        <a:schemeClr val="tx1"/>
+                      </a:solidFill>
+                      <a:prstDash val="solid"/>
+                    </a:lnL>
+                    <a:lnR w="12700" cmpd="sng">
+                      <a:solidFill>
+                        <a:schemeClr val="tx1"/>
+                      </a:solidFill>
+                      <a:prstDash val="solid"/>
+                    </a:lnR>
+                    <a:lnT w="12700" cmpd="sng">
+                      <a:solidFill>
+                        <a:schemeClr val="tx1"/>
+                      </a:solidFill>
+                      <a:prstDash val="solid"/>
+                    </a:lnT>
+                    <a:lnB w="12700" cmpd="sng">
+                      <a:solidFill>
+                        <a:schemeClr val="tx1"/>
+                      </a:solidFill>
+                      <a:prstDash val="solid"/>
+                    </a:lnB>
+                    <a:solidFill>
+                      <a:schemeClr val="tx1"/>
+                    </a:solidFill>
+                  </a:tcPr>
+                </a:tc>
+                <a:tc>
+                  <a:txBody>
+                    <a:bodyPr/>
+                    <a:p>
+                      <a:pPr>
+                        <a:buNone/>
+                      </a:pPr>
+                      <a:endParaRPr lang="zh-CN" altLang="en-US">
+                        <a:solidFill>
+                          <a:schemeClr val="tx1"/>
+                        </a:solidFill>
+                      </a:endParaRPr>
+                    </a:p>
+                  </a:txBody>
+                  <a:tcPr>
+                    <a:lnL w="12700" cmpd="sng">
+                      <a:solidFill>
+                        <a:schemeClr val="tx1"/>
+                      </a:solidFill>
+                      <a:prstDash val="solid"/>
+                    </a:lnL>
+                    <a:lnR w="12700" cmpd="sng">
+                      <a:solidFill>
+                        <a:schemeClr val="tx1"/>
+                      </a:solidFill>
+                      <a:prstDash val="solid"/>
+                    </a:lnR>
+                    <a:lnT w="12700" cmpd="sng">
+                      <a:solidFill>
+                        <a:schemeClr val="tx1"/>
+                      </a:solidFill>
+                      <a:prstDash val="solid"/>
+                    </a:lnT>
+                    <a:lnB w="12700" cmpd="sng">
+                      <a:solidFill>
+                        <a:schemeClr val="tx1"/>
+                      </a:solidFill>
+                      <a:prstDash val="solid"/>
+                    </a:lnB>
+                    <a:solidFill>
+                      <a:schemeClr val="bg1"/>
+                    </a:solidFill>
+                  </a:tcPr>
+                </a:tc>
+                <a:tc>
+                  <a:txBody>
+                    <a:bodyPr/>
+                    <a:p>
+                      <a:pPr>
+                        <a:buNone/>
+                      </a:pPr>
+                      <a:endParaRPr lang="zh-CN" altLang="en-US">
+                        <a:solidFill>
+                          <a:schemeClr val="tx1"/>
+                        </a:solidFill>
+                      </a:endParaRPr>
+                    </a:p>
+                  </a:txBody>
+                  <a:tcPr>
+                    <a:lnL w="12700" cmpd="sng">
+                      <a:solidFill>
+                        <a:schemeClr val="tx1"/>
+                      </a:solidFill>
+                      <a:prstDash val="solid"/>
+                    </a:lnL>
+                    <a:lnR w="12700" cmpd="sng">
+                      <a:solidFill>
+                        <a:schemeClr val="tx1"/>
+                      </a:solidFill>
+                      <a:prstDash val="solid"/>
+                    </a:lnR>
+                    <a:lnT w="12700" cmpd="sng">
+                      <a:solidFill>
+                        <a:schemeClr val="tx1"/>
+                      </a:solidFill>
+                      <a:prstDash val="solid"/>
+                    </a:lnT>
+                    <a:lnB w="12700" cmpd="sng">
+                      <a:solidFill>
+                        <a:schemeClr val="tx1"/>
+                      </a:solidFill>
+                      <a:prstDash val="solid"/>
+                    </a:lnB>
+                    <a:solidFill>
+                      <a:schemeClr val="tx1"/>
+                    </a:solidFill>
+                  </a:tcPr>
+                </a:tc>
+                <a:tc>
+                  <a:txBody>
+                    <a:bodyPr/>
+                    <a:p>
+                      <a:pPr>
+                        <a:buNone/>
+                      </a:pPr>
+                      <a:endParaRPr lang="zh-CN" altLang="en-US">
+                        <a:solidFill>
+                          <a:schemeClr val="tx1"/>
+                        </a:solidFill>
+                      </a:endParaRPr>
+                    </a:p>
+                  </a:txBody>
+                  <a:tcPr>
+                    <a:lnL w="12700" cmpd="sng">
+                      <a:solidFill>
+                        <a:schemeClr val="tx1"/>
+                      </a:solidFill>
+                      <a:prstDash val="solid"/>
+                    </a:lnL>
+                    <a:lnR w="12700" cmpd="sng">
+                      <a:solidFill>
+                        <a:schemeClr val="tx1"/>
+                      </a:solidFill>
+                      <a:prstDash val="solid"/>
+                    </a:lnR>
+                    <a:lnT w="12700" cmpd="sng">
+                      <a:solidFill>
+                        <a:schemeClr val="tx1"/>
+                      </a:solidFill>
+                      <a:prstDash val="solid"/>
+                    </a:lnT>
+                    <a:lnB w="12700" cmpd="sng">
+                      <a:solidFill>
+                        <a:schemeClr val="tx1"/>
+                      </a:solidFill>
+                      <a:prstDash val="solid"/>
+                    </a:lnB>
+                    <a:solidFill>
+                      <a:schemeClr val="bg1"/>
+                    </a:solidFill>
+                  </a:tcPr>
+                </a:tc>
+                <a:tc>
+                  <a:txBody>
+                    <a:bodyPr/>
+                    <a:p>
+                      <a:pPr>
+                        <a:buNone/>
+                      </a:pPr>
+                      <a:endParaRPr lang="zh-CN" altLang="en-US">
+                        <a:solidFill>
+                          <a:schemeClr val="tx1"/>
+                        </a:solidFill>
+                      </a:endParaRPr>
+                    </a:p>
+                  </a:txBody>
+                  <a:tcPr>
+                    <a:lnL w="12700" cmpd="sng">
+                      <a:solidFill>
+                        <a:schemeClr val="tx1"/>
+                      </a:solidFill>
+                      <a:prstDash val="solid"/>
+                    </a:lnL>
+                    <a:lnR w="12700" cmpd="sng">
+                      <a:solidFill>
+                        <a:schemeClr val="tx1"/>
+                      </a:solidFill>
+                      <a:prstDash val="solid"/>
+                    </a:lnR>
+                    <a:lnT w="12700" cmpd="sng">
+                      <a:solidFill>
+                        <a:schemeClr val="tx1"/>
+                      </a:solidFill>
+                      <a:prstDash val="solid"/>
+                    </a:lnT>
+                    <a:lnB w="12700" cmpd="sng">
+                      <a:solidFill>
+                        <a:schemeClr val="tx1"/>
+                      </a:solidFill>
+                      <a:prstDash val="solid"/>
+                    </a:lnB>
+                    <a:solidFill>
+                      <a:schemeClr val="tx1"/>
+                    </a:solidFill>
+                  </a:tcPr>
+                </a:tc>
+              </a:tr>
+              <a:tr h="540000">
+                <a:tc>
+                  <a:txBody>
+                    <a:bodyPr/>
+                    <a:p>
+                      <a:pPr>
+                        <a:buNone/>
+                      </a:pPr>
+                      <a:endParaRPr lang="zh-CN" altLang="en-US">
+                        <a:solidFill>
+                          <a:schemeClr val="tx1"/>
+                        </a:solidFill>
+                      </a:endParaRPr>
+                    </a:p>
+                  </a:txBody>
+                  <a:tcPr>
+                    <a:lnL w="12700" cmpd="sng">
+                      <a:solidFill>
+                        <a:schemeClr val="tx1"/>
+                      </a:solidFill>
+                      <a:prstDash val="solid"/>
+                    </a:lnL>
+                    <a:lnR w="12700" cmpd="sng">
+                      <a:solidFill>
+                        <a:schemeClr val="tx1"/>
+                      </a:solidFill>
+                      <a:prstDash val="solid"/>
+                    </a:lnR>
+                    <a:lnT w="12700" cmpd="sng">
+                      <a:solidFill>
+                        <a:schemeClr val="tx1"/>
+                      </a:solidFill>
+                      <a:prstDash val="solid"/>
+                    </a:lnT>
+                    <a:lnB w="12700" cmpd="sng">
+                      <a:solidFill>
+                        <a:schemeClr val="tx1"/>
+                      </a:solidFill>
+                      <a:prstDash val="solid"/>
+                    </a:lnB>
+                    <a:solidFill>
+                      <a:schemeClr val="tx1"/>
+                    </a:solidFill>
+                  </a:tcPr>
+                </a:tc>
+                <a:tc>
+                  <a:txBody>
+                    <a:bodyPr/>
+                    <a:p>
+                      <a:pPr>
+                        <a:buNone/>
+                      </a:pPr>
+                      <a:endParaRPr lang="zh-CN" altLang="en-US">
+                        <a:solidFill>
+                          <a:schemeClr val="tx1"/>
+                        </a:solidFill>
+                      </a:endParaRPr>
+                    </a:p>
+                  </a:txBody>
+                  <a:tcPr>
+                    <a:lnL w="12700" cmpd="sng">
+                      <a:solidFill>
+                        <a:schemeClr val="tx1"/>
+                      </a:solidFill>
+                      <a:prstDash val="solid"/>
+                    </a:lnL>
+                    <a:lnR w="12700" cmpd="sng">
+                      <a:solidFill>
+                        <a:schemeClr val="tx1"/>
+                      </a:solidFill>
+                      <a:prstDash val="solid"/>
+                    </a:lnR>
+                    <a:lnT w="12700" cmpd="sng">
+                      <a:solidFill>
+                        <a:schemeClr val="tx1"/>
+                      </a:solidFill>
+                      <a:prstDash val="solid"/>
+                    </a:lnT>
+                    <a:lnB w="12700" cmpd="sng">
+                      <a:solidFill>
+                        <a:schemeClr val="tx1"/>
+                      </a:solidFill>
+                      <a:prstDash val="solid"/>
+                    </a:lnB>
+                    <a:solidFill>
+                      <a:schemeClr val="bg1"/>
+                    </a:solidFill>
+                  </a:tcPr>
+                </a:tc>
+                <a:tc>
+                  <a:txBody>
+                    <a:bodyPr/>
+                    <a:p>
+                      <a:pPr>
+                        <a:buNone/>
+                      </a:pPr>
+                      <a:endParaRPr lang="zh-CN" altLang="en-US">
+                        <a:solidFill>
+                          <a:schemeClr val="tx1"/>
+                        </a:solidFill>
+                      </a:endParaRPr>
+                    </a:p>
+                  </a:txBody>
+                  <a:tcPr>
+                    <a:lnL w="12700" cmpd="sng">
+                      <a:solidFill>
+                        <a:schemeClr val="tx1"/>
+                      </a:solidFill>
+                      <a:prstDash val="solid"/>
+                    </a:lnL>
+                    <a:lnR w="12700" cmpd="sng">
+                      <a:solidFill>
+                        <a:schemeClr val="tx1"/>
+                      </a:solidFill>
+                      <a:prstDash val="solid"/>
+                    </a:lnR>
+                    <a:lnT w="12700" cmpd="sng">
+                      <a:solidFill>
+                        <a:schemeClr val="tx1"/>
+                      </a:solidFill>
+                      <a:prstDash val="solid"/>
+                    </a:lnT>
+                    <a:lnB w="12700" cmpd="sng">
+                      <a:solidFill>
+                        <a:schemeClr val="tx1"/>
+                      </a:solidFill>
+                      <a:prstDash val="solid"/>
+                    </a:lnB>
+                    <a:solidFill>
+                      <a:schemeClr val="tx1"/>
+                    </a:solidFill>
+                  </a:tcPr>
+                </a:tc>
+                <a:tc>
+                  <a:txBody>
+                    <a:bodyPr/>
+                    <a:p>
+                      <a:pPr>
+                        <a:buNone/>
+                      </a:pPr>
+                      <a:endParaRPr lang="zh-CN" altLang="en-US">
+                        <a:solidFill>
+                          <a:schemeClr val="tx1"/>
+                        </a:solidFill>
+                      </a:endParaRPr>
+                    </a:p>
+                  </a:txBody>
+                  <a:tcPr>
+                    <a:lnL w="12700" cmpd="sng">
+                      <a:solidFill>
+                        <a:schemeClr val="tx1"/>
+                      </a:solidFill>
+                      <a:prstDash val="solid"/>
+                    </a:lnL>
+                    <a:lnR w="12700" cmpd="sng">
+                      <a:solidFill>
+                        <a:schemeClr val="tx1"/>
+                      </a:solidFill>
+                      <a:prstDash val="solid"/>
+                    </a:lnR>
+                    <a:lnT w="12700" cmpd="sng">
+                      <a:solidFill>
+                        <a:schemeClr val="tx1"/>
+                      </a:solidFill>
+                      <a:prstDash val="solid"/>
+                    </a:lnT>
+                    <a:lnB w="12700" cmpd="sng">
+                      <a:solidFill>
+                        <a:schemeClr val="tx1"/>
+                      </a:solidFill>
+                      <a:prstDash val="solid"/>
+                    </a:lnB>
+                    <a:solidFill>
+                      <a:schemeClr val="bg1"/>
+                    </a:solidFill>
+                  </a:tcPr>
+                </a:tc>
+                <a:tc>
+                  <a:txBody>
+                    <a:bodyPr/>
+                    <a:p>
+                      <a:pPr>
+                        <a:buNone/>
+                      </a:pPr>
+                      <a:endParaRPr lang="zh-CN" altLang="en-US">
+                        <a:solidFill>
+                          <a:schemeClr val="tx1"/>
+                        </a:solidFill>
+                      </a:endParaRPr>
+                    </a:p>
+                  </a:txBody>
+                  <a:tcPr>
+                    <a:lnL w="12700" cmpd="sng">
+                      <a:solidFill>
+                        <a:schemeClr val="tx1"/>
+                      </a:solidFill>
+                      <a:prstDash val="solid"/>
+                    </a:lnL>
+                    <a:lnR w="12700" cmpd="sng">
+                      <a:solidFill>
+                        <a:schemeClr val="tx1"/>
+                      </a:solidFill>
+                      <a:prstDash val="solid"/>
+                    </a:lnR>
+                    <a:lnT w="12700" cmpd="sng">
+                      <a:solidFill>
+                        <a:schemeClr val="tx1"/>
+                      </a:solidFill>
+                      <a:prstDash val="solid"/>
+                    </a:lnT>
+                    <a:lnB w="12700" cmpd="sng">
+                      <a:solidFill>
+                        <a:schemeClr val="tx1"/>
+                      </a:solidFill>
+                      <a:prstDash val="solid"/>
+                    </a:lnB>
+                    <a:solidFill>
+                      <a:schemeClr val="tx1"/>
+                    </a:solidFill>
+                  </a:tcPr>
+                </a:tc>
+                <a:tc>
+                  <a:txBody>
+                    <a:bodyPr/>
+                    <a:p>
+                      <a:pPr>
+                        <a:buNone/>
+                      </a:pPr>
+                      <a:endParaRPr lang="zh-CN" altLang="en-US">
+                        <a:solidFill>
+                          <a:schemeClr val="tx1"/>
+                        </a:solidFill>
+                      </a:endParaRPr>
+                    </a:p>
+                  </a:txBody>
+                  <a:tcPr>
+                    <a:lnL w="12700" cmpd="sng">
+                      <a:solidFill>
+                        <a:schemeClr val="tx1"/>
+                      </a:solidFill>
+                      <a:prstDash val="solid"/>
+                    </a:lnL>
+                    <a:lnR w="12700" cmpd="sng">
+                      <a:solidFill>
+                        <a:schemeClr val="tx1"/>
+                      </a:solidFill>
+                      <a:prstDash val="solid"/>
+                    </a:lnR>
+                    <a:lnT w="12700" cmpd="sng">
+                      <a:solidFill>
+                        <a:schemeClr val="tx1"/>
+                      </a:solidFill>
+                      <a:prstDash val="solid"/>
+                    </a:lnT>
+                    <a:lnB w="12700" cmpd="sng">
+                      <a:solidFill>
+                        <a:schemeClr val="tx1"/>
+                      </a:solidFill>
+                      <a:prstDash val="solid"/>
+                    </a:lnB>
+                    <a:solidFill>
+                      <a:schemeClr val="bg1"/>
+                    </a:solidFill>
+                  </a:tcPr>
+                </a:tc>
+              </a:tr>
+              <a:tr h="540000">
+                <a:tc>
+                  <a:txBody>
+                    <a:bodyPr/>
+                    <a:p>
+                      <a:pPr>
+                        <a:buNone/>
+                      </a:pPr>
+                      <a:endParaRPr lang="zh-CN" altLang="en-US">
+                        <a:solidFill>
+                          <a:schemeClr val="tx1"/>
+                        </a:solidFill>
+                      </a:endParaRPr>
+                    </a:p>
+                  </a:txBody>
+                  <a:tcPr>
+                    <a:lnL w="12700" cmpd="sng">
+                      <a:solidFill>
+                        <a:schemeClr val="tx1"/>
+                      </a:solidFill>
+                      <a:prstDash val="solid"/>
+                    </a:lnL>
+                    <a:lnR w="12700" cmpd="sng">
+                      <a:solidFill>
+                        <a:schemeClr val="tx1"/>
+                      </a:solidFill>
+                      <a:prstDash val="solid"/>
+                    </a:lnR>
+                    <a:lnT w="12700" cmpd="sng">
+                      <a:solidFill>
+                        <a:schemeClr val="tx1"/>
+                      </a:solidFill>
+                      <a:prstDash val="solid"/>
+                    </a:lnT>
+                    <a:lnB w="12700" cmpd="sng">
+                      <a:solidFill>
+                        <a:schemeClr val="tx1"/>
+                      </a:solidFill>
+                      <a:prstDash val="solid"/>
+                    </a:lnB>
+                    <a:solidFill>
+                      <a:schemeClr val="bg1"/>
+                    </a:solidFill>
+                  </a:tcPr>
+                </a:tc>
+                <a:tc>
+                  <a:txBody>
+                    <a:bodyPr/>
+                    <a:p>
+                      <a:pPr>
+                        <a:buNone/>
+                      </a:pPr>
+                      <a:endParaRPr lang="zh-CN" altLang="en-US">
+                        <a:solidFill>
+                          <a:schemeClr val="tx1"/>
+                        </a:solidFill>
+                      </a:endParaRPr>
+                    </a:p>
+                  </a:txBody>
+                  <a:tcPr>
+                    <a:lnL w="12700" cmpd="sng">
+                      <a:solidFill>
+                        <a:schemeClr val="tx1"/>
+                      </a:solidFill>
+                      <a:prstDash val="solid"/>
+                    </a:lnL>
+                    <a:lnR w="12700" cmpd="sng">
+                      <a:solidFill>
+                        <a:schemeClr val="tx1"/>
+                      </a:solidFill>
+                      <a:prstDash val="solid"/>
+                    </a:lnR>
+                    <a:lnT w="12700" cmpd="sng">
+                      <a:solidFill>
+                        <a:schemeClr val="tx1"/>
+                      </a:solidFill>
+                      <a:prstDash val="solid"/>
+                    </a:lnT>
+                    <a:lnB w="12700" cmpd="sng">
+                      <a:solidFill>
+                        <a:schemeClr val="tx1"/>
+                      </a:solidFill>
+                      <a:prstDash val="solid"/>
+                    </a:lnB>
+                    <a:solidFill>
+                      <a:schemeClr val="tx1"/>
+                    </a:solidFill>
+                  </a:tcPr>
+                </a:tc>
+                <a:tc>
+                  <a:txBody>
+                    <a:bodyPr/>
+                    <a:p>
+                      <a:pPr>
+                        <a:buNone/>
+                      </a:pPr>
+                      <a:endParaRPr lang="zh-CN" altLang="en-US">
+                        <a:solidFill>
+                          <a:schemeClr val="tx1"/>
+                        </a:solidFill>
+                      </a:endParaRPr>
+                    </a:p>
+                  </a:txBody>
+                  <a:tcPr>
+                    <a:lnL w="12700" cmpd="sng">
+                      <a:solidFill>
+                        <a:schemeClr val="tx1"/>
+                      </a:solidFill>
+                      <a:prstDash val="solid"/>
+                    </a:lnL>
+                    <a:lnR w="12700" cmpd="sng">
+                      <a:solidFill>
+                        <a:schemeClr val="tx1"/>
+                      </a:solidFill>
+                      <a:prstDash val="solid"/>
+                    </a:lnR>
+                    <a:lnT w="12700" cmpd="sng">
+                      <a:solidFill>
+                        <a:schemeClr val="tx1"/>
+                      </a:solidFill>
+                      <a:prstDash val="solid"/>
+                    </a:lnT>
+                    <a:lnB w="12700" cmpd="sng">
+                      <a:solidFill>
+                        <a:schemeClr val="tx1"/>
+                      </a:solidFill>
+                      <a:prstDash val="solid"/>
+                    </a:lnB>
+                    <a:solidFill>
+                      <a:schemeClr val="bg1"/>
+                    </a:solidFill>
+                  </a:tcPr>
+                </a:tc>
+                <a:tc>
+                  <a:txBody>
+                    <a:bodyPr/>
+                    <a:p>
+                      <a:pPr>
+                        <a:buNone/>
+                      </a:pPr>
+                      <a:endParaRPr lang="zh-CN" altLang="en-US">
+                        <a:solidFill>
+                          <a:schemeClr val="tx1"/>
+                        </a:solidFill>
+                      </a:endParaRPr>
+                    </a:p>
+                  </a:txBody>
+                  <a:tcPr>
+                    <a:lnL w="12700" cmpd="sng">
+                      <a:solidFill>
+                        <a:schemeClr val="tx1"/>
+                      </a:solidFill>
+                      <a:prstDash val="solid"/>
+                    </a:lnL>
+                    <a:lnR w="12700" cmpd="sng">
+                      <a:solidFill>
+                        <a:schemeClr val="tx1"/>
+                      </a:solidFill>
+                      <a:prstDash val="solid"/>
+                    </a:lnR>
+                    <a:lnT w="12700" cmpd="sng">
+                      <a:solidFill>
+                        <a:schemeClr val="tx1"/>
+                      </a:solidFill>
+                      <a:prstDash val="solid"/>
+                    </a:lnT>
+                    <a:lnB w="12700" cmpd="sng">
+                      <a:solidFill>
+                        <a:schemeClr val="tx1"/>
+                      </a:solidFill>
+                      <a:prstDash val="solid"/>
+                    </a:lnB>
+                    <a:solidFill>
+                      <a:schemeClr val="tx1"/>
+                    </a:solidFill>
+                  </a:tcPr>
+                </a:tc>
+                <a:tc>
+                  <a:txBody>
+                    <a:bodyPr/>
+                    <a:p>
+                      <a:pPr>
+                        <a:buNone/>
+                      </a:pPr>
+                      <a:endParaRPr lang="zh-CN" altLang="en-US">
+                        <a:solidFill>
+                          <a:schemeClr val="tx1"/>
+                        </a:solidFill>
+                      </a:endParaRPr>
+                    </a:p>
+                  </a:txBody>
+                  <a:tcPr>
+                    <a:lnL w="12700" cmpd="sng">
+                      <a:solidFill>
+                        <a:schemeClr val="tx1"/>
+                      </a:solidFill>
+                      <a:prstDash val="solid"/>
+                    </a:lnL>
+                    <a:lnR w="12700" cmpd="sng">
+                      <a:solidFill>
+                        <a:schemeClr val="tx1"/>
+                      </a:solidFill>
+                      <a:prstDash val="solid"/>
+                    </a:lnR>
+                    <a:lnT w="12700" cmpd="sng">
+                      <a:solidFill>
+                        <a:schemeClr val="tx1"/>
+                      </a:solidFill>
+                      <a:prstDash val="solid"/>
+                    </a:lnT>
+                    <a:lnB w="12700" cmpd="sng">
+                      <a:solidFill>
+                        <a:schemeClr val="tx1"/>
+                      </a:solidFill>
+                      <a:prstDash val="solid"/>
+                    </a:lnB>
+                    <a:solidFill>
+                      <a:schemeClr val="bg1"/>
+                    </a:solidFill>
+                  </a:tcPr>
+                </a:tc>
+                <a:tc>
+                  <a:txBody>
+                    <a:bodyPr/>
+                    <a:p>
+                      <a:pPr>
+                        <a:buNone/>
+                      </a:pPr>
+                      <a:endParaRPr lang="zh-CN" altLang="en-US">
+                        <a:solidFill>
+                          <a:schemeClr val="tx1"/>
+                        </a:solidFill>
+                      </a:endParaRPr>
+                    </a:p>
+                  </a:txBody>
+                  <a:tcPr>
+                    <a:lnL w="12700" cmpd="sng">
+                      <a:solidFill>
+                        <a:schemeClr val="tx1"/>
+                      </a:solidFill>
+                      <a:prstDash val="solid"/>
+                    </a:lnL>
+                    <a:lnR w="12700" cmpd="sng">
+                      <a:solidFill>
+                        <a:schemeClr val="tx1"/>
+                      </a:solidFill>
+                      <a:prstDash val="solid"/>
+                    </a:lnR>
+                    <a:lnT w="12700" cmpd="sng">
+                      <a:solidFill>
+                        <a:schemeClr val="tx1"/>
+                      </a:solidFill>
+                      <a:prstDash val="solid"/>
+                    </a:lnT>
+                    <a:lnB w="12700" cmpd="sng">
+                      <a:solidFill>
+                        <a:schemeClr val="tx1"/>
+                      </a:solidFill>
+                      <a:prstDash val="solid"/>
+                    </a:lnB>
+                    <a:solidFill>
+                      <a:schemeClr val="tx1"/>
+                    </a:solidFill>
+                  </a:tcPr>
+                </a:tc>
+              </a:tr>
+              <a:tr h="540000">
+                <a:tc>
+                  <a:txBody>
+                    <a:bodyPr/>
+                    <a:p>
+                      <a:pPr>
+                        <a:buNone/>
+                      </a:pPr>
+                      <a:endParaRPr lang="zh-CN" altLang="en-US">
+                        <a:solidFill>
+                          <a:schemeClr val="tx1"/>
+                        </a:solidFill>
+                      </a:endParaRPr>
+                    </a:p>
+                  </a:txBody>
+                  <a:tcPr>
+                    <a:lnL w="12700" cmpd="sng">
+                      <a:solidFill>
+                        <a:schemeClr val="tx1"/>
+                      </a:solidFill>
+                      <a:prstDash val="solid"/>
+                    </a:lnL>
+                    <a:lnR w="12700" cmpd="sng">
+                      <a:solidFill>
+                        <a:schemeClr val="tx1"/>
+                      </a:solidFill>
+                      <a:prstDash val="solid"/>
+                    </a:lnR>
+                    <a:lnT w="12700" cmpd="sng">
+                      <a:solidFill>
+                        <a:schemeClr val="tx1"/>
+                      </a:solidFill>
+                      <a:prstDash val="solid"/>
+                    </a:lnT>
+                    <a:lnB w="12700" cmpd="sng">
+                      <a:solidFill>
+                        <a:schemeClr val="tx1"/>
+                      </a:solidFill>
+                      <a:prstDash val="solid"/>
+                    </a:lnB>
+                    <a:solidFill>
+                      <a:schemeClr val="tx1"/>
+                    </a:solidFill>
+                  </a:tcPr>
+                </a:tc>
+                <a:tc>
+                  <a:txBody>
+                    <a:bodyPr/>
+                    <a:p>
+                      <a:pPr>
+                        <a:buNone/>
+                      </a:pPr>
+                      <a:endParaRPr lang="zh-CN" altLang="en-US">
+                        <a:solidFill>
+                          <a:schemeClr val="tx1"/>
+                        </a:solidFill>
+                      </a:endParaRPr>
+                    </a:p>
+                  </a:txBody>
+                  <a:tcPr>
+                    <a:lnL w="12700" cmpd="sng">
+                      <a:solidFill>
+                        <a:schemeClr val="tx1"/>
+                      </a:solidFill>
+                      <a:prstDash val="solid"/>
+                    </a:lnL>
+                    <a:lnR w="12700" cmpd="sng">
+                      <a:solidFill>
+                        <a:schemeClr val="tx1"/>
+                      </a:solidFill>
+                      <a:prstDash val="solid"/>
+                    </a:lnR>
+                    <a:lnT w="12700" cmpd="sng">
+                      <a:solidFill>
+                        <a:schemeClr val="tx1"/>
+                      </a:solidFill>
+                      <a:prstDash val="solid"/>
+                    </a:lnT>
+                    <a:lnB w="12700" cmpd="sng">
+                      <a:solidFill>
+                        <a:schemeClr val="tx1"/>
+                      </a:solidFill>
+                      <a:prstDash val="solid"/>
+                    </a:lnB>
+                    <a:solidFill>
+                      <a:schemeClr val="bg1"/>
+                    </a:solidFill>
+                  </a:tcPr>
+                </a:tc>
+                <a:tc>
+                  <a:txBody>
+                    <a:bodyPr/>
+                    <a:p>
+                      <a:pPr>
+                        <a:buNone/>
+                      </a:pPr>
+                      <a:endParaRPr lang="zh-CN" altLang="en-US">
+                        <a:solidFill>
+                          <a:schemeClr val="tx1"/>
+                        </a:solidFill>
+                      </a:endParaRPr>
+                    </a:p>
+                  </a:txBody>
+                  <a:tcPr>
+                    <a:lnL w="12700" cmpd="sng">
+                      <a:solidFill>
+                        <a:schemeClr val="tx1"/>
+                      </a:solidFill>
+                      <a:prstDash val="solid"/>
+                    </a:lnL>
+                    <a:lnR w="12700" cmpd="sng">
+                      <a:solidFill>
+                        <a:schemeClr val="tx1"/>
+                      </a:solidFill>
+                      <a:prstDash val="solid"/>
+                    </a:lnR>
+                    <a:lnT w="12700" cmpd="sng">
+                      <a:solidFill>
+                        <a:schemeClr val="tx1"/>
+                      </a:solidFill>
+                      <a:prstDash val="solid"/>
+                    </a:lnT>
+                    <a:lnB w="12700" cmpd="sng">
+                      <a:solidFill>
+                        <a:schemeClr val="tx1"/>
+                      </a:solidFill>
+                      <a:prstDash val="solid"/>
+                    </a:lnB>
+                    <a:solidFill>
+                      <a:schemeClr val="tx1"/>
+                    </a:solidFill>
+                  </a:tcPr>
+                </a:tc>
+                <a:tc>
+                  <a:txBody>
+                    <a:bodyPr/>
+                    <a:p>
+                      <a:pPr>
+                        <a:buNone/>
+                      </a:pPr>
+                      <a:endParaRPr lang="zh-CN" altLang="en-US">
+                        <a:solidFill>
+                          <a:schemeClr val="tx1"/>
+                        </a:solidFill>
+                      </a:endParaRPr>
+                    </a:p>
+                  </a:txBody>
+                  <a:tcPr>
+                    <a:lnL w="12700" cmpd="sng">
+                      <a:solidFill>
+                        <a:schemeClr val="tx1"/>
+                      </a:solidFill>
+                      <a:prstDash val="solid"/>
+                    </a:lnL>
+                    <a:lnR w="12700" cmpd="sng">
+                      <a:solidFill>
+                        <a:schemeClr val="tx1"/>
+                      </a:solidFill>
+                      <a:prstDash val="solid"/>
+                    </a:lnR>
+                    <a:lnT w="12700" cmpd="sng">
+                      <a:solidFill>
+                        <a:schemeClr val="tx1"/>
+                      </a:solidFill>
+                      <a:prstDash val="solid"/>
+                    </a:lnT>
+                    <a:lnB w="12700" cmpd="sng">
+                      <a:solidFill>
+                        <a:schemeClr val="tx1"/>
+                      </a:solidFill>
+                      <a:prstDash val="solid"/>
+                    </a:lnB>
+                    <a:solidFill>
+                      <a:schemeClr val="bg1"/>
+                    </a:solidFill>
+                  </a:tcPr>
+                </a:tc>
+                <a:tc>
+                  <a:txBody>
+                    <a:bodyPr/>
+                    <a:p>
+                      <a:pPr>
+                        <a:buNone/>
+                      </a:pPr>
+                      <a:endParaRPr lang="zh-CN" altLang="en-US">
+                        <a:solidFill>
+                          <a:schemeClr val="tx1"/>
+                        </a:solidFill>
+                      </a:endParaRPr>
+                    </a:p>
+                  </a:txBody>
+                  <a:tcPr>
+                    <a:lnL w="12700" cmpd="sng">
+                      <a:solidFill>
+                        <a:schemeClr val="tx1"/>
+                      </a:solidFill>
+                      <a:prstDash val="solid"/>
+                    </a:lnL>
+                    <a:lnR w="12700" cmpd="sng">
+                      <a:solidFill>
+                        <a:schemeClr val="tx1"/>
+                      </a:solidFill>
+                      <a:prstDash val="solid"/>
+                    </a:lnR>
+                    <a:lnT w="12700" cmpd="sng">
+                      <a:solidFill>
+                        <a:schemeClr val="tx1"/>
+                      </a:solidFill>
+                      <a:prstDash val="solid"/>
+                    </a:lnT>
+                    <a:lnB w="12700" cmpd="sng">
+                      <a:solidFill>
+                        <a:schemeClr val="tx1"/>
+                      </a:solidFill>
+                      <a:prstDash val="solid"/>
+                    </a:lnB>
+                    <a:solidFill>
+                      <a:schemeClr val="tx1"/>
+                    </a:solidFill>
+                  </a:tcPr>
+                </a:tc>
+                <a:tc>
+                  <a:txBody>
+                    <a:bodyPr/>
+                    <a:p>
+                      <a:pPr>
+                        <a:buNone/>
+                      </a:pPr>
+                      <a:endParaRPr lang="zh-CN" altLang="en-US">
+                        <a:solidFill>
+                          <a:schemeClr val="tx1"/>
+                        </a:solidFill>
+                      </a:endParaRPr>
+                    </a:p>
+                  </a:txBody>
+                  <a:tcPr>
+                    <a:lnL w="12700" cmpd="sng">
+                      <a:solidFill>
+                        <a:schemeClr val="tx1"/>
+                      </a:solidFill>
+                      <a:prstDash val="solid"/>
+                    </a:lnL>
+                    <a:lnR w="12700" cmpd="sng">
+                      <a:solidFill>
+                        <a:schemeClr val="tx1"/>
+                      </a:solidFill>
+                      <a:prstDash val="solid"/>
+                    </a:lnR>
+                    <a:lnT w="12700" cmpd="sng">
+                      <a:solidFill>
+                        <a:schemeClr val="tx1"/>
+                      </a:solidFill>
+                      <a:prstDash val="solid"/>
+                    </a:lnT>
+                    <a:lnB w="12700" cmpd="sng">
+                      <a:solidFill>
+                        <a:schemeClr val="tx1"/>
+                      </a:solidFill>
+                      <a:prstDash val="solid"/>
+                    </a:lnB>
+                    <a:solidFill>
+                      <a:schemeClr val="bg1"/>
+                    </a:solidFill>
+                  </a:tcPr>
+                </a:tc>
+              </a:tr>
+              <a:tr h="540000">
+                <a:tc>
+                  <a:txBody>
+                    <a:bodyPr/>
+                    <a:p>
+                      <a:pPr>
+                        <a:buNone/>
+                      </a:pPr>
+                      <a:endParaRPr lang="zh-CN" altLang="en-US">
+                        <a:solidFill>
+                          <a:schemeClr val="tx1"/>
+                        </a:solidFill>
+                      </a:endParaRPr>
+                    </a:p>
+                  </a:txBody>
+                  <a:tcPr>
+                    <a:lnL w="12700" cmpd="sng">
+                      <a:solidFill>
+                        <a:schemeClr val="tx1"/>
+                      </a:solidFill>
+                      <a:prstDash val="solid"/>
+                    </a:lnL>
+                    <a:lnR w="12700" cmpd="sng">
+                      <a:solidFill>
+                        <a:schemeClr val="tx1"/>
+                      </a:solidFill>
+                      <a:prstDash val="solid"/>
+                    </a:lnR>
+                    <a:lnT w="12700" cmpd="sng">
+                      <a:solidFill>
+                        <a:schemeClr val="tx1"/>
+                      </a:solidFill>
+                      <a:prstDash val="solid"/>
+                    </a:lnT>
+                    <a:lnB w="12700" cmpd="sng">
+                      <a:solidFill>
+                        <a:schemeClr val="tx1"/>
+                      </a:solidFill>
+                      <a:prstDash val="solid"/>
+                    </a:lnB>
+                    <a:solidFill>
+                      <a:schemeClr val="bg1"/>
+                    </a:solidFill>
+                  </a:tcPr>
+                </a:tc>
+                <a:tc>
+                  <a:txBody>
+                    <a:bodyPr/>
+                    <a:p>
+                      <a:pPr>
+                        <a:buNone/>
+                      </a:pPr>
+                      <a:endParaRPr lang="zh-CN" altLang="en-US">
+                        <a:solidFill>
+                          <a:schemeClr val="tx1"/>
+                        </a:solidFill>
+                      </a:endParaRPr>
+                    </a:p>
+                  </a:txBody>
+                  <a:tcPr>
+                    <a:lnL w="12700" cmpd="sng">
+                      <a:solidFill>
+                        <a:schemeClr val="tx1"/>
+                      </a:solidFill>
+                      <a:prstDash val="solid"/>
+                    </a:lnL>
+                    <a:lnR w="12700" cmpd="sng">
+                      <a:solidFill>
+                        <a:schemeClr val="tx1"/>
+                      </a:solidFill>
+                      <a:prstDash val="solid"/>
+                    </a:lnR>
+                    <a:lnT w="12700" cmpd="sng">
+                      <a:solidFill>
+                        <a:schemeClr val="tx1"/>
+                      </a:solidFill>
+                      <a:prstDash val="solid"/>
+                    </a:lnT>
+                    <a:lnB w="12700" cmpd="sng">
+                      <a:solidFill>
+                        <a:schemeClr val="tx1"/>
+                      </a:solidFill>
+                      <a:prstDash val="solid"/>
+                    </a:lnB>
+                    <a:solidFill>
+                      <a:schemeClr val="tx1"/>
+                    </a:solidFill>
+                  </a:tcPr>
+                </a:tc>
+                <a:tc>
+                  <a:txBody>
+                    <a:bodyPr/>
+                    <a:p>
+                      <a:pPr>
+                        <a:buNone/>
+                      </a:pPr>
+                      <a:endParaRPr lang="zh-CN" altLang="en-US">
+                        <a:solidFill>
+                          <a:schemeClr val="tx1"/>
+                        </a:solidFill>
+                      </a:endParaRPr>
+                    </a:p>
+                  </a:txBody>
+                  <a:tcPr>
+                    <a:lnL w="12700" cmpd="sng">
+                      <a:solidFill>
+                        <a:schemeClr val="tx1"/>
+                      </a:solidFill>
+                      <a:prstDash val="solid"/>
+                    </a:lnL>
+                    <a:lnR w="12700" cmpd="sng">
+                      <a:solidFill>
+                        <a:schemeClr val="tx1"/>
+                      </a:solidFill>
+                      <a:prstDash val="solid"/>
+                    </a:lnR>
+                    <a:lnT w="12700" cmpd="sng">
+                      <a:solidFill>
+                        <a:schemeClr val="tx1"/>
+                      </a:solidFill>
+                      <a:prstDash val="solid"/>
+                    </a:lnT>
+                    <a:lnB w="12700" cmpd="sng">
+                      <a:solidFill>
+                        <a:schemeClr val="tx1"/>
+                      </a:solidFill>
+                      <a:prstDash val="solid"/>
+                    </a:lnB>
+                    <a:solidFill>
+                      <a:schemeClr val="bg1"/>
+                    </a:solidFill>
+                  </a:tcPr>
+                </a:tc>
+                <a:tc>
+                  <a:txBody>
+                    <a:bodyPr/>
+                    <a:p>
+                      <a:pPr>
+                        <a:buNone/>
+                      </a:pPr>
+                      <a:endParaRPr lang="zh-CN" altLang="en-US">
+                        <a:solidFill>
+                          <a:schemeClr val="tx1"/>
+                        </a:solidFill>
+                      </a:endParaRPr>
+                    </a:p>
+                  </a:txBody>
+                  <a:tcPr>
+                    <a:lnL w="12700" cmpd="sng">
+                      <a:solidFill>
+                        <a:schemeClr val="tx1"/>
+                      </a:solidFill>
+                      <a:prstDash val="solid"/>
+                    </a:lnL>
+                    <a:lnR w="12700" cmpd="sng">
+                      <a:solidFill>
+                        <a:schemeClr val="tx1"/>
+                      </a:solidFill>
+                      <a:prstDash val="solid"/>
+                    </a:lnR>
+                    <a:lnT w="12700" cmpd="sng">
+                      <a:solidFill>
+                        <a:schemeClr val="tx1"/>
+                      </a:solidFill>
+                      <a:prstDash val="solid"/>
+                    </a:lnT>
+                    <a:lnB w="12700" cmpd="sng">
+                      <a:solidFill>
+                        <a:schemeClr val="tx1"/>
+                      </a:solidFill>
+                      <a:prstDash val="solid"/>
+                    </a:lnB>
+                    <a:solidFill>
+                      <a:schemeClr val="tx1"/>
+                    </a:solidFill>
+                  </a:tcPr>
+                </a:tc>
+                <a:tc>
+                  <a:txBody>
+                    <a:bodyPr/>
+                    <a:p>
+                      <a:pPr>
+                        <a:buNone/>
+                      </a:pPr>
+                      <a:endParaRPr lang="zh-CN" altLang="en-US">
+                        <a:solidFill>
+                          <a:schemeClr val="tx1"/>
+                        </a:solidFill>
+                      </a:endParaRPr>
+                    </a:p>
+                  </a:txBody>
+                  <a:tcPr>
+                    <a:lnL w="12700" cmpd="sng">
+                      <a:solidFill>
+                        <a:schemeClr val="tx1"/>
+                      </a:solidFill>
+                      <a:prstDash val="solid"/>
+                    </a:lnL>
+                    <a:lnR w="12700" cmpd="sng">
+                      <a:solidFill>
+                        <a:schemeClr val="tx1"/>
+                      </a:solidFill>
+                      <a:prstDash val="solid"/>
+                    </a:lnR>
+                    <a:lnT w="12700" cmpd="sng">
+                      <a:solidFill>
+                        <a:schemeClr val="tx1"/>
+                      </a:solidFill>
+                      <a:prstDash val="solid"/>
+                    </a:lnT>
+                    <a:lnB w="12700" cmpd="sng">
+                      <a:solidFill>
+                        <a:schemeClr val="tx1"/>
+                      </a:solidFill>
+                      <a:prstDash val="solid"/>
+                    </a:lnB>
+                    <a:solidFill>
+                      <a:schemeClr val="bg1"/>
+                    </a:solidFill>
+                  </a:tcPr>
+                </a:tc>
+                <a:tc>
+                  <a:txBody>
+                    <a:bodyPr/>
+                    <a:p>
+                      <a:pPr>
+                        <a:buNone/>
+                      </a:pPr>
+                      <a:endParaRPr lang="zh-CN" altLang="en-US">
+                        <a:solidFill>
+                          <a:schemeClr val="tx1"/>
+                        </a:solidFill>
+                      </a:endParaRPr>
+                    </a:p>
+                  </a:txBody>
+                  <a:tcPr>
+                    <a:lnL w="12700" cmpd="sng">
+                      <a:solidFill>
+                        <a:schemeClr val="tx1"/>
+                      </a:solidFill>
+                      <a:prstDash val="solid"/>
+                    </a:lnL>
+                    <a:lnR w="12700" cmpd="sng">
+                      <a:solidFill>
+                        <a:schemeClr val="tx1"/>
+                      </a:solidFill>
+                      <a:prstDash val="solid"/>
+                    </a:lnR>
+                    <a:lnT w="12700" cmpd="sng">
+                      <a:solidFill>
+                        <a:schemeClr val="tx1"/>
+                      </a:solidFill>
+                      <a:prstDash val="solid"/>
+                    </a:lnT>
+                    <a:lnB w="12700" cmpd="sng">
+                      <a:solidFill>
+                        <a:schemeClr val="tx1"/>
+                      </a:solidFill>
+                      <a:prstDash val="solid"/>
+                    </a:lnB>
+                    <a:solidFill>
+                      <a:schemeClr val="tx1"/>
+                    </a:solidFill>
+                  </a:tcPr>
+                </a:tc>
+              </a:tr>
+              <a:tr h="540000">
+                <a:tc>
+                  <a:txBody>
+                    <a:bodyPr/>
+                    <a:p>
+                      <a:pPr>
+                        <a:buNone/>
+                      </a:pPr>
+                      <a:endParaRPr lang="zh-CN" altLang="en-US">
+                        <a:solidFill>
+                          <a:schemeClr val="tx1"/>
+                        </a:solidFill>
+                      </a:endParaRPr>
+                    </a:p>
+                  </a:txBody>
+                  <a:tcPr>
+                    <a:lnL w="12700" cmpd="sng">
+                      <a:solidFill>
+                        <a:schemeClr val="tx1"/>
+                      </a:solidFill>
+                      <a:prstDash val="solid"/>
+                    </a:lnL>
+                    <a:lnR w="12700" cmpd="sng">
+                      <a:solidFill>
+                        <a:schemeClr val="tx1"/>
+                      </a:solidFill>
+                      <a:prstDash val="solid"/>
+                    </a:lnR>
+                    <a:lnT w="12700" cmpd="sng">
+                      <a:solidFill>
+                        <a:schemeClr val="tx1"/>
+                      </a:solidFill>
+                      <a:prstDash val="solid"/>
+                    </a:lnT>
+                    <a:lnB w="12700" cmpd="sng">
+                      <a:solidFill>
+                        <a:schemeClr val="tx1"/>
+                      </a:solidFill>
+                      <a:prstDash val="solid"/>
+                    </a:lnB>
+                    <a:solidFill>
+                      <a:schemeClr val="tx1"/>
+                    </a:solidFill>
+                  </a:tcPr>
+                </a:tc>
+                <a:tc>
+                  <a:txBody>
+                    <a:bodyPr/>
+                    <a:p>
+                      <a:pPr>
+                        <a:buNone/>
+                      </a:pPr>
+                      <a:endParaRPr lang="zh-CN" altLang="en-US">
+                        <a:solidFill>
+                          <a:schemeClr val="tx1"/>
+                        </a:solidFill>
+                      </a:endParaRPr>
+                    </a:p>
+                  </a:txBody>
+                  <a:tcPr>
+                    <a:lnL w="12700" cmpd="sng">
+                      <a:solidFill>
+                        <a:schemeClr val="tx1"/>
+                      </a:solidFill>
+                      <a:prstDash val="solid"/>
+                    </a:lnL>
+                    <a:lnR w="12700" cmpd="sng">
+                      <a:solidFill>
+                        <a:schemeClr val="tx1"/>
+                      </a:solidFill>
+                      <a:prstDash val="solid"/>
+                    </a:lnR>
+                    <a:lnT w="12700" cmpd="sng">
+                      <a:solidFill>
+                        <a:schemeClr val="tx1"/>
+                      </a:solidFill>
+                      <a:prstDash val="solid"/>
+                    </a:lnT>
+                    <a:lnB w="12700" cmpd="sng">
+                      <a:solidFill>
+                        <a:schemeClr val="tx1"/>
+                      </a:solidFill>
+                      <a:prstDash val="solid"/>
+                    </a:lnB>
+                    <a:solidFill>
+                      <a:schemeClr val="bg1"/>
+                    </a:solidFill>
+                  </a:tcPr>
+                </a:tc>
+                <a:tc>
+                  <a:txBody>
+                    <a:bodyPr/>
+                    <a:p>
+                      <a:pPr>
+                        <a:buNone/>
+                      </a:pPr>
+                      <a:endParaRPr lang="zh-CN" altLang="en-US">
+                        <a:solidFill>
+                          <a:schemeClr val="tx1"/>
+                        </a:solidFill>
+                      </a:endParaRPr>
+                    </a:p>
+                  </a:txBody>
+                  <a:tcPr>
+                    <a:lnL w="12700" cmpd="sng">
+                      <a:solidFill>
+                        <a:schemeClr val="tx1"/>
+                      </a:solidFill>
+                      <a:prstDash val="solid"/>
+                    </a:lnL>
+                    <a:lnR w="12700" cmpd="sng">
+                      <a:solidFill>
+                        <a:schemeClr val="tx1"/>
+                      </a:solidFill>
+                      <a:prstDash val="solid"/>
+                    </a:lnR>
+                    <a:lnT w="12700" cmpd="sng">
+                      <a:solidFill>
+                        <a:schemeClr val="tx1"/>
+                      </a:solidFill>
+                      <a:prstDash val="solid"/>
+                    </a:lnT>
+                    <a:lnB w="12700" cmpd="sng">
+                      <a:solidFill>
+                        <a:schemeClr val="tx1"/>
+                      </a:solidFill>
+                      <a:prstDash val="solid"/>
+                    </a:lnB>
+                    <a:solidFill>
+                      <a:schemeClr val="tx1"/>
+                    </a:solidFill>
+                  </a:tcPr>
+                </a:tc>
+                <a:tc>
+                  <a:txBody>
+                    <a:bodyPr/>
+                    <a:p>
+                      <a:pPr>
+                        <a:buNone/>
+                      </a:pPr>
+                      <a:endParaRPr lang="zh-CN" altLang="en-US">
+                        <a:solidFill>
+                          <a:schemeClr val="tx1"/>
+                        </a:solidFill>
+                      </a:endParaRPr>
+                    </a:p>
+                  </a:txBody>
+                  <a:tcPr>
+                    <a:lnL w="12700" cmpd="sng">
+                      <a:solidFill>
+                        <a:schemeClr val="tx1"/>
+                      </a:solidFill>
+                      <a:prstDash val="solid"/>
+                    </a:lnL>
+                    <a:lnR w="12700" cmpd="sng">
+                      <a:solidFill>
+                        <a:schemeClr val="tx1"/>
+                      </a:solidFill>
+                      <a:prstDash val="solid"/>
+                    </a:lnR>
+                    <a:lnT w="12700" cmpd="sng">
+                      <a:solidFill>
+                        <a:schemeClr val="tx1"/>
+                      </a:solidFill>
+                      <a:prstDash val="solid"/>
+                    </a:lnT>
+                    <a:lnB w="12700" cmpd="sng">
+                      <a:solidFill>
+                        <a:schemeClr val="tx1"/>
+                      </a:solidFill>
+                      <a:prstDash val="solid"/>
+                    </a:lnB>
+                    <a:solidFill>
+                      <a:schemeClr val="bg1"/>
+                    </a:solidFill>
+                  </a:tcPr>
+                </a:tc>
+                <a:tc>
+                  <a:txBody>
+                    <a:bodyPr/>
+                    <a:p>
+                      <a:pPr>
+                        <a:buNone/>
+                      </a:pPr>
+                      <a:endParaRPr lang="zh-CN" altLang="en-US">
+                        <a:solidFill>
+                          <a:schemeClr val="tx1"/>
+                        </a:solidFill>
+                      </a:endParaRPr>
+                    </a:p>
+                  </a:txBody>
+                  <a:tcPr>
+                    <a:lnL w="12700" cmpd="sng">
+                      <a:solidFill>
+                        <a:schemeClr val="tx1"/>
+                      </a:solidFill>
+                      <a:prstDash val="solid"/>
+                    </a:lnL>
+                    <a:lnR w="12700" cmpd="sng">
+                      <a:solidFill>
+                        <a:schemeClr val="tx1"/>
+                      </a:solidFill>
+                      <a:prstDash val="solid"/>
+                    </a:lnR>
+                    <a:lnT w="12700" cmpd="sng">
+                      <a:solidFill>
+                        <a:schemeClr val="tx1"/>
+                      </a:solidFill>
+                      <a:prstDash val="solid"/>
+                    </a:lnT>
+                    <a:lnB w="12700" cmpd="sng">
+                      <a:solidFill>
+                        <a:schemeClr val="tx1"/>
+                      </a:solidFill>
+                      <a:prstDash val="solid"/>
+                    </a:lnB>
+                    <a:solidFill>
+                      <a:schemeClr val="tx1"/>
+                    </a:solidFill>
+                  </a:tcPr>
+                </a:tc>
+                <a:tc>
+                  <a:txBody>
+                    <a:bodyPr/>
+                    <a:p>
+                      <a:pPr>
+                        <a:buNone/>
+                      </a:pPr>
+                      <a:endParaRPr lang="zh-CN" altLang="en-US">
+                        <a:solidFill>
+                          <a:schemeClr val="tx1"/>
+                        </a:solidFill>
+                      </a:endParaRPr>
+                    </a:p>
+                  </a:txBody>
+                  <a:tcPr>
+                    <a:lnL w="12700" cmpd="sng">
+                      <a:solidFill>
+                        <a:schemeClr val="tx1"/>
+                      </a:solidFill>
+                      <a:prstDash val="solid"/>
+                    </a:lnL>
+                    <a:lnR w="12700" cmpd="sng">
+                      <a:solidFill>
+                        <a:schemeClr val="tx1"/>
+                      </a:solidFill>
+                      <a:prstDash val="solid"/>
+                    </a:lnR>
+                    <a:lnT w="12700" cmpd="sng">
+                      <a:solidFill>
+                        <a:schemeClr val="tx1"/>
+                      </a:solidFill>
+                      <a:prstDash val="solid"/>
+                    </a:lnT>
+                    <a:lnB w="12700" cmpd="sng">
+                      <a:solidFill>
+                        <a:schemeClr val="tx1"/>
+                      </a:solidFill>
+                      <a:prstDash val="solid"/>
+                    </a:lnB>
+                    <a:solidFill>
+                      <a:schemeClr val="bg1"/>
+                    </a:solidFill>
+                  </a:tcPr>
+                </a:tc>
+              </a:tr>
+            </a:tbl>
+          </a:graphicData>
+        </a:graphic>
+      </p:graphicFrame>
+    </p:spTree>
+  </p:cSld>
+  <p:clrMapOvr>
+    <a:masterClrMapping/>
+  </p:clrMapOvr>
+</p:sld>
+</file>
+
+<file path=ppt/slides/slide4.xml><?xml version="1.0" encoding="utf-8"?>
+<p:sld xmlns:a="http://schemas.openxmlformats.org/drawingml/2006/main" xmlns:r="http://schemas.openxmlformats.org/officeDocument/2006/relationships" xmlns:p="http://schemas.openxmlformats.org/presentationml/2006/main">
+  <p:cSld>
+    <p:spTree>
+      <p:nvGrpSpPr>
+        <p:cNvPr id="1" name=""/>
+        <p:cNvGrpSpPr/>
+        <p:nvPr/>
+      </p:nvGrpSpPr>
+      <p:grpSpPr/>
+      <p:sp>
+        <p:nvSpPr>
+          <p:cNvPr id="2" name="标题 1"/>
+          <p:cNvSpPr>
+            <a:spLocks noGrp="1"/>
+          </p:cNvSpPr>
+          <p:nvPr>
+            <p:ph type="title"/>
+          </p:nvPr>
+        </p:nvSpPr>
+        <p:spPr/>
+        <p:txBody>
+          <a:bodyPr/>
+          <a:p>
+            <a:endParaRPr lang="zh-CN" altLang="en-US"/>
+          </a:p>
+        </p:txBody>
+      </p:sp>
+      <p:graphicFrame>
+        <p:nvGraphicFramePr>
+          <p:cNvPr id="4" name="内容占位符 3"/>
+          <p:cNvGraphicFramePr/>
+          <p:nvPr>
+            <p:ph idx="1"/>
+            <p:custDataLst>
+              <p:tags r:id="rId1"/>
+            </p:custDataLst>
+          </p:nvPr>
+        </p:nvGraphicFramePr>
+        <p:xfrm>
+          <a:off x="1754505" y="2287270"/>
+          <a:ext cx="2160000" cy="2160000"/>
+        </p:xfrm>
+        <a:graphic>
+          <a:graphicData uri="http://schemas.openxmlformats.org/drawingml/2006/table">
+            <a:tbl>
+              <a:tblPr firstRow="1" bandRow="1">
+                <a:tableStyleId>{5C22544A-7EE6-4342-B048-85BDC9FD1C3A}</a:tableStyleId>
+              </a:tblPr>
+              <a:tblGrid>
+                <a:gridCol w="540000"/>
+                <a:gridCol w="540000"/>
+                <a:gridCol w="540000"/>
+                <a:gridCol w="540000"/>
+              </a:tblGrid>
+              <a:tr h="540000">
+                <a:tc>
+                  <a:txBody>
+                    <a:bodyPr/>
+                    <a:p>
+                      <a:pPr>
+                        <a:buNone/>
+                      </a:pPr>
+                      <a:endParaRPr lang="zh-CN" altLang="en-US">
+                        <a:solidFill>
+                          <a:schemeClr val="accent6">
+                            <a:lumMod val="75000"/>
+                          </a:schemeClr>
+                        </a:solidFill>
+                        <a:highlight>
+                          <a:srgbClr val="FF0000"/>
+                        </a:highlight>
+                      </a:endParaRPr>
+                    </a:p>
+                  </a:txBody>
+                  <a:tcPr>
+                    <a:lnL w="12700" cmpd="sng">
+                      <a:solidFill>
+                        <a:schemeClr val="tx1"/>
+                      </a:solidFill>
+                      <a:prstDash val="solid"/>
+                    </a:lnL>
+                    <a:lnR w="12700" cmpd="sng">
+                      <a:solidFill>
+                        <a:schemeClr val="tx1"/>
+                      </a:solidFill>
+                      <a:prstDash val="solid"/>
+                    </a:lnR>
+                    <a:lnT w="12700" cmpd="sng">
+                      <a:solidFill>
+                        <a:schemeClr val="tx1"/>
+                      </a:solidFill>
+                      <a:prstDash val="solid"/>
+                    </a:lnT>
+                    <a:lnB w="12700" cmpd="sng">
+                      <a:solidFill>
+                        <a:schemeClr val="tx1"/>
+                      </a:solidFill>
+                      <a:prstDash val="solid"/>
+                    </a:lnB>
+                    <a:solidFill>
+                      <a:schemeClr val="accent6">
+                        <a:lumMod val="75000"/>
+                      </a:schemeClr>
+                    </a:solidFill>
+                  </a:tcPr>
+                </a:tc>
+                <a:tc>
+                  <a:txBody>
+                    <a:bodyPr/>
+                    <a:p>
+                      <a:pPr>
+                        <a:buNone/>
+                      </a:pPr>
+                      <a:endParaRPr lang="zh-CN" altLang="en-US">
+                        <a:solidFill>
+                          <a:schemeClr val="tx1"/>
+                        </a:solidFill>
+                      </a:endParaRPr>
+                    </a:p>
+                  </a:txBody>
+                  <a:tcPr>
+                    <a:lnL w="12700" cmpd="sng">
+                      <a:solidFill>
+                        <a:schemeClr val="tx1"/>
+                      </a:solidFill>
+                      <a:prstDash val="solid"/>
+                    </a:lnL>
+                    <a:lnR w="12700" cmpd="sng">
+                      <a:solidFill>
+                        <a:schemeClr val="tx1"/>
+                      </a:solidFill>
+                      <a:prstDash val="solid"/>
+                    </a:lnR>
+                    <a:lnT w="12700" cmpd="sng">
+                      <a:solidFill>
+                        <a:schemeClr val="tx1"/>
+                      </a:solidFill>
+                      <a:prstDash val="solid"/>
+                    </a:lnT>
+                    <a:lnB w="12700" cmpd="sng">
+                      <a:solidFill>
+                        <a:schemeClr val="tx1"/>
+                      </a:solidFill>
+                      <a:prstDash val="solid"/>
+                    </a:lnB>
+                    <a:solidFill>
+                      <a:schemeClr val="tx1"/>
+                    </a:solidFill>
+                  </a:tcPr>
+                </a:tc>
+                <a:tc>
+                  <a:txBody>
+                    <a:bodyPr/>
+                    <a:p>
+                      <a:pPr>
+                        <a:buNone/>
+                      </a:pPr>
+                      <a:endParaRPr lang="zh-CN" altLang="en-US">
+                        <a:solidFill>
+                          <a:schemeClr val="tx1"/>
+                        </a:solidFill>
+                      </a:endParaRPr>
+                    </a:p>
+                  </a:txBody>
+                  <a:tcPr>
+                    <a:lnL w="12700" cmpd="sng">
+                      <a:solidFill>
+                        <a:schemeClr val="tx1"/>
+                      </a:solidFill>
+                      <a:prstDash val="solid"/>
+                    </a:lnL>
+                    <a:lnR w="12700" cmpd="sng">
+                      <a:solidFill>
+                        <a:schemeClr val="tx1"/>
+                      </a:solidFill>
+                      <a:prstDash val="solid"/>
+                    </a:lnR>
+                    <a:lnT w="12700" cmpd="sng">
+                      <a:solidFill>
+                        <a:schemeClr val="tx1"/>
+                      </a:solidFill>
+                      <a:prstDash val="solid"/>
+                    </a:lnT>
+                    <a:lnB w="12700" cmpd="sng">
+                      <a:solidFill>
+                        <a:schemeClr val="tx1"/>
+                      </a:solidFill>
+                      <a:prstDash val="solid"/>
+                    </a:lnB>
+                    <a:solidFill>
+                      <a:schemeClr val="bg1"/>
+                    </a:solidFill>
+                  </a:tcPr>
+                </a:tc>
+                <a:tc>
+                  <a:txBody>
+                    <a:bodyPr/>
+                    <a:p>
+                      <a:pPr>
+                        <a:buNone/>
+                      </a:pPr>
+                      <a:endParaRPr lang="zh-CN" altLang="en-US">
+                        <a:solidFill>
+                          <a:schemeClr val="tx1"/>
+                        </a:solidFill>
+                      </a:endParaRPr>
+                    </a:p>
+                  </a:txBody>
+                  <a:tcPr>
+                    <a:lnL w="12700" cmpd="sng">
+                      <a:solidFill>
+                        <a:schemeClr val="tx1"/>
+                      </a:solidFill>
+                      <a:prstDash val="solid"/>
+                    </a:lnL>
+                    <a:lnR w="12700" cmpd="sng">
+                      <a:solidFill>
+                        <a:schemeClr val="tx1"/>
+                      </a:solidFill>
+                      <a:prstDash val="solid"/>
+                    </a:lnR>
+                    <a:lnT w="12700" cmpd="sng">
+                      <a:solidFill>
+                        <a:schemeClr val="tx1"/>
+                      </a:solidFill>
+                      <a:prstDash val="solid"/>
+                    </a:lnT>
+                    <a:lnB w="12700" cmpd="sng">
+                      <a:solidFill>
+                        <a:schemeClr val="tx1"/>
+                      </a:solidFill>
+                      <a:prstDash val="solid"/>
+                    </a:lnB>
+                    <a:solidFill>
+                      <a:schemeClr val="tx1"/>
+                    </a:solidFill>
+                  </a:tcPr>
+                </a:tc>
+              </a:tr>
+              <a:tr h="540000">
+                <a:tc>
+                  <a:txBody>
+                    <a:bodyPr/>
+                    <a:p>
+                      <a:pPr>
+                        <a:buNone/>
+                      </a:pPr>
+                      <a:endParaRPr lang="zh-CN" altLang="en-US">
+                        <a:solidFill>
+                          <a:schemeClr val="tx1"/>
+                        </a:solidFill>
+                      </a:endParaRPr>
+                    </a:p>
+                  </a:txBody>
+                  <a:tcPr>
+                    <a:lnL w="12700" cmpd="sng">
+                      <a:solidFill>
+                        <a:schemeClr val="tx1"/>
+                      </a:solidFill>
+                      <a:prstDash val="solid"/>
+                    </a:lnL>
+                    <a:lnR w="12700" cmpd="sng">
+                      <a:solidFill>
+                        <a:schemeClr val="tx1"/>
+                      </a:solidFill>
+                      <a:prstDash val="solid"/>
+                    </a:lnR>
+                    <a:lnT w="12700" cmpd="sng">
+                      <a:solidFill>
+                        <a:schemeClr val="tx1"/>
+                      </a:solidFill>
+                      <a:prstDash val="solid"/>
+                    </a:lnT>
+                    <a:lnB w="12700" cmpd="sng">
+                      <a:solidFill>
+                        <a:schemeClr val="tx1"/>
+                      </a:solidFill>
+                      <a:prstDash val="solid"/>
+                    </a:lnB>
+                    <a:solidFill>
+                      <a:schemeClr val="tx1"/>
+                    </a:solidFill>
+                  </a:tcPr>
+                </a:tc>
+                <a:tc>
+                  <a:txBody>
+                    <a:bodyPr/>
+                    <a:p>
+                      <a:pPr>
+                        <a:buNone/>
+                      </a:pPr>
+                      <a:endParaRPr lang="zh-CN" altLang="en-US">
+                        <a:solidFill>
+                          <a:schemeClr val="tx1"/>
+                        </a:solidFill>
+                      </a:endParaRPr>
+                    </a:p>
+                  </a:txBody>
+                  <a:tcPr>
+                    <a:lnL w="12700" cmpd="sng">
+                      <a:solidFill>
+                        <a:schemeClr val="tx1"/>
+                      </a:solidFill>
+                      <a:prstDash val="solid"/>
+                    </a:lnL>
+                    <a:lnR w="12700" cmpd="sng">
+                      <a:solidFill>
+                        <a:schemeClr val="tx1"/>
+                      </a:solidFill>
+                      <a:prstDash val="solid"/>
+                    </a:lnR>
+                    <a:lnT w="12700" cmpd="sng">
+                      <a:solidFill>
+                        <a:schemeClr val="tx1"/>
+                      </a:solidFill>
+                      <a:prstDash val="solid"/>
+                    </a:lnT>
+                    <a:lnB w="12700" cmpd="sng">
+                      <a:solidFill>
+                        <a:schemeClr val="tx1"/>
+                      </a:solidFill>
+                      <a:prstDash val="solid"/>
+                    </a:lnB>
+                    <a:solidFill>
+                      <a:schemeClr val="bg1"/>
+                    </a:solidFill>
+                  </a:tcPr>
+                </a:tc>
+                <a:tc>
+                  <a:txBody>
+                    <a:bodyPr/>
+                    <a:p>
+                      <a:pPr>
+                        <a:buNone/>
+                      </a:pPr>
+                      <a:endParaRPr lang="zh-CN" altLang="en-US">
+                        <a:solidFill>
+                          <a:schemeClr val="tx1"/>
+                        </a:solidFill>
+                      </a:endParaRPr>
+                    </a:p>
+                  </a:txBody>
+                  <a:tcPr>
+                    <a:lnL w="12700" cmpd="sng">
+                      <a:solidFill>
+                        <a:schemeClr val="tx1"/>
+                      </a:solidFill>
+                      <a:prstDash val="solid"/>
+                    </a:lnL>
+                    <a:lnR w="12700" cmpd="sng">
+                      <a:solidFill>
+                        <a:schemeClr val="tx1"/>
+                      </a:solidFill>
+                      <a:prstDash val="solid"/>
+                    </a:lnR>
+                    <a:lnT w="12700" cmpd="sng">
+                      <a:solidFill>
+                        <a:schemeClr val="tx1"/>
+                      </a:solidFill>
+                      <a:prstDash val="solid"/>
+                    </a:lnT>
+                    <a:lnB w="12700" cmpd="sng">
+                      <a:solidFill>
+                        <a:schemeClr val="tx1"/>
+                      </a:solidFill>
+                      <a:prstDash val="solid"/>
+                    </a:lnB>
+                    <a:solidFill>
+                      <a:schemeClr val="tx1"/>
+                    </a:solidFill>
+                  </a:tcPr>
+                </a:tc>
+                <a:tc>
+                  <a:txBody>
+                    <a:bodyPr/>
+                    <a:p>
+                      <a:pPr>
+                        <a:buNone/>
+                      </a:pPr>
+                      <a:endParaRPr lang="zh-CN" altLang="en-US">
+                        <a:solidFill>
+                          <a:schemeClr val="tx1"/>
+                        </a:solidFill>
+                      </a:endParaRPr>
+                    </a:p>
+                  </a:txBody>
+                  <a:tcPr>
+                    <a:lnL w="12700" cmpd="sng">
+                      <a:solidFill>
+                        <a:schemeClr val="tx1"/>
+                      </a:solidFill>
+                      <a:prstDash val="solid"/>
+                    </a:lnL>
+                    <a:lnR w="12700" cmpd="sng">
+                      <a:solidFill>
+                        <a:schemeClr val="tx1"/>
+                      </a:solidFill>
+                      <a:prstDash val="solid"/>
+                    </a:lnR>
+                    <a:lnT w="12700" cmpd="sng">
+                      <a:solidFill>
+                        <a:schemeClr val="tx1"/>
+                      </a:solidFill>
+                      <a:prstDash val="solid"/>
+                    </a:lnT>
+                    <a:lnB w="12700" cmpd="sng">
+                      <a:solidFill>
+                        <a:schemeClr val="tx1"/>
+                      </a:solidFill>
+                      <a:prstDash val="solid"/>
+                    </a:lnB>
+                    <a:solidFill>
+                      <a:schemeClr val="accent6">
+                        <a:lumMod val="75000"/>
+                      </a:schemeClr>
+                    </a:solidFill>
+                  </a:tcPr>
+                </a:tc>
+              </a:tr>
+              <a:tr h="540000">
+                <a:tc>
+                  <a:txBody>
+                    <a:bodyPr/>
+                    <a:p>
+                      <a:pPr>
+                        <a:buNone/>
+                      </a:pPr>
+                      <a:endParaRPr lang="zh-CN" altLang="en-US">
+                        <a:solidFill>
+                          <a:schemeClr val="tx1"/>
+                        </a:solidFill>
+                      </a:endParaRPr>
+                    </a:p>
+                  </a:txBody>
+                  <a:tcPr>
+                    <a:lnL w="12700" cmpd="sng">
+                      <a:solidFill>
+                        <a:schemeClr val="tx1"/>
+                      </a:solidFill>
+                      <a:prstDash val="solid"/>
+                    </a:lnL>
+                    <a:lnR w="12700" cmpd="sng">
+                      <a:solidFill>
+                        <a:schemeClr val="tx1"/>
+                      </a:solidFill>
+                      <a:prstDash val="solid"/>
+                    </a:lnR>
+                    <a:lnT w="12700" cmpd="sng">
+                      <a:solidFill>
+                        <a:schemeClr val="tx1"/>
+                      </a:solidFill>
+                      <a:prstDash val="solid"/>
+                    </a:lnT>
+                    <a:lnB w="12700" cmpd="sng">
+                      <a:solidFill>
+                        <a:schemeClr val="tx1"/>
+                      </a:solidFill>
+                      <a:prstDash val="solid"/>
+                    </a:lnB>
+                    <a:solidFill>
+                      <a:schemeClr val="bg1"/>
+                    </a:solidFill>
+                  </a:tcPr>
+                </a:tc>
+                <a:tc>
+                  <a:txBody>
+                    <a:bodyPr/>
+                    <a:p>
+                      <a:pPr>
+                        <a:buNone/>
+                      </a:pPr>
+                      <a:endParaRPr lang="zh-CN" altLang="en-US">
+                        <a:solidFill>
+                          <a:schemeClr val="tx1"/>
+                        </a:solidFill>
+                      </a:endParaRPr>
+                    </a:p>
+                  </a:txBody>
+                  <a:tcPr>
+                    <a:lnL w="12700" cmpd="sng">
+                      <a:solidFill>
+                        <a:schemeClr val="tx1"/>
+                      </a:solidFill>
+                      <a:prstDash val="solid"/>
+                    </a:lnL>
+                    <a:lnR w="12700" cmpd="sng">
+                      <a:solidFill>
+                        <a:schemeClr val="tx1"/>
+                      </a:solidFill>
+                      <a:prstDash val="solid"/>
+                    </a:lnR>
+                    <a:lnT w="12700" cmpd="sng">
+                      <a:solidFill>
+                        <a:schemeClr val="tx1"/>
+                      </a:solidFill>
+                      <a:prstDash val="solid"/>
+                    </a:lnT>
+                    <a:lnB w="12700" cmpd="sng">
+                      <a:solidFill>
+                        <a:schemeClr val="tx1"/>
+                      </a:solidFill>
+                      <a:prstDash val="solid"/>
+                    </a:lnB>
+                    <a:solidFill>
+                      <a:schemeClr val="tx1"/>
+                    </a:solidFill>
+                  </a:tcPr>
+                </a:tc>
+                <a:tc>
+                  <a:txBody>
+                    <a:bodyPr/>
+                    <a:p>
+                      <a:pPr>
+                        <a:buNone/>
+                      </a:pPr>
+                      <a:endParaRPr lang="zh-CN" altLang="en-US">
+                        <a:solidFill>
+                          <a:schemeClr val="tx1"/>
+                        </a:solidFill>
+                      </a:endParaRPr>
+                    </a:p>
+                  </a:txBody>
+                  <a:tcPr>
+                    <a:lnL w="12700" cmpd="sng">
+                      <a:solidFill>
+                        <a:schemeClr val="tx1"/>
+                      </a:solidFill>
+                      <a:prstDash val="solid"/>
+                    </a:lnL>
+                    <a:lnR w="12700" cmpd="sng">
+                      <a:solidFill>
+                        <a:schemeClr val="tx1"/>
+                      </a:solidFill>
+                      <a:prstDash val="solid"/>
+                    </a:lnR>
+                    <a:lnT w="12700" cmpd="sng">
+                      <a:solidFill>
+                        <a:schemeClr val="tx1"/>
+                      </a:solidFill>
+                      <a:prstDash val="solid"/>
+                    </a:lnT>
+                    <a:lnB w="12700" cmpd="sng">
+                      <a:solidFill>
+                        <a:schemeClr val="tx1"/>
+                      </a:solidFill>
+                      <a:prstDash val="solid"/>
+                    </a:lnB>
+                    <a:solidFill>
+                      <a:schemeClr val="bg1"/>
+                    </a:solidFill>
+                  </a:tcPr>
+                </a:tc>
+                <a:tc>
+                  <a:txBody>
+                    <a:bodyPr/>
+                    <a:p>
+                      <a:pPr>
+                        <a:buNone/>
+                      </a:pPr>
+                      <a:endParaRPr lang="zh-CN" altLang="en-US">
+                        <a:solidFill>
+                          <a:schemeClr val="tx1"/>
+                        </a:solidFill>
+                      </a:endParaRPr>
+                    </a:p>
+                  </a:txBody>
+                  <a:tcPr>
+                    <a:lnL w="12700" cmpd="sng">
+                      <a:solidFill>
+                        <a:schemeClr val="tx1"/>
+                      </a:solidFill>
+                      <a:prstDash val="solid"/>
+                    </a:lnL>
+                    <a:lnR w="12700" cmpd="sng">
+                      <a:solidFill>
+                        <a:schemeClr val="tx1"/>
+                      </a:solidFill>
+                      <a:prstDash val="solid"/>
+                    </a:lnR>
+                    <a:lnT w="12700" cmpd="sng">
+                      <a:solidFill>
+                        <a:schemeClr val="tx1"/>
+                      </a:solidFill>
+                      <a:prstDash val="solid"/>
+                    </a:lnT>
+                    <a:lnB w="12700" cmpd="sng">
+                      <a:solidFill>
+                        <a:schemeClr val="tx1"/>
+                      </a:solidFill>
+                      <a:prstDash val="solid"/>
+                    </a:lnB>
+                    <a:solidFill>
+                      <a:schemeClr val="tx1"/>
+                    </a:solidFill>
+                  </a:tcPr>
+                </a:tc>
+              </a:tr>
+              <a:tr h="540000">
+                <a:tc>
+                  <a:txBody>
+                    <a:bodyPr/>
+                    <a:p>
+                      <a:pPr>
+                        <a:buNone/>
+                      </a:pPr>
+                      <a:endParaRPr lang="zh-CN" altLang="en-US">
+                        <a:solidFill>
+                          <a:schemeClr val="tx1"/>
+                        </a:solidFill>
+                      </a:endParaRPr>
+                    </a:p>
+                  </a:txBody>
+                  <a:tcPr>
+                    <a:lnL w="12700" cmpd="sng">
+                      <a:solidFill>
+                        <a:schemeClr val="tx1"/>
+                      </a:solidFill>
+                      <a:prstDash val="solid"/>
+                    </a:lnL>
+                    <a:lnR w="12700" cmpd="sng">
+                      <a:solidFill>
+                        <a:schemeClr val="tx1"/>
+                      </a:solidFill>
+                      <a:prstDash val="solid"/>
+                    </a:lnR>
+                    <a:lnT w="12700" cmpd="sng">
+                      <a:solidFill>
+                        <a:schemeClr val="tx1"/>
+                      </a:solidFill>
+                      <a:prstDash val="solid"/>
+                    </a:lnT>
+                    <a:lnB w="12700" cmpd="sng">
+                      <a:solidFill>
+                        <a:schemeClr val="tx1"/>
+                      </a:solidFill>
+                      <a:prstDash val="solid"/>
+                    </a:lnB>
+                    <a:solidFill>
+                      <a:schemeClr val="tx1"/>
+                    </a:solidFill>
+                  </a:tcPr>
+                </a:tc>
+                <a:tc>
+                  <a:txBody>
+                    <a:bodyPr/>
+                    <a:p>
+                      <a:pPr>
+                        <a:buNone/>
+                      </a:pPr>
+                      <a:endParaRPr lang="zh-CN" altLang="en-US">
+                        <a:solidFill>
+                          <a:schemeClr val="tx1"/>
+                        </a:solidFill>
+                      </a:endParaRPr>
+                    </a:p>
+                  </a:txBody>
+                  <a:tcPr>
+                    <a:lnL w="12700" cmpd="sng">
+                      <a:solidFill>
+                        <a:schemeClr val="tx1"/>
+                      </a:solidFill>
+                      <a:prstDash val="solid"/>
+                    </a:lnL>
+                    <a:lnR w="12700" cmpd="sng">
+                      <a:solidFill>
+                        <a:schemeClr val="tx1"/>
+                      </a:solidFill>
+                      <a:prstDash val="solid"/>
+                    </a:lnR>
+                    <a:lnT w="12700" cmpd="sng">
+                      <a:solidFill>
+                        <a:schemeClr val="tx1"/>
+                      </a:solidFill>
+                      <a:prstDash val="solid"/>
+                    </a:lnT>
+                    <a:lnB w="12700" cmpd="sng">
+                      <a:solidFill>
+                        <a:schemeClr val="tx1"/>
+                      </a:solidFill>
+                      <a:prstDash val="solid"/>
+                    </a:lnB>
+                    <a:solidFill>
+                      <a:schemeClr val="accent6">
+                        <a:lumMod val="75000"/>
+                      </a:schemeClr>
+                    </a:solidFill>
+                  </a:tcPr>
+                </a:tc>
+                <a:tc>
+                  <a:txBody>
+                    <a:bodyPr/>
+                    <a:p>
+                      <a:pPr>
+                        <a:buNone/>
+                      </a:pPr>
+                      <a:endParaRPr lang="zh-CN" altLang="en-US">
+                        <a:solidFill>
+                          <a:schemeClr val="tx1"/>
+                        </a:solidFill>
+                      </a:endParaRPr>
+                    </a:p>
+                  </a:txBody>
+                  <a:tcPr>
+                    <a:lnL w="12700" cmpd="sng">
+                      <a:solidFill>
+                        <a:schemeClr val="tx1"/>
+                      </a:solidFill>
+                      <a:prstDash val="solid"/>
+                    </a:lnL>
+                    <a:lnR w="12700" cmpd="sng">
+                      <a:solidFill>
+                        <a:schemeClr val="tx1"/>
+                      </a:solidFill>
+                      <a:prstDash val="solid"/>
+                    </a:lnR>
+                    <a:lnT w="12700" cmpd="sng">
+                      <a:solidFill>
+                        <a:schemeClr val="tx1"/>
+                      </a:solidFill>
+                      <a:prstDash val="solid"/>
+                    </a:lnT>
+                    <a:lnB w="12700" cmpd="sng">
+                      <a:solidFill>
+                        <a:schemeClr val="tx1"/>
+                      </a:solidFill>
+                      <a:prstDash val="solid"/>
+                    </a:lnB>
+                    <a:solidFill>
+                      <a:schemeClr val="tx1"/>
+                    </a:solidFill>
+                  </a:tcPr>
+                </a:tc>
+                <a:tc>
+                  <a:txBody>
+                    <a:bodyPr/>
+                    <a:p>
+                      <a:pPr>
+                        <a:buNone/>
+                      </a:pPr>
+                      <a:endParaRPr lang="zh-CN" altLang="en-US">
+                        <a:solidFill>
+                          <a:schemeClr val="tx1"/>
+                        </a:solidFill>
+                      </a:endParaRPr>
+                    </a:p>
+                  </a:txBody>
+                  <a:tcPr>
+                    <a:lnL w="12700" cmpd="sng">
+                      <a:solidFill>
+                        <a:schemeClr val="tx1"/>
+                      </a:solidFill>
+                      <a:prstDash val="solid"/>
+                    </a:lnL>
+                    <a:lnR w="12700" cmpd="sng">
+                      <a:solidFill>
+                        <a:schemeClr val="tx1"/>
+                      </a:solidFill>
+                      <a:prstDash val="solid"/>
+                    </a:lnR>
+                    <a:lnT w="12700" cmpd="sng">
+                      <a:solidFill>
+                        <a:schemeClr val="tx1"/>
+                      </a:solidFill>
+                      <a:prstDash val="solid"/>
+                    </a:lnT>
+                    <a:lnB w="12700" cmpd="sng">
+                      <a:solidFill>
+                        <a:schemeClr val="tx1"/>
+                      </a:solidFill>
+                      <a:prstDash val="solid"/>
+                    </a:lnB>
+                    <a:solidFill>
+                      <a:schemeClr val="bg1"/>
+                    </a:solidFill>
+                  </a:tcPr>
+                </a:tc>
+              </a:tr>
+            </a:tbl>
+          </a:graphicData>
+        </a:graphic>
+      </p:graphicFrame>
+      <p:graphicFrame>
+        <p:nvGraphicFramePr>
+          <p:cNvPr id="6" name="表格 5"/>
+          <p:cNvGraphicFramePr/>
+          <p:nvPr>
+            <p:custDataLst>
+              <p:tags r:id="rId2"/>
+            </p:custDataLst>
+          </p:nvPr>
+        </p:nvGraphicFramePr>
+        <p:xfrm>
+          <a:off x="5676900" y="2263140"/>
+          <a:ext cx="3240000" cy="3240000"/>
+        </p:xfrm>
+        <a:graphic>
+          <a:graphicData uri="http://schemas.openxmlformats.org/drawingml/2006/table">
+            <a:tbl>
+              <a:tblPr firstRow="1" bandRow="1">
+                <a:tableStyleId>{5C22544A-7EE6-4342-B048-85BDC9FD1C3A}</a:tableStyleId>
+              </a:tblPr>
+              <a:tblGrid>
+                <a:gridCol w="540000"/>
+                <a:gridCol w="540000"/>
+                <a:gridCol w="540000"/>
+                <a:gridCol w="540000"/>
+                <a:gridCol w="540000"/>
+                <a:gridCol w="540000"/>
+              </a:tblGrid>
+              <a:tr h="540000">
+                <a:tc>
+                  <a:txBody>
+                    <a:bodyPr/>
+                    <a:p>
+                      <a:pPr>
+                        <a:buNone/>
+                      </a:pPr>
+                      <a:endParaRPr lang="zh-CN" altLang="en-US">
+                        <a:solidFill>
+                          <a:schemeClr val="tx1"/>
+                        </a:solidFill>
+                      </a:endParaRPr>
+                    </a:p>
+                  </a:txBody>
+                  <a:tcPr>
+                    <a:lnL w="12700" cmpd="sng">
+                      <a:solidFill>
+                        <a:schemeClr val="tx1"/>
+                      </a:solidFill>
+                      <a:prstDash val="solid"/>
+                    </a:lnL>
+                    <a:lnR w="12700" cmpd="sng">
+                      <a:solidFill>
+                        <a:schemeClr val="tx1"/>
+                      </a:solidFill>
+                      <a:prstDash val="solid"/>
+                    </a:lnR>
+                    <a:lnT w="12700" cmpd="sng">
+                      <a:solidFill>
+                        <a:schemeClr val="tx1"/>
+                      </a:solidFill>
+                      <a:prstDash val="solid"/>
+                    </a:lnT>
+                    <a:lnB w="12700" cmpd="sng">
+                      <a:solidFill>
+                        <a:schemeClr val="tx1"/>
+                      </a:solidFill>
+                      <a:prstDash val="solid"/>
+                    </a:lnB>
+                    <a:solidFill>
+                      <a:schemeClr val="accent6">
+                        <a:lumMod val="75000"/>
+                      </a:schemeClr>
+                    </a:solidFill>
+                  </a:tcPr>
+                </a:tc>
+                <a:tc>
+                  <a:txBody>
+                    <a:bodyPr/>
+                    <a:p>
+                      <a:pPr>
+                        <a:buNone/>
+                      </a:pPr>
+                      <a:endParaRPr lang="zh-CN" altLang="en-US">
+                        <a:solidFill>
+                          <a:schemeClr val="tx1"/>
+                        </a:solidFill>
+                      </a:endParaRPr>
+                    </a:p>
+                  </a:txBody>
+                  <a:tcPr>
+                    <a:lnL w="12700" cmpd="sng">
+                      <a:solidFill>
+                        <a:schemeClr val="tx1"/>
+                      </a:solidFill>
+                      <a:prstDash val="solid"/>
+                    </a:lnL>
+                    <a:lnR w="12700" cmpd="sng">
+                      <a:solidFill>
+                        <a:schemeClr val="tx1"/>
+                      </a:solidFill>
+                      <a:prstDash val="solid"/>
+                    </a:lnR>
+                    <a:lnT w="12700" cmpd="sng">
+                      <a:solidFill>
+                        <a:schemeClr val="tx1"/>
+                      </a:solidFill>
+                      <a:prstDash val="solid"/>
+                    </a:lnT>
+                    <a:lnB w="12700" cmpd="sng">
+                      <a:solidFill>
+                        <a:schemeClr val="tx1"/>
+                      </a:solidFill>
+                      <a:prstDash val="solid"/>
+                    </a:lnB>
+                    <a:solidFill>
+                      <a:schemeClr val="tx1"/>
+                    </a:solidFill>
+                  </a:tcPr>
+                </a:tc>
+                <a:tc>
+                  <a:txBody>
+                    <a:bodyPr/>
+                    <a:p>
+                      <a:pPr>
+                        <a:buNone/>
+                      </a:pPr>
+                      <a:endParaRPr lang="zh-CN" altLang="en-US">
+                        <a:solidFill>
+                          <a:schemeClr val="tx1"/>
+                        </a:solidFill>
+                      </a:endParaRPr>
+                    </a:p>
+                  </a:txBody>
+                  <a:tcPr>
+                    <a:lnL w="12700" cmpd="sng">
+                      <a:solidFill>
+                        <a:schemeClr val="tx1"/>
+                      </a:solidFill>
+                      <a:prstDash val="solid"/>
+                    </a:lnL>
+                    <a:lnR w="12700" cmpd="sng">
+                      <a:solidFill>
+                        <a:schemeClr val="tx1"/>
+                      </a:solidFill>
+                      <a:prstDash val="solid"/>
+                    </a:lnR>
+                    <a:lnT w="12700" cmpd="sng">
+                      <a:solidFill>
+                        <a:schemeClr val="tx1"/>
+                      </a:solidFill>
+                      <a:prstDash val="solid"/>
+                    </a:lnT>
+                    <a:lnB w="12700" cmpd="sng">
+                      <a:solidFill>
+                        <a:schemeClr val="tx1"/>
+                      </a:solidFill>
+                      <a:prstDash val="solid"/>
+                    </a:lnB>
+                    <a:solidFill>
+                      <a:schemeClr val="bg1"/>
+                    </a:solidFill>
+                  </a:tcPr>
+                </a:tc>
+                <a:tc>
+                  <a:txBody>
+                    <a:bodyPr/>
+                    <a:p>
+                      <a:pPr>
+                        <a:buNone/>
+                      </a:pPr>
+                      <a:endParaRPr lang="zh-CN" altLang="en-US">
+                        <a:solidFill>
+                          <a:schemeClr val="tx1"/>
+                        </a:solidFill>
+                      </a:endParaRPr>
+                    </a:p>
+                  </a:txBody>
+                  <a:tcPr>
+                    <a:lnL w="12700" cmpd="sng">
+                      <a:solidFill>
+                        <a:schemeClr val="tx1"/>
+                      </a:solidFill>
+                      <a:prstDash val="solid"/>
+                    </a:lnL>
+                    <a:lnR w="12700" cmpd="sng">
+                      <a:solidFill>
+                        <a:schemeClr val="tx1"/>
+                      </a:solidFill>
+                      <a:prstDash val="solid"/>
+                    </a:lnR>
+                    <a:lnT w="12700" cmpd="sng">
+                      <a:solidFill>
+                        <a:schemeClr val="tx1"/>
+                      </a:solidFill>
+                      <a:prstDash val="solid"/>
+                    </a:lnT>
+                    <a:lnB w="12700" cmpd="sng">
+                      <a:solidFill>
+                        <a:schemeClr val="tx1"/>
+                      </a:solidFill>
+                      <a:prstDash val="solid"/>
+                    </a:lnB>
+                    <a:solidFill>
+                      <a:schemeClr val="tx1"/>
+                    </a:solidFill>
+                  </a:tcPr>
+                </a:tc>
+                <a:tc>
+                  <a:txBody>
+                    <a:bodyPr/>
+                    <a:p>
+                      <a:pPr>
+                        <a:buNone/>
+                      </a:pPr>
+                      <a:endParaRPr lang="zh-CN" altLang="en-US">
+                        <a:solidFill>
+                          <a:schemeClr val="tx1"/>
+                        </a:solidFill>
+                      </a:endParaRPr>
+                    </a:p>
+                  </a:txBody>
+                  <a:tcPr>
+                    <a:lnL w="12700" cmpd="sng">
+                      <a:solidFill>
+                        <a:schemeClr val="tx1"/>
+                      </a:solidFill>
+                      <a:prstDash val="solid"/>
+                    </a:lnL>
+                    <a:lnR w="12700" cmpd="sng">
+                      <a:solidFill>
+                        <a:schemeClr val="tx1"/>
+                      </a:solidFill>
+                      <a:prstDash val="solid"/>
+                    </a:lnR>
+                    <a:lnT w="12700" cmpd="sng">
+                      <a:solidFill>
+                        <a:schemeClr val="tx1"/>
+                      </a:solidFill>
+                      <a:prstDash val="solid"/>
+                    </a:lnT>
+                    <a:lnB w="12700" cmpd="sng">
+                      <a:solidFill>
+                        <a:schemeClr val="tx1"/>
+                      </a:solidFill>
+                      <a:prstDash val="solid"/>
+                    </a:lnB>
+                    <a:solidFill>
+                      <a:schemeClr val="accent6">
+                        <a:lumMod val="75000"/>
+                      </a:schemeClr>
+                    </a:solidFill>
+                  </a:tcPr>
+                </a:tc>
+                <a:tc>
+                  <a:txBody>
+                    <a:bodyPr/>
+                    <a:p>
+                      <a:pPr>
+                        <a:buNone/>
+                      </a:pPr>
+                      <a:endParaRPr lang="zh-CN" altLang="en-US">
+                        <a:solidFill>
+                          <a:schemeClr val="tx1"/>
+                        </a:solidFill>
+                      </a:endParaRPr>
+                    </a:p>
+                  </a:txBody>
+                  <a:tcPr>
+                    <a:lnL w="12700" cmpd="sng">
+                      <a:solidFill>
+                        <a:schemeClr val="tx1"/>
+                      </a:solidFill>
+                      <a:prstDash val="solid"/>
+                    </a:lnL>
+                    <a:lnR w="12700" cmpd="sng">
+                      <a:solidFill>
+                        <a:schemeClr val="tx1"/>
+                      </a:solidFill>
+                      <a:prstDash val="solid"/>
+                    </a:lnR>
+                    <a:lnT w="12700" cmpd="sng">
+                      <a:solidFill>
+                        <a:schemeClr val="tx1"/>
+                      </a:solidFill>
+                      <a:prstDash val="solid"/>
+                    </a:lnT>
+                    <a:lnB w="12700" cmpd="sng">
+                      <a:solidFill>
+                        <a:schemeClr val="tx1"/>
+                      </a:solidFill>
+                      <a:prstDash val="solid"/>
+                    </a:lnB>
+                    <a:solidFill>
+                      <a:schemeClr val="tx1"/>
+                    </a:solidFill>
+                  </a:tcPr>
+                </a:tc>
+              </a:tr>
+              <a:tr h="540000">
+                <a:tc>
+                  <a:txBody>
+                    <a:bodyPr/>
+                    <a:p>
+                      <a:pPr>
+                        <a:buNone/>
+                      </a:pPr>
+                      <a:endParaRPr lang="zh-CN" altLang="en-US">
+                        <a:solidFill>
+                          <a:schemeClr val="tx1"/>
+                        </a:solidFill>
+                      </a:endParaRPr>
+                    </a:p>
+                  </a:txBody>
+                  <a:tcPr>
+                    <a:lnL w="12700" cmpd="sng">
+                      <a:solidFill>
+                        <a:schemeClr val="tx1"/>
+                      </a:solidFill>
+                      <a:prstDash val="solid"/>
+                    </a:lnL>
+                    <a:lnR w="12700" cmpd="sng">
+                      <a:solidFill>
+                        <a:schemeClr val="tx1"/>
+                      </a:solidFill>
+                      <a:prstDash val="solid"/>
+                    </a:lnR>
+                    <a:lnT w="12700" cmpd="sng">
+                      <a:solidFill>
+                        <a:schemeClr val="tx1"/>
+                      </a:solidFill>
+                      <a:prstDash val="solid"/>
+                    </a:lnT>
+                    <a:lnB w="12700" cmpd="sng">
+                      <a:solidFill>
+                        <a:schemeClr val="tx1"/>
+                      </a:solidFill>
+                      <a:prstDash val="solid"/>
+                    </a:lnB>
+                    <a:solidFill>
+                      <a:schemeClr val="tx1"/>
+                    </a:solidFill>
+                  </a:tcPr>
+                </a:tc>
+                <a:tc>
+                  <a:txBody>
+                    <a:bodyPr/>
+                    <a:p>
+                      <a:pPr>
+                        <a:buNone/>
+                      </a:pPr>
+                      <a:endParaRPr lang="zh-CN" altLang="en-US">
+                        <a:solidFill>
+                          <a:schemeClr val="tx1"/>
+                        </a:solidFill>
+                      </a:endParaRPr>
+                    </a:p>
+                  </a:txBody>
+                  <a:tcPr>
+                    <a:lnL w="12700" cmpd="sng">
+                      <a:solidFill>
+                        <a:schemeClr val="tx1"/>
+                      </a:solidFill>
+                      <a:prstDash val="solid"/>
+                    </a:lnL>
+                    <a:lnR w="12700" cmpd="sng">
+                      <a:solidFill>
+                        <a:schemeClr val="tx1"/>
+                      </a:solidFill>
+                      <a:prstDash val="solid"/>
+                    </a:lnR>
+                    <a:lnT w="12700" cmpd="sng">
+                      <a:solidFill>
+                        <a:schemeClr val="tx1"/>
+                      </a:solidFill>
+                      <a:prstDash val="solid"/>
+                    </a:lnT>
+                    <a:lnB w="12700" cmpd="sng">
+                      <a:solidFill>
+                        <a:schemeClr val="tx1"/>
+                      </a:solidFill>
+                      <a:prstDash val="solid"/>
+                    </a:lnB>
+                    <a:solidFill>
+                      <a:schemeClr val="bg1"/>
+                    </a:solidFill>
+                  </a:tcPr>
+                </a:tc>
+                <a:tc>
+                  <a:txBody>
+                    <a:bodyPr/>
+                    <a:p>
+                      <a:pPr>
+                        <a:buNone/>
+                      </a:pPr>
+                      <a:endParaRPr lang="zh-CN" altLang="en-US">
+                        <a:solidFill>
+                          <a:schemeClr val="tx1"/>
+                        </a:solidFill>
+                      </a:endParaRPr>
+                    </a:p>
+                  </a:txBody>
+                  <a:tcPr>
+                    <a:lnL w="12700" cmpd="sng">
+                      <a:solidFill>
+                        <a:schemeClr val="tx1"/>
+                      </a:solidFill>
+                      <a:prstDash val="solid"/>
+                    </a:lnL>
+                    <a:lnR w="12700" cmpd="sng">
+                      <a:solidFill>
+                        <a:schemeClr val="tx1"/>
+                      </a:solidFill>
+                      <a:prstDash val="solid"/>
+                    </a:lnR>
+                    <a:lnT w="12700" cmpd="sng">
+                      <a:solidFill>
+                        <a:schemeClr val="tx1"/>
+                      </a:solidFill>
+                      <a:prstDash val="solid"/>
+                    </a:lnT>
+                    <a:lnB w="12700" cmpd="sng">
+                      <a:solidFill>
+                        <a:schemeClr val="tx1"/>
+                      </a:solidFill>
+                      <a:prstDash val="solid"/>
+                    </a:lnB>
+                    <a:solidFill>
+                      <a:schemeClr val="tx1"/>
+                    </a:solidFill>
+                  </a:tcPr>
+                </a:tc>
+                <a:tc>
+                  <a:txBody>
+                    <a:bodyPr/>
+                    <a:p>
+                      <a:pPr>
+                        <a:buNone/>
+                      </a:pPr>
+                      <a:endParaRPr lang="zh-CN" altLang="en-US">
+                        <a:solidFill>
+                          <a:schemeClr val="tx1"/>
+                        </a:solidFill>
+                      </a:endParaRPr>
+                    </a:p>
+                  </a:txBody>
+                  <a:tcPr>
+                    <a:lnL w="12700" cmpd="sng">
+                      <a:solidFill>
+                        <a:schemeClr val="tx1"/>
+                      </a:solidFill>
+                      <a:prstDash val="solid"/>
+                    </a:lnL>
+                    <a:lnR w="12700" cmpd="sng">
+                      <a:solidFill>
+                        <a:schemeClr val="tx1"/>
+                      </a:solidFill>
+                      <a:prstDash val="solid"/>
+                    </a:lnR>
+                    <a:lnT w="12700" cmpd="sng">
+                      <a:solidFill>
+                        <a:schemeClr val="tx1"/>
+                      </a:solidFill>
+                      <a:prstDash val="solid"/>
+                    </a:lnT>
+                    <a:lnB w="12700" cmpd="sng">
+                      <a:solidFill>
+                        <a:schemeClr val="tx1"/>
+                      </a:solidFill>
+                      <a:prstDash val="solid"/>
+                    </a:lnB>
+                    <a:solidFill>
+                      <a:schemeClr val="bg1"/>
+                    </a:solidFill>
+                  </a:tcPr>
+                </a:tc>
+                <a:tc>
+                  <a:txBody>
+                    <a:bodyPr/>
+                    <a:p>
+                      <a:pPr>
+                        <a:buNone/>
+                      </a:pPr>
+                      <a:endParaRPr lang="zh-CN" altLang="en-US">
+                        <a:solidFill>
+                          <a:schemeClr val="tx1"/>
+                        </a:solidFill>
+                      </a:endParaRPr>
+                    </a:p>
+                  </a:txBody>
+                  <a:tcPr>
+                    <a:lnL w="12700" cmpd="sng">
+                      <a:solidFill>
+                        <a:schemeClr val="tx1"/>
+                      </a:solidFill>
+                      <a:prstDash val="solid"/>
+                    </a:lnL>
+                    <a:lnR w="12700" cmpd="sng">
+                      <a:solidFill>
+                        <a:schemeClr val="tx1"/>
+                      </a:solidFill>
+                      <a:prstDash val="solid"/>
+                    </a:lnR>
+                    <a:lnT w="12700" cmpd="sng">
+                      <a:solidFill>
+                        <a:schemeClr val="tx1"/>
+                      </a:solidFill>
+                      <a:prstDash val="solid"/>
+                    </a:lnT>
+                    <a:lnB w="12700" cmpd="sng">
+                      <a:solidFill>
+                        <a:schemeClr val="tx1"/>
+                      </a:solidFill>
+                      <a:prstDash val="solid"/>
+                    </a:lnB>
+                    <a:solidFill>
+                      <a:schemeClr val="tx1"/>
+                    </a:solidFill>
+                  </a:tcPr>
+                </a:tc>
+                <a:tc>
+                  <a:txBody>
+                    <a:bodyPr/>
+                    <a:p>
+                      <a:pPr>
+                        <a:buNone/>
+                      </a:pPr>
+                      <a:endParaRPr lang="zh-CN" altLang="en-US">
+                        <a:solidFill>
+                          <a:schemeClr val="tx1"/>
+                        </a:solidFill>
+                      </a:endParaRPr>
+                    </a:p>
+                  </a:txBody>
+                  <a:tcPr>
+                    <a:lnL w="12700" cmpd="sng">
+                      <a:solidFill>
+                        <a:schemeClr val="tx1"/>
+                      </a:solidFill>
+                      <a:prstDash val="solid"/>
+                    </a:lnL>
+                    <a:lnR w="12700" cmpd="sng">
+                      <a:solidFill>
+                        <a:schemeClr val="tx1"/>
+                      </a:solidFill>
+                      <a:prstDash val="solid"/>
+                    </a:lnR>
+                    <a:lnT w="12700" cmpd="sng">
+                      <a:solidFill>
+                        <a:schemeClr val="tx1"/>
+                      </a:solidFill>
+                      <a:prstDash val="solid"/>
+                    </a:lnT>
+                    <a:lnB w="12700" cmpd="sng">
+                      <a:solidFill>
+                        <a:schemeClr val="tx1"/>
+                      </a:solidFill>
+                      <a:prstDash val="solid"/>
+                    </a:lnB>
+                    <a:solidFill>
+                      <a:schemeClr val="bg1"/>
+                    </a:solidFill>
+                  </a:tcPr>
+                </a:tc>
+              </a:tr>
+              <a:tr h="540000">
+                <a:tc>
+                  <a:txBody>
+                    <a:bodyPr/>
+                    <a:p>
+                      <a:pPr>
+                        <a:buNone/>
+                      </a:pPr>
+                      <a:endParaRPr lang="zh-CN" altLang="en-US">
+                        <a:solidFill>
+                          <a:schemeClr val="tx1"/>
+                        </a:solidFill>
+                      </a:endParaRPr>
+                    </a:p>
+                  </a:txBody>
+                  <a:tcPr>
+                    <a:lnL w="12700" cmpd="sng">
+                      <a:solidFill>
+                        <a:schemeClr val="tx1"/>
+                      </a:solidFill>
+                      <a:prstDash val="solid"/>
+                    </a:lnL>
+                    <a:lnR w="12700" cmpd="sng">
+                      <a:solidFill>
+                        <a:schemeClr val="tx1"/>
+                      </a:solidFill>
+                      <a:prstDash val="solid"/>
+                    </a:lnR>
+                    <a:lnT w="12700" cmpd="sng">
+                      <a:solidFill>
+                        <a:schemeClr val="tx1"/>
+                      </a:solidFill>
+                      <a:prstDash val="solid"/>
+                    </a:lnT>
+                    <a:lnB w="12700" cmpd="sng">
+                      <a:solidFill>
+                        <a:schemeClr val="tx1"/>
+                      </a:solidFill>
+                      <a:prstDash val="solid"/>
+                    </a:lnB>
+                    <a:solidFill>
+                      <a:schemeClr val="bg1"/>
+                    </a:solidFill>
+                  </a:tcPr>
+                </a:tc>
+                <a:tc>
+                  <a:txBody>
+                    <a:bodyPr/>
+                    <a:p>
+                      <a:pPr>
+                        <a:buNone/>
+                      </a:pPr>
+                      <a:endParaRPr lang="zh-CN" altLang="en-US">
+                        <a:solidFill>
+                          <a:schemeClr val="tx1"/>
+                        </a:solidFill>
+                      </a:endParaRPr>
+                    </a:p>
+                  </a:txBody>
+                  <a:tcPr>
+                    <a:lnL w="12700" cmpd="sng">
+                      <a:solidFill>
+                        <a:schemeClr val="tx1"/>
+                      </a:solidFill>
+                      <a:prstDash val="solid"/>
+                    </a:lnL>
+                    <a:lnR w="12700" cmpd="sng">
+                      <a:solidFill>
+                        <a:schemeClr val="tx1"/>
+                      </a:solidFill>
+                      <a:prstDash val="solid"/>
+                    </a:lnR>
+                    <a:lnT w="12700" cmpd="sng">
+                      <a:solidFill>
+                        <a:schemeClr val="tx1"/>
+                      </a:solidFill>
+                      <a:prstDash val="solid"/>
+                    </a:lnT>
+                    <a:lnB w="12700" cmpd="sng">
+                      <a:solidFill>
+                        <a:schemeClr val="tx1"/>
+                      </a:solidFill>
+                      <a:prstDash val="solid"/>
+                    </a:lnB>
+                    <a:solidFill>
+                      <a:schemeClr val="tx1"/>
+                    </a:solidFill>
+                  </a:tcPr>
+                </a:tc>
+                <a:tc>
+                  <a:txBody>
+                    <a:bodyPr/>
+                    <a:p>
+                      <a:pPr>
+                        <a:buNone/>
+                      </a:pPr>
+                      <a:endParaRPr lang="zh-CN" altLang="en-US">
+                        <a:solidFill>
+                          <a:schemeClr val="tx1"/>
+                        </a:solidFill>
+                      </a:endParaRPr>
+                    </a:p>
+                  </a:txBody>
+                  <a:tcPr>
+                    <a:lnL w="12700" cmpd="sng">
+                      <a:solidFill>
+                        <a:schemeClr val="tx1"/>
+                      </a:solidFill>
+                      <a:prstDash val="solid"/>
+                    </a:lnL>
+                    <a:lnR w="12700" cmpd="sng">
+                      <a:solidFill>
+                        <a:schemeClr val="tx1"/>
+                      </a:solidFill>
+                      <a:prstDash val="solid"/>
+                    </a:lnR>
+                    <a:lnT w="12700" cmpd="sng">
+                      <a:solidFill>
+                        <a:schemeClr val="tx1"/>
+                      </a:solidFill>
+                      <a:prstDash val="solid"/>
+                    </a:lnT>
+                    <a:lnB w="12700" cmpd="sng">
+                      <a:solidFill>
+                        <a:schemeClr val="tx1"/>
+                      </a:solidFill>
+                      <a:prstDash val="solid"/>
+                    </a:lnB>
+                    <a:solidFill>
+                      <a:schemeClr val="accent6">
+                        <a:lumMod val="75000"/>
+                      </a:schemeClr>
+                    </a:solidFill>
+                  </a:tcPr>
+                </a:tc>
+                <a:tc>
+                  <a:txBody>
+                    <a:bodyPr/>
+                    <a:p>
+                      <a:pPr>
+                        <a:buNone/>
+                      </a:pPr>
+                      <a:endParaRPr lang="zh-CN" altLang="en-US">
+                        <a:solidFill>
+                          <a:schemeClr val="tx1"/>
+                        </a:solidFill>
+                      </a:endParaRPr>
+                    </a:p>
+                  </a:txBody>
+                  <a:tcPr>
+                    <a:lnL w="12700" cmpd="sng">
+                      <a:solidFill>
+                        <a:schemeClr val="tx1"/>
+                      </a:solidFill>
+                      <a:prstDash val="solid"/>
+                    </a:lnL>
+                    <a:lnR w="12700" cmpd="sng">
+                      <a:solidFill>
+                        <a:schemeClr val="tx1"/>
+                      </a:solidFill>
+                      <a:prstDash val="solid"/>
+                    </a:lnR>
+                    <a:lnT w="12700" cmpd="sng">
+                      <a:solidFill>
+                        <a:schemeClr val="tx1"/>
+                      </a:solidFill>
+                      <a:prstDash val="solid"/>
+                    </a:lnT>
+                    <a:lnB w="12700" cmpd="sng">
+                      <a:solidFill>
+                        <a:schemeClr val="tx1"/>
+                      </a:solidFill>
+                      <a:prstDash val="solid"/>
+                    </a:lnB>
+                    <a:solidFill>
+                      <a:schemeClr val="tx1"/>
+                    </a:solidFill>
+                  </a:tcPr>
+                </a:tc>
+                <a:tc>
+                  <a:txBody>
+                    <a:bodyPr/>
+                    <a:p>
+                      <a:pPr>
+                        <a:buNone/>
+                      </a:pPr>
+                      <a:endParaRPr lang="zh-CN" altLang="en-US">
+                        <a:solidFill>
+                          <a:schemeClr val="tx1"/>
+                        </a:solidFill>
+                      </a:endParaRPr>
+                    </a:p>
+                  </a:txBody>
+                  <a:tcPr>
+                    <a:lnL w="12700" cmpd="sng">
+                      <a:solidFill>
+                        <a:schemeClr val="tx1"/>
+                      </a:solidFill>
+                      <a:prstDash val="solid"/>
+                    </a:lnL>
+                    <a:lnR w="12700" cmpd="sng">
+                      <a:solidFill>
+                        <a:schemeClr val="tx1"/>
+                      </a:solidFill>
+                      <a:prstDash val="solid"/>
+                    </a:lnR>
+                    <a:lnT w="12700" cmpd="sng">
+                      <a:solidFill>
+                        <a:schemeClr val="tx1"/>
+                      </a:solidFill>
+                      <a:prstDash val="solid"/>
+                    </a:lnT>
+                    <a:lnB w="12700" cmpd="sng">
+                      <a:solidFill>
+                        <a:schemeClr val="tx1"/>
+                      </a:solidFill>
+                      <a:prstDash val="solid"/>
+                    </a:lnB>
+                    <a:solidFill>
+                      <a:schemeClr val="bg1"/>
+                    </a:solidFill>
+                  </a:tcPr>
+                </a:tc>
+                <a:tc>
+                  <a:txBody>
+                    <a:bodyPr/>
+                    <a:p>
+                      <a:pPr>
+                        <a:buNone/>
+                      </a:pPr>
+                      <a:endParaRPr lang="zh-CN" altLang="en-US">
+                        <a:solidFill>
+                          <a:schemeClr val="tx1"/>
+                        </a:solidFill>
+                      </a:endParaRPr>
+                    </a:p>
+                  </a:txBody>
+                  <a:tcPr>
+                    <a:lnL w="12700" cmpd="sng">
+                      <a:solidFill>
+                        <a:schemeClr val="tx1"/>
+                      </a:solidFill>
+                      <a:prstDash val="solid"/>
+                    </a:lnL>
+                    <a:lnR w="12700" cmpd="sng">
+                      <a:solidFill>
+                        <a:schemeClr val="tx1"/>
+                      </a:solidFill>
+                      <a:prstDash val="solid"/>
+                    </a:lnR>
+                    <a:lnT w="12700" cmpd="sng">
+                      <a:solidFill>
+                        <a:schemeClr val="tx1"/>
+                      </a:solidFill>
+                      <a:prstDash val="solid"/>
+                    </a:lnT>
+                    <a:lnB w="12700" cmpd="sng">
+                      <a:solidFill>
+                        <a:schemeClr val="tx1"/>
+                      </a:solidFill>
+                      <a:prstDash val="solid"/>
+                    </a:lnB>
+                    <a:solidFill>
+                      <a:schemeClr val="tx1"/>
+                    </a:solidFill>
+                  </a:tcPr>
+                </a:tc>
+              </a:tr>
+              <a:tr h="540000">
+                <a:tc>
+                  <a:txBody>
+                    <a:bodyPr/>
+                    <a:p>
+                      <a:pPr>
+                        <a:buNone/>
+                      </a:pPr>
+                      <a:endParaRPr lang="zh-CN" altLang="en-US">
+                        <a:solidFill>
+                          <a:schemeClr val="tx1"/>
+                        </a:solidFill>
+                      </a:endParaRPr>
+                    </a:p>
+                  </a:txBody>
+                  <a:tcPr>
+                    <a:lnL w="12700" cmpd="sng">
+                      <a:solidFill>
+                        <a:schemeClr val="tx1"/>
+                      </a:solidFill>
+                      <a:prstDash val="solid"/>
+                    </a:lnL>
+                    <a:lnR w="12700" cmpd="sng">
+                      <a:solidFill>
+                        <a:schemeClr val="tx1"/>
+                      </a:solidFill>
+                      <a:prstDash val="solid"/>
+                    </a:lnR>
+                    <a:lnT w="12700" cmpd="sng">
+                      <a:solidFill>
+                        <a:schemeClr val="tx1"/>
+                      </a:solidFill>
+                      <a:prstDash val="solid"/>
+                    </a:lnT>
+                    <a:lnB w="12700" cmpd="sng">
+                      <a:solidFill>
+                        <a:schemeClr val="tx1"/>
+                      </a:solidFill>
+                      <a:prstDash val="solid"/>
+                    </a:lnB>
+                    <a:solidFill>
+                      <a:schemeClr val="tx1"/>
+                    </a:solidFill>
+                  </a:tcPr>
+                </a:tc>
+                <a:tc>
+                  <a:txBody>
+                    <a:bodyPr/>
+                    <a:p>
+                      <a:pPr>
+                        <a:buNone/>
+                      </a:pPr>
+                      <a:endParaRPr lang="zh-CN" altLang="en-US">
+                        <a:solidFill>
+                          <a:schemeClr val="tx1"/>
+                        </a:solidFill>
+                      </a:endParaRPr>
+                    </a:p>
+                  </a:txBody>
+                  <a:tcPr>
+                    <a:lnL w="12700" cmpd="sng">
+                      <a:solidFill>
+                        <a:schemeClr val="tx1"/>
+                      </a:solidFill>
+                      <a:prstDash val="solid"/>
+                    </a:lnL>
+                    <a:lnR w="12700" cmpd="sng">
+                      <a:solidFill>
+                        <a:schemeClr val="tx1"/>
+                      </a:solidFill>
+                      <a:prstDash val="solid"/>
+                    </a:lnR>
+                    <a:lnT w="12700" cmpd="sng">
+                      <a:solidFill>
+                        <a:schemeClr val="tx1"/>
+                      </a:solidFill>
+                      <a:prstDash val="solid"/>
+                    </a:lnT>
+                    <a:lnB w="12700" cmpd="sng">
+                      <a:solidFill>
+                        <a:schemeClr val="tx1"/>
+                      </a:solidFill>
+                      <a:prstDash val="solid"/>
+                    </a:lnB>
+                    <a:solidFill>
+                      <a:schemeClr val="bg1"/>
+                    </a:solidFill>
+                  </a:tcPr>
+                </a:tc>
+                <a:tc>
+                  <a:txBody>
+                    <a:bodyPr/>
+                    <a:p>
+                      <a:pPr>
+                        <a:buNone/>
+                      </a:pPr>
+                      <a:endParaRPr lang="zh-CN" altLang="en-US">
+                        <a:solidFill>
+                          <a:schemeClr val="tx1"/>
+                        </a:solidFill>
+                      </a:endParaRPr>
+                    </a:p>
+                  </a:txBody>
+                  <a:tcPr>
+                    <a:lnL w="12700" cmpd="sng">
+                      <a:solidFill>
+                        <a:schemeClr val="tx1"/>
+                      </a:solidFill>
+                      <a:prstDash val="solid"/>
+                    </a:lnL>
+                    <a:lnR w="12700" cmpd="sng">
+                      <a:solidFill>
+                        <a:schemeClr val="tx1"/>
+                      </a:solidFill>
+                      <a:prstDash val="solid"/>
+                    </a:lnR>
+                    <a:lnT w="12700" cmpd="sng">
+                      <a:solidFill>
+                        <a:schemeClr val="tx1"/>
+                      </a:solidFill>
+                      <a:prstDash val="solid"/>
+                    </a:lnT>
+                    <a:lnB w="12700" cmpd="sng">
+                      <a:solidFill>
+                        <a:schemeClr val="tx1"/>
+                      </a:solidFill>
+                      <a:prstDash val="solid"/>
+                    </a:lnB>
+                    <a:solidFill>
+                      <a:schemeClr val="tx1"/>
+                    </a:solidFill>
+                  </a:tcPr>
+                </a:tc>
+                <a:tc>
+                  <a:txBody>
+                    <a:bodyPr/>
+                    <a:p>
+                      <a:pPr>
+                        <a:buNone/>
+                      </a:pPr>
+                      <a:endParaRPr lang="zh-CN" altLang="en-US">
+                        <a:solidFill>
+                          <a:schemeClr val="tx1"/>
+                        </a:solidFill>
+                      </a:endParaRPr>
+                    </a:p>
+                  </a:txBody>
+                  <a:tcPr>
+                    <a:lnL w="12700" cmpd="sng">
+                      <a:solidFill>
+                        <a:schemeClr val="tx1"/>
+                      </a:solidFill>
+                      <a:prstDash val="solid"/>
+                    </a:lnL>
+                    <a:lnR w="12700" cmpd="sng">
+                      <a:solidFill>
+                        <a:schemeClr val="tx1"/>
+                      </a:solidFill>
+                      <a:prstDash val="solid"/>
+                    </a:lnR>
+                    <a:lnT w="12700" cmpd="sng">
+                      <a:solidFill>
+                        <a:schemeClr val="tx1"/>
+                      </a:solidFill>
+                      <a:prstDash val="solid"/>
+                    </a:lnT>
+                    <a:lnB w="12700" cmpd="sng">
+                      <a:solidFill>
+                        <a:schemeClr val="tx1"/>
+                      </a:solidFill>
+                      <a:prstDash val="solid"/>
+                    </a:lnB>
+                    <a:solidFill>
+                      <a:schemeClr val="bg1"/>
+                    </a:solidFill>
+                  </a:tcPr>
+                </a:tc>
+                <a:tc>
+                  <a:txBody>
+                    <a:bodyPr/>
+                    <a:p>
+                      <a:pPr>
+                        <a:buNone/>
+                      </a:pPr>
+                      <a:endParaRPr lang="zh-CN" altLang="en-US">
+                        <a:solidFill>
+                          <a:schemeClr val="tx1"/>
+                        </a:solidFill>
+                      </a:endParaRPr>
+                    </a:p>
+                  </a:txBody>
+                  <a:tcPr>
+                    <a:lnL w="12700" cmpd="sng">
+                      <a:solidFill>
+                        <a:schemeClr val="tx1"/>
+                      </a:solidFill>
+                      <a:prstDash val="solid"/>
+                    </a:lnL>
+                    <a:lnR w="12700" cmpd="sng">
+                      <a:solidFill>
+                        <a:schemeClr val="tx1"/>
+                      </a:solidFill>
+                      <a:prstDash val="solid"/>
+                    </a:lnR>
+                    <a:lnT w="12700" cmpd="sng">
+                      <a:solidFill>
+                        <a:schemeClr val="tx1"/>
+                      </a:solidFill>
+                      <a:prstDash val="solid"/>
+                    </a:lnT>
+                    <a:lnB w="12700" cmpd="sng">
+                      <a:solidFill>
+                        <a:schemeClr val="tx1"/>
+                      </a:solidFill>
+                      <a:prstDash val="solid"/>
+                    </a:lnB>
+                    <a:solidFill>
+                      <a:schemeClr val="tx1"/>
+                    </a:solidFill>
+                  </a:tcPr>
+                </a:tc>
+                <a:tc>
+                  <a:txBody>
+                    <a:bodyPr/>
+                    <a:p>
+                      <a:pPr>
+                        <a:buNone/>
+                      </a:pPr>
+                      <a:endParaRPr lang="zh-CN" altLang="en-US">
+                        <a:solidFill>
+                          <a:schemeClr val="tx1"/>
+                        </a:solidFill>
+                      </a:endParaRPr>
+                    </a:p>
+                  </a:txBody>
+                  <a:tcPr>
+                    <a:lnL w="12700" cmpd="sng">
+                      <a:solidFill>
+                        <a:schemeClr val="tx1"/>
+                      </a:solidFill>
+                      <a:prstDash val="solid"/>
+                    </a:lnL>
+                    <a:lnR w="12700" cmpd="sng">
+                      <a:solidFill>
+                        <a:schemeClr val="tx1"/>
+                      </a:solidFill>
+                      <a:prstDash val="solid"/>
+                    </a:lnR>
+                    <a:lnT w="12700" cmpd="sng">
+                      <a:solidFill>
+                        <a:schemeClr val="tx1"/>
+                      </a:solidFill>
+                      <a:prstDash val="solid"/>
+                    </a:lnT>
+                    <a:lnB w="12700" cmpd="sng">
+                      <a:solidFill>
+                        <a:schemeClr val="tx1"/>
+                      </a:solidFill>
+                      <a:prstDash val="solid"/>
+                    </a:lnB>
+                    <a:solidFill>
+                      <a:schemeClr val="accent6">
+                        <a:lumMod val="75000"/>
+                      </a:schemeClr>
+                    </a:solidFill>
+                  </a:tcPr>
+                </a:tc>
+              </a:tr>
+              <a:tr h="540000">
+                <a:tc>
+                  <a:txBody>
+                    <a:bodyPr/>
+                    <a:p>
+                      <a:pPr>
+                        <a:buNone/>
+                      </a:pPr>
+                      <a:endParaRPr lang="zh-CN" altLang="en-US">
+                        <a:solidFill>
+                          <a:schemeClr val="tx1"/>
+                        </a:solidFill>
+                      </a:endParaRPr>
+                    </a:p>
+                  </a:txBody>
+                  <a:tcPr>
+                    <a:lnL w="12700" cmpd="sng">
+                      <a:solidFill>
+                        <a:schemeClr val="tx1"/>
+                      </a:solidFill>
+                      <a:prstDash val="solid"/>
+                    </a:lnL>
+                    <a:lnR w="12700" cmpd="sng">
+                      <a:solidFill>
+                        <a:schemeClr val="tx1"/>
+                      </a:solidFill>
+                      <a:prstDash val="solid"/>
+                    </a:lnR>
+                    <a:lnT w="12700" cmpd="sng">
+                      <a:solidFill>
+                        <a:schemeClr val="tx1"/>
+                      </a:solidFill>
+                      <a:prstDash val="solid"/>
+                    </a:lnT>
+                    <a:lnB w="12700" cmpd="sng">
+                      <a:solidFill>
+                        <a:schemeClr val="tx1"/>
+                      </a:solidFill>
+                      <a:prstDash val="solid"/>
+                    </a:lnB>
+                    <a:solidFill>
+                      <a:schemeClr val="accent6">
+                        <a:lumMod val="75000"/>
+                      </a:schemeClr>
+                    </a:solidFill>
+                  </a:tcPr>
+                </a:tc>
+                <a:tc>
+                  <a:txBody>
+                    <a:bodyPr/>
+                    <a:p>
+                      <a:pPr>
+                        <a:buNone/>
+                      </a:pPr>
+                      <a:endParaRPr lang="zh-CN" altLang="en-US">
+                        <a:solidFill>
+                          <a:schemeClr val="tx1"/>
+                        </a:solidFill>
+                      </a:endParaRPr>
+                    </a:p>
+                  </a:txBody>
+                  <a:tcPr>
+                    <a:lnL w="12700" cmpd="sng">
+                      <a:solidFill>
+                        <a:schemeClr val="tx1"/>
+                      </a:solidFill>
+                      <a:prstDash val="solid"/>
+                    </a:lnL>
+                    <a:lnR w="12700" cmpd="sng">
+                      <a:solidFill>
+                        <a:schemeClr val="tx1"/>
+                      </a:solidFill>
+                      <a:prstDash val="solid"/>
+                    </a:lnR>
+                    <a:lnT w="12700" cmpd="sng">
+                      <a:solidFill>
+                        <a:schemeClr val="tx1"/>
+                      </a:solidFill>
+                      <a:prstDash val="solid"/>
+                    </a:lnT>
+                    <a:lnB w="12700" cmpd="sng">
+                      <a:solidFill>
+                        <a:schemeClr val="tx1"/>
+                      </a:solidFill>
+                      <a:prstDash val="solid"/>
+                    </a:lnB>
+                    <a:solidFill>
+                      <a:schemeClr val="tx1"/>
+                    </a:solidFill>
+                  </a:tcPr>
+                </a:tc>
+                <a:tc>
+                  <a:txBody>
+                    <a:bodyPr/>
+                    <a:p>
+                      <a:pPr>
+                        <a:buNone/>
+                      </a:pPr>
+                      <a:endParaRPr lang="zh-CN" altLang="en-US">
+                        <a:solidFill>
+                          <a:schemeClr val="tx1"/>
+                        </a:solidFill>
+                      </a:endParaRPr>
+                    </a:p>
+                  </a:txBody>
+                  <a:tcPr>
+                    <a:lnL w="12700" cmpd="sng">
+                      <a:solidFill>
+                        <a:schemeClr val="tx1"/>
+                      </a:solidFill>
+                      <a:prstDash val="solid"/>
+                    </a:lnL>
+                    <a:lnR w="12700" cmpd="sng">
+                      <a:solidFill>
+                        <a:schemeClr val="tx1"/>
+                      </a:solidFill>
+                      <a:prstDash val="solid"/>
+                    </a:lnR>
+                    <a:lnT w="12700" cmpd="sng">
+                      <a:solidFill>
+                        <a:schemeClr val="tx1"/>
+                      </a:solidFill>
+                      <a:prstDash val="solid"/>
+                    </a:lnT>
+                    <a:lnB w="12700" cmpd="sng">
+                      <a:solidFill>
+                        <a:schemeClr val="tx1"/>
+                      </a:solidFill>
+                      <a:prstDash val="solid"/>
+                    </a:lnB>
+                    <a:solidFill>
+                      <a:schemeClr val="bg1"/>
+                    </a:solidFill>
+                  </a:tcPr>
+                </a:tc>
+                <a:tc>
+                  <a:txBody>
+                    <a:bodyPr/>
+                    <a:p>
+                      <a:pPr>
+                        <a:buNone/>
+                      </a:pPr>
+                      <a:endParaRPr lang="zh-CN" altLang="en-US">
+                        <a:solidFill>
+                          <a:schemeClr val="tx1"/>
+                        </a:solidFill>
+                      </a:endParaRPr>
+                    </a:p>
+                  </a:txBody>
+                  <a:tcPr>
+                    <a:lnL w="12700" cmpd="sng">
+                      <a:solidFill>
+                        <a:schemeClr val="tx1"/>
+                      </a:solidFill>
+                      <a:prstDash val="solid"/>
+                    </a:lnL>
+                    <a:lnR w="12700" cmpd="sng">
+                      <a:solidFill>
+                        <a:schemeClr val="tx1"/>
+                      </a:solidFill>
+                      <a:prstDash val="solid"/>
+                    </a:lnR>
+                    <a:lnT w="12700" cmpd="sng">
+                      <a:solidFill>
+                        <a:schemeClr val="tx1"/>
+                      </a:solidFill>
+                      <a:prstDash val="solid"/>
+                    </a:lnT>
+                    <a:lnB w="12700" cmpd="sng">
+                      <a:solidFill>
+                        <a:schemeClr val="tx1"/>
+                      </a:solidFill>
+                      <a:prstDash val="solid"/>
+                    </a:lnB>
+                    <a:solidFill>
+                      <a:schemeClr val="tx1"/>
+                    </a:solidFill>
+                  </a:tcPr>
+                </a:tc>
+                <a:tc>
+                  <a:txBody>
+                    <a:bodyPr/>
+                    <a:p>
+                      <a:pPr>
+                        <a:buNone/>
+                      </a:pPr>
+                      <a:endParaRPr lang="zh-CN" altLang="en-US">
+                        <a:solidFill>
+                          <a:schemeClr val="tx1"/>
+                        </a:solidFill>
+                      </a:endParaRPr>
+                    </a:p>
+                  </a:txBody>
+                  <a:tcPr>
+                    <a:lnL w="12700" cmpd="sng">
+                      <a:solidFill>
+                        <a:schemeClr val="tx1"/>
+                      </a:solidFill>
+                      <a:prstDash val="solid"/>
+                    </a:lnL>
+                    <a:lnR w="12700" cmpd="sng">
+                      <a:solidFill>
+                        <a:schemeClr val="tx1"/>
+                      </a:solidFill>
+                      <a:prstDash val="solid"/>
+                    </a:lnR>
+                    <a:lnT w="12700" cmpd="sng">
+                      <a:solidFill>
+                        <a:schemeClr val="tx1"/>
+                      </a:solidFill>
+                      <a:prstDash val="solid"/>
+                    </a:lnT>
+                    <a:lnB w="12700" cmpd="sng">
+                      <a:solidFill>
+                        <a:schemeClr val="tx1"/>
+                      </a:solidFill>
+                      <a:prstDash val="solid"/>
+                    </a:lnB>
+                    <a:solidFill>
+                      <a:schemeClr val="bg1"/>
+                    </a:solidFill>
+                  </a:tcPr>
+                </a:tc>
+                <a:tc>
+                  <a:txBody>
+                    <a:bodyPr/>
+                    <a:p>
+                      <a:pPr>
+                        <a:buNone/>
+                      </a:pPr>
+                      <a:endParaRPr lang="zh-CN" altLang="en-US">
+                        <a:solidFill>
+                          <a:schemeClr val="tx1"/>
+                        </a:solidFill>
+                      </a:endParaRPr>
+                    </a:p>
+                  </a:txBody>
+                  <a:tcPr>
+                    <a:lnL w="12700" cmpd="sng">
+                      <a:solidFill>
+                        <a:schemeClr val="tx1"/>
+                      </a:solidFill>
+                      <a:prstDash val="solid"/>
+                    </a:lnL>
+                    <a:lnR w="12700" cmpd="sng">
+                      <a:solidFill>
+                        <a:schemeClr val="tx1"/>
+                      </a:solidFill>
+                      <a:prstDash val="solid"/>
+                    </a:lnR>
+                    <a:lnT w="12700" cmpd="sng">
+                      <a:solidFill>
+                        <a:schemeClr val="tx1"/>
+                      </a:solidFill>
+                      <a:prstDash val="solid"/>
+                    </a:lnT>
+                    <a:lnB w="12700" cmpd="sng">
+                      <a:solidFill>
+                        <a:schemeClr val="tx1"/>
+                      </a:solidFill>
+                      <a:prstDash val="solid"/>
+                    </a:lnB>
+                    <a:solidFill>
+                      <a:schemeClr val="tx1"/>
+                    </a:solidFill>
+                  </a:tcPr>
+                </a:tc>
+              </a:tr>
+              <a:tr h="540000">
+                <a:tc>
+                  <a:txBody>
+                    <a:bodyPr/>
+                    <a:p>
+                      <a:pPr>
+                        <a:buNone/>
+                      </a:pPr>
+                      <a:endParaRPr lang="zh-CN" altLang="en-US">
+                        <a:solidFill>
+                          <a:schemeClr val="tx1"/>
+                        </a:solidFill>
+                      </a:endParaRPr>
+                    </a:p>
+                  </a:txBody>
+                  <a:tcPr>
+                    <a:lnL w="12700" cmpd="sng">
+                      <a:solidFill>
+                        <a:schemeClr val="tx1"/>
+                      </a:solidFill>
+                      <a:prstDash val="solid"/>
+                    </a:lnL>
+                    <a:lnR w="12700" cmpd="sng">
+                      <a:solidFill>
+                        <a:schemeClr val="tx1"/>
+                      </a:solidFill>
+                      <a:prstDash val="solid"/>
+                    </a:lnR>
+                    <a:lnT w="12700" cmpd="sng">
+                      <a:solidFill>
+                        <a:schemeClr val="tx1"/>
+                      </a:solidFill>
+                      <a:prstDash val="solid"/>
+                    </a:lnT>
+                    <a:lnB w="12700" cmpd="sng">
+                      <a:solidFill>
+                        <a:schemeClr val="tx1"/>
+                      </a:solidFill>
+                      <a:prstDash val="solid"/>
+                    </a:lnB>
+                    <a:solidFill>
+                      <a:schemeClr val="tx1"/>
+                    </a:solidFill>
+                  </a:tcPr>
+                </a:tc>
+                <a:tc>
+                  <a:txBody>
+                    <a:bodyPr/>
+                    <a:p>
+                      <a:pPr>
+                        <a:buNone/>
+                      </a:pPr>
+                      <a:endParaRPr lang="zh-CN" altLang="en-US">
+                        <a:solidFill>
+                          <a:schemeClr val="tx1"/>
+                        </a:solidFill>
+                      </a:endParaRPr>
+                    </a:p>
+                  </a:txBody>
+                  <a:tcPr>
+                    <a:lnL w="12700" cmpd="sng">
+                      <a:solidFill>
+                        <a:schemeClr val="tx1"/>
+                      </a:solidFill>
+                      <a:prstDash val="solid"/>
+                    </a:lnL>
+                    <a:lnR w="12700" cmpd="sng">
+                      <a:solidFill>
+                        <a:schemeClr val="tx1"/>
+                      </a:solidFill>
+                      <a:prstDash val="solid"/>
+                    </a:lnR>
+                    <a:lnT w="12700" cmpd="sng">
+                      <a:solidFill>
+                        <a:schemeClr val="tx1"/>
+                      </a:solidFill>
+                      <a:prstDash val="solid"/>
+                    </a:lnT>
+                    <a:lnB w="12700" cmpd="sng">
+                      <a:solidFill>
+                        <a:schemeClr val="tx1"/>
+                      </a:solidFill>
+                      <a:prstDash val="solid"/>
+                    </a:lnB>
+                    <a:solidFill>
+                      <a:schemeClr val="bg1"/>
+                    </a:solidFill>
+                  </a:tcPr>
+                </a:tc>
+                <a:tc>
+                  <a:txBody>
+                    <a:bodyPr/>
+                    <a:p>
+                      <a:pPr>
+                        <a:buNone/>
+                      </a:pPr>
+                      <a:endParaRPr lang="zh-CN" altLang="en-US">
+                        <a:solidFill>
+                          <a:schemeClr val="tx1"/>
+                        </a:solidFill>
+                      </a:endParaRPr>
+                    </a:p>
+                  </a:txBody>
+                  <a:tcPr>
+                    <a:lnL w="12700" cmpd="sng">
+                      <a:solidFill>
+                        <a:schemeClr val="tx1"/>
+                      </a:solidFill>
+                      <a:prstDash val="solid"/>
+                    </a:lnL>
+                    <a:lnR w="12700" cmpd="sng">
+                      <a:solidFill>
+                        <a:schemeClr val="tx1"/>
+                      </a:solidFill>
+                      <a:prstDash val="solid"/>
+                    </a:lnR>
+                    <a:lnT w="12700" cmpd="sng">
+                      <a:solidFill>
+                        <a:schemeClr val="tx1"/>
+                      </a:solidFill>
+                      <a:prstDash val="solid"/>
+                    </a:lnT>
+                    <a:lnB w="12700" cmpd="sng">
+                      <a:solidFill>
+                        <a:schemeClr val="tx1"/>
+                      </a:solidFill>
+                      <a:prstDash val="solid"/>
+                    </a:lnB>
+                    <a:solidFill>
+                      <a:schemeClr val="tx1"/>
+                    </a:solidFill>
+                  </a:tcPr>
+                </a:tc>
+                <a:tc>
+                  <a:txBody>
+                    <a:bodyPr/>
+                    <a:p>
+                      <a:pPr>
+                        <a:buNone/>
+                      </a:pPr>
+                      <a:endParaRPr lang="zh-CN" altLang="en-US">
+                        <a:solidFill>
+                          <a:schemeClr val="tx1"/>
+                        </a:solidFill>
+                      </a:endParaRPr>
+                    </a:p>
+                  </a:txBody>
+                  <a:tcPr>
+                    <a:lnL w="12700" cmpd="sng">
+                      <a:solidFill>
+                        <a:schemeClr val="tx1"/>
+                      </a:solidFill>
+                      <a:prstDash val="solid"/>
+                    </a:lnL>
+                    <a:lnR w="12700" cmpd="sng">
+                      <a:solidFill>
+                        <a:schemeClr val="tx1"/>
+                      </a:solidFill>
+                      <a:prstDash val="solid"/>
+                    </a:lnR>
+                    <a:lnT w="12700" cmpd="sng">
+                      <a:solidFill>
+                        <a:schemeClr val="tx1"/>
+                      </a:solidFill>
+                      <a:prstDash val="solid"/>
+                    </a:lnT>
+                    <a:lnB w="12700" cmpd="sng">
+                      <a:solidFill>
+                        <a:schemeClr val="tx1"/>
+                      </a:solidFill>
+                      <a:prstDash val="solid"/>
+                    </a:lnB>
+                    <a:solidFill>
+                      <a:schemeClr val="accent6">
+                        <a:lumMod val="75000"/>
+                      </a:schemeClr>
+                    </a:solidFill>
+                  </a:tcPr>
+                </a:tc>
+                <a:tc>
+                  <a:txBody>
+                    <a:bodyPr/>
+                    <a:p>
+                      <a:pPr>
+                        <a:buNone/>
+                      </a:pPr>
+                      <a:endParaRPr lang="zh-CN" altLang="en-US">
+                        <a:solidFill>
+                          <a:schemeClr val="tx1"/>
+                        </a:solidFill>
+                      </a:endParaRPr>
+                    </a:p>
+                  </a:txBody>
+                  <a:tcPr>
+                    <a:lnL w="12700" cmpd="sng">
+                      <a:solidFill>
+                        <a:schemeClr val="tx1"/>
+                      </a:solidFill>
+                      <a:prstDash val="solid"/>
+                    </a:lnL>
+                    <a:lnR w="12700" cmpd="sng">
+                      <a:solidFill>
+                        <a:schemeClr val="tx1"/>
+                      </a:solidFill>
+                      <a:prstDash val="solid"/>
+                    </a:lnR>
+                    <a:lnT w="12700" cmpd="sng">
+                      <a:solidFill>
+                        <a:schemeClr val="tx1"/>
+                      </a:solidFill>
+                      <a:prstDash val="solid"/>
+                    </a:lnT>
+                    <a:lnB w="12700" cmpd="sng">
+                      <a:solidFill>
+                        <a:schemeClr val="tx1"/>
+                      </a:solidFill>
+                      <a:prstDash val="solid"/>
+                    </a:lnB>
+                    <a:solidFill>
+                      <a:schemeClr val="tx1"/>
+                    </a:solidFill>
+                  </a:tcPr>
+                </a:tc>
+                <a:tc>
+                  <a:txBody>
+                    <a:bodyPr/>
+                    <a:p>
+                      <a:pPr>
+                        <a:buNone/>
+                      </a:pPr>
+                      <a:endParaRPr lang="zh-CN" altLang="en-US">
+                        <a:solidFill>
+                          <a:schemeClr val="tx1"/>
+                        </a:solidFill>
+                      </a:endParaRPr>
+                    </a:p>
+                  </a:txBody>
+                  <a:tcPr>
+                    <a:lnL w="12700" cmpd="sng">
+                      <a:solidFill>
+                        <a:schemeClr val="tx1"/>
+                      </a:solidFill>
+                      <a:prstDash val="solid"/>
+                    </a:lnL>
+                    <a:lnR w="12700" cmpd="sng">
+                      <a:solidFill>
+                        <a:schemeClr val="tx1"/>
+                      </a:solidFill>
+                      <a:prstDash val="solid"/>
+                    </a:lnR>
+                    <a:lnT w="12700" cmpd="sng">
+                      <a:solidFill>
+                        <a:schemeClr val="tx1"/>
+                      </a:solidFill>
+                      <a:prstDash val="solid"/>
+                    </a:lnT>
+                    <a:lnB w="12700" cmpd="sng">
+                      <a:solidFill>
+                        <a:schemeClr val="tx1"/>
+                      </a:solidFill>
+                      <a:prstDash val="solid"/>
+                    </a:lnB>
+                    <a:solidFill>
+                      <a:schemeClr val="bg1"/>
+                    </a:solidFill>
+                  </a:tcPr>
+                </a:tc>
+              </a:tr>
+            </a:tbl>
+          </a:graphicData>
+        </a:graphic>
+      </p:graphicFrame>
+    </p:spTree>
+  </p:cSld>
+  <p:clrMapOvr>
+    <a:masterClrMapping/>
+  </p:clrMapOvr>
+</p:sld>
+</file>
+
+<file path=ppt/slides/slide5.xml><?xml version="1.0" encoding="utf-8"?>
+<p:sld xmlns:a="http://schemas.openxmlformats.org/drawingml/2006/main" xmlns:r="http://schemas.openxmlformats.org/officeDocument/2006/relationships" xmlns:p="http://schemas.openxmlformats.org/presentationml/2006/main">
+  <p:cSld>
+    <p:spTree>
+      <p:nvGrpSpPr>
+        <p:cNvPr id="1" name=""/>
+        <p:cNvGrpSpPr/>
+        <p:nvPr/>
+      </p:nvGrpSpPr>
+      <p:grpSpPr/>
+      <p:sp>
+        <p:nvSpPr>
+          <p:cNvPr id="2" name="标题 1"/>
+          <p:cNvSpPr>
+            <a:spLocks noGrp="1"/>
+          </p:cNvSpPr>
+          <p:nvPr>
+            <p:ph type="title"/>
+          </p:nvPr>
+        </p:nvSpPr>
+        <p:spPr/>
+        <p:txBody>
+          <a:bodyPr/>
+          <a:p>
+            <a:endParaRPr lang="zh-CN" altLang="en-US"/>
+          </a:p>
+        </p:txBody>
+      </p:sp>
+      <p:graphicFrame>
+        <p:nvGraphicFramePr>
+          <p:cNvPr id="4" name="内容占位符 3"/>
+          <p:cNvGraphicFramePr/>
+          <p:nvPr>
+            <p:ph idx="1"/>
+            <p:custDataLst>
+              <p:tags r:id="rId1"/>
+            </p:custDataLst>
+          </p:nvPr>
+        </p:nvGraphicFramePr>
+        <p:xfrm>
+          <a:off x="1754505" y="2287270"/>
+          <a:ext cx="2160000" cy="2160000"/>
+        </p:xfrm>
+        <a:graphic>
+          <a:graphicData uri="http://schemas.openxmlformats.org/drawingml/2006/table">
+            <a:tbl>
+              <a:tblPr firstRow="1" bandRow="1">
+                <a:tableStyleId>{5C22544A-7EE6-4342-B048-85BDC9FD1C3A}</a:tableStyleId>
+              </a:tblPr>
+              <a:tblGrid>
+                <a:gridCol w="540000"/>
+                <a:gridCol w="540000"/>
+                <a:gridCol w="540000"/>
+                <a:gridCol w="540000"/>
+              </a:tblGrid>
+              <a:tr h="540000">
+                <a:tc>
+                  <a:txBody>
+                    <a:bodyPr/>
+                    <a:p>
+                      <a:pPr>
+                        <a:buNone/>
+                      </a:pPr>
+                      <a:endParaRPr lang="zh-CN" altLang="en-US">
+                        <a:solidFill>
+                          <a:schemeClr val="accent6">
+                            <a:lumMod val="75000"/>
+                          </a:schemeClr>
+                        </a:solidFill>
+                        <a:highlight>
+                          <a:srgbClr val="FF0000"/>
+                        </a:highlight>
+                      </a:endParaRPr>
+                    </a:p>
+                  </a:txBody>
+                  <a:tcPr>
+                    <a:lnL w="12700" cmpd="sng">
+                      <a:solidFill>
+                        <a:schemeClr val="tx1"/>
+                      </a:solidFill>
+                      <a:prstDash val="solid"/>
+                    </a:lnL>
+                    <a:lnR w="12700" cmpd="sng">
+                      <a:solidFill>
+                        <a:schemeClr val="tx1"/>
+                      </a:solidFill>
+                      <a:prstDash val="solid"/>
+                    </a:lnR>
+                    <a:lnT w="12700" cmpd="sng">
+                      <a:solidFill>
+                        <a:schemeClr val="tx1"/>
+                      </a:solidFill>
+                      <a:prstDash val="solid"/>
+                    </a:lnT>
+                    <a:lnB w="12700" cmpd="sng">
+                      <a:solidFill>
+                        <a:schemeClr val="tx1"/>
+                      </a:solidFill>
+                      <a:prstDash val="solid"/>
+                    </a:lnB>
+                    <a:solidFill>
+                      <a:schemeClr val="accent6">
+                        <a:lumMod val="75000"/>
+                      </a:schemeClr>
+                    </a:solidFill>
+                  </a:tcPr>
+                </a:tc>
+                <a:tc>
+                  <a:txBody>
+                    <a:bodyPr/>
+                    <a:p>
+                      <a:pPr>
+                        <a:buNone/>
+                      </a:pPr>
+                      <a:endParaRPr lang="zh-CN" altLang="en-US">
+                        <a:solidFill>
+                          <a:schemeClr val="tx1"/>
+                        </a:solidFill>
+                      </a:endParaRPr>
+                    </a:p>
+                  </a:txBody>
+                  <a:tcPr>
+                    <a:lnL w="12700" cmpd="sng">
+                      <a:solidFill>
+                        <a:schemeClr val="tx1"/>
+                      </a:solidFill>
+                      <a:prstDash val="solid"/>
+                    </a:lnL>
+                    <a:lnR w="12700" cmpd="sng">
+                      <a:solidFill>
+                        <a:schemeClr val="tx1"/>
+                      </a:solidFill>
+                      <a:prstDash val="solid"/>
+                    </a:lnR>
+                    <a:lnT w="12700" cmpd="sng">
+                      <a:solidFill>
+                        <a:schemeClr val="tx1"/>
+                      </a:solidFill>
+                      <a:prstDash val="solid"/>
+                    </a:lnT>
+                    <a:lnB w="12700" cmpd="sng">
+                      <a:solidFill>
+                        <a:schemeClr val="tx1"/>
+                      </a:solidFill>
+                      <a:prstDash val="solid"/>
+                    </a:lnB>
+                    <a:solidFill>
+                      <a:schemeClr val="tx1"/>
+                    </a:solidFill>
+                  </a:tcPr>
+                </a:tc>
+                <a:tc>
+                  <a:txBody>
+                    <a:bodyPr/>
+                    <a:p>
+                      <a:pPr>
+                        <a:buNone/>
+                      </a:pPr>
+                      <a:endParaRPr lang="zh-CN" altLang="en-US">
+                        <a:solidFill>
+                          <a:schemeClr val="tx1"/>
+                        </a:solidFill>
+                      </a:endParaRPr>
+                    </a:p>
+                  </a:txBody>
+                  <a:tcPr>
+                    <a:lnL w="12700" cmpd="sng">
+                      <a:solidFill>
+                        <a:schemeClr val="tx1"/>
+                      </a:solidFill>
+                      <a:prstDash val="solid"/>
+                    </a:lnL>
+                    <a:lnR w="12700" cmpd="sng">
+                      <a:solidFill>
+                        <a:schemeClr val="tx1"/>
+                      </a:solidFill>
+                      <a:prstDash val="solid"/>
+                    </a:lnR>
+                    <a:lnT w="12700" cmpd="sng">
+                      <a:solidFill>
+                        <a:schemeClr val="tx1"/>
+                      </a:solidFill>
+                      <a:prstDash val="solid"/>
+                    </a:lnT>
+                    <a:lnB w="12700" cmpd="sng">
+                      <a:solidFill>
+                        <a:schemeClr val="tx1"/>
+                      </a:solidFill>
+                      <a:prstDash val="solid"/>
+                    </a:lnB>
+                    <a:solidFill>
+                      <a:schemeClr val="bg1"/>
+                    </a:solidFill>
+                  </a:tcPr>
+                </a:tc>
+                <a:tc>
+                  <a:txBody>
+                    <a:bodyPr/>
+                    <a:p>
+                      <a:pPr>
+                        <a:buNone/>
+                      </a:pPr>
+                      <a:endParaRPr lang="zh-CN" altLang="en-US">
+                        <a:solidFill>
+                          <a:schemeClr val="tx1"/>
+                        </a:solidFill>
+                      </a:endParaRPr>
+                    </a:p>
+                  </a:txBody>
+                  <a:tcPr>
+                    <a:lnL w="12700" cmpd="sng">
+                      <a:solidFill>
+                        <a:schemeClr val="tx1"/>
+                      </a:solidFill>
+                      <a:prstDash val="solid"/>
+                    </a:lnL>
+                    <a:lnR w="12700" cmpd="sng">
+                      <a:solidFill>
+                        <a:schemeClr val="tx1"/>
+                      </a:solidFill>
+                      <a:prstDash val="solid"/>
+                    </a:lnR>
+                    <a:lnT w="12700" cmpd="sng">
+                      <a:solidFill>
+                        <a:schemeClr val="tx1"/>
+                      </a:solidFill>
+                      <a:prstDash val="solid"/>
+                    </a:lnT>
+                    <a:lnB w="12700" cmpd="sng">
+                      <a:solidFill>
+                        <a:schemeClr val="tx1"/>
+                      </a:solidFill>
+                      <a:prstDash val="solid"/>
+                    </a:lnB>
+                    <a:solidFill>
+                      <a:schemeClr val="tx1"/>
+                    </a:solidFill>
+                  </a:tcPr>
+                </a:tc>
+              </a:tr>
+              <a:tr h="540000">
+                <a:tc>
+                  <a:txBody>
+                    <a:bodyPr/>
+                    <a:p>
+                      <a:pPr>
+                        <a:buNone/>
+                      </a:pPr>
+                      <a:endParaRPr lang="zh-CN" altLang="en-US">
+                        <a:solidFill>
+                          <a:schemeClr val="tx1"/>
+                        </a:solidFill>
+                      </a:endParaRPr>
+                    </a:p>
+                  </a:txBody>
+                  <a:tcPr>
+                    <a:lnL w="12700" cmpd="sng">
+                      <a:solidFill>
+                        <a:schemeClr val="tx1"/>
+                      </a:solidFill>
+                      <a:prstDash val="solid"/>
+                    </a:lnL>
+                    <a:lnR w="12700" cmpd="sng">
+                      <a:solidFill>
+                        <a:schemeClr val="tx1"/>
+                      </a:solidFill>
+                      <a:prstDash val="solid"/>
+                    </a:lnR>
+                    <a:lnT w="12700" cmpd="sng">
+                      <a:solidFill>
+                        <a:schemeClr val="tx1"/>
+                      </a:solidFill>
+                      <a:prstDash val="solid"/>
+                    </a:lnT>
+                    <a:lnB w="12700" cmpd="sng">
+                      <a:solidFill>
+                        <a:schemeClr val="tx1"/>
+                      </a:solidFill>
+                      <a:prstDash val="solid"/>
+                    </a:lnB>
+                    <a:solidFill>
+                      <a:schemeClr val="tx1"/>
+                    </a:solidFill>
+                  </a:tcPr>
+                </a:tc>
+                <a:tc>
+                  <a:txBody>
+                    <a:bodyPr/>
+                    <a:p>
+                      <a:pPr>
+                        <a:buNone/>
+                      </a:pPr>
+                      <a:endParaRPr lang="zh-CN" altLang="en-US">
+                        <a:solidFill>
+                          <a:schemeClr val="tx1"/>
+                        </a:solidFill>
+                      </a:endParaRPr>
+                    </a:p>
+                  </a:txBody>
+                  <a:tcPr>
+                    <a:lnL w="12700" cmpd="sng">
+                      <a:solidFill>
+                        <a:schemeClr val="tx1"/>
+                      </a:solidFill>
+                      <a:prstDash val="solid"/>
+                    </a:lnL>
+                    <a:lnR w="12700" cmpd="sng">
+                      <a:solidFill>
+                        <a:schemeClr val="tx1"/>
+                      </a:solidFill>
+                      <a:prstDash val="solid"/>
+                    </a:lnR>
+                    <a:lnT w="12700" cmpd="sng">
+                      <a:solidFill>
+                        <a:schemeClr val="tx1"/>
+                      </a:solidFill>
+                      <a:prstDash val="solid"/>
+                    </a:lnT>
+                    <a:lnB w="12700" cmpd="sng">
+                      <a:solidFill>
+                        <a:schemeClr val="tx1"/>
+                      </a:solidFill>
+                      <a:prstDash val="solid"/>
+                    </a:lnB>
+                    <a:solidFill>
+                      <a:schemeClr val="bg1"/>
+                    </a:solidFill>
+                  </a:tcPr>
+                </a:tc>
+                <a:tc>
+                  <a:txBody>
+                    <a:bodyPr/>
+                    <a:p>
+                      <a:pPr>
+                        <a:buNone/>
+                      </a:pPr>
+                      <a:endParaRPr lang="zh-CN" altLang="en-US">
+                        <a:solidFill>
+                          <a:schemeClr val="tx1"/>
+                        </a:solidFill>
+                      </a:endParaRPr>
+                    </a:p>
+                  </a:txBody>
+                  <a:tcPr>
+                    <a:lnL w="12700" cmpd="sng">
+                      <a:solidFill>
+                        <a:schemeClr val="tx1"/>
+                      </a:solidFill>
+                      <a:prstDash val="solid"/>
+                    </a:lnL>
+                    <a:lnR w="12700" cmpd="sng">
+                      <a:solidFill>
+                        <a:schemeClr val="tx1"/>
+                      </a:solidFill>
+                      <a:prstDash val="solid"/>
+                    </a:lnR>
+                    <a:lnT w="12700" cmpd="sng">
+                      <a:solidFill>
+                        <a:schemeClr val="tx1"/>
+                      </a:solidFill>
+                      <a:prstDash val="solid"/>
+                    </a:lnT>
+                    <a:lnB w="12700" cmpd="sng">
+                      <a:solidFill>
+                        <a:schemeClr val="tx1"/>
+                      </a:solidFill>
+                      <a:prstDash val="solid"/>
+                    </a:lnB>
+                    <a:solidFill>
+                      <a:schemeClr val="tx1"/>
+                    </a:solidFill>
+                  </a:tcPr>
+                </a:tc>
+                <a:tc>
+                  <a:txBody>
+                    <a:bodyPr/>
+                    <a:p>
+                      <a:pPr>
+                        <a:buNone/>
+                      </a:pPr>
+                      <a:endParaRPr lang="zh-CN" altLang="en-US">
+                        <a:solidFill>
+                          <a:schemeClr val="tx1"/>
+                        </a:solidFill>
+                      </a:endParaRPr>
+                    </a:p>
+                  </a:txBody>
+                  <a:tcPr>
+                    <a:lnL w="12700" cmpd="sng">
+                      <a:solidFill>
+                        <a:schemeClr val="tx1"/>
+                      </a:solidFill>
+                      <a:prstDash val="solid"/>
+                    </a:lnL>
+                    <a:lnR w="12700" cmpd="sng">
+                      <a:solidFill>
+                        <a:schemeClr val="tx1"/>
+                      </a:solidFill>
+                      <a:prstDash val="solid"/>
+                    </a:lnR>
+                    <a:lnT w="12700" cmpd="sng">
+                      <a:solidFill>
+                        <a:schemeClr val="tx1"/>
+                      </a:solidFill>
+                      <a:prstDash val="solid"/>
+                    </a:lnT>
+                    <a:lnB w="12700" cmpd="sng">
+                      <a:solidFill>
+                        <a:schemeClr val="tx1"/>
+                      </a:solidFill>
+                      <a:prstDash val="solid"/>
+                    </a:lnB>
+                    <a:solidFill>
+                      <a:schemeClr val="accent6">
+                        <a:lumMod val="75000"/>
+                      </a:schemeClr>
+                    </a:solidFill>
+                  </a:tcPr>
+                </a:tc>
+              </a:tr>
+              <a:tr h="540000">
+                <a:tc>
+                  <a:txBody>
+                    <a:bodyPr/>
+                    <a:p>
+                      <a:pPr>
+                        <a:buNone/>
+                      </a:pPr>
+                      <a:endParaRPr lang="zh-CN" altLang="en-US">
+                        <a:solidFill>
+                          <a:schemeClr val="tx1"/>
+                        </a:solidFill>
+                      </a:endParaRPr>
+                    </a:p>
+                  </a:txBody>
+                  <a:tcPr>
+                    <a:lnL w="12700" cmpd="sng">
+                      <a:solidFill>
+                        <a:schemeClr val="tx1"/>
+                      </a:solidFill>
+                      <a:prstDash val="solid"/>
+                    </a:lnL>
+                    <a:lnR w="12700" cmpd="sng">
+                      <a:solidFill>
+                        <a:schemeClr val="tx1"/>
+                      </a:solidFill>
+                      <a:prstDash val="solid"/>
+                    </a:lnR>
+                    <a:lnT w="12700" cmpd="sng">
+                      <a:solidFill>
+                        <a:schemeClr val="tx1"/>
+                      </a:solidFill>
+                      <a:prstDash val="solid"/>
+                    </a:lnT>
+                    <a:lnB w="12700" cmpd="sng">
+                      <a:solidFill>
+                        <a:schemeClr val="tx1"/>
+                      </a:solidFill>
+                      <a:prstDash val="solid"/>
+                    </a:lnB>
+                    <a:solidFill>
+                      <a:schemeClr val="bg1"/>
+                    </a:solidFill>
+                  </a:tcPr>
+                </a:tc>
+                <a:tc>
+                  <a:txBody>
+                    <a:bodyPr/>
+                    <a:p>
+                      <a:pPr>
+                        <a:buNone/>
+                      </a:pPr>
+                      <a:endParaRPr lang="zh-CN" altLang="en-US">
+                        <a:solidFill>
+                          <a:schemeClr val="tx1"/>
+                        </a:solidFill>
+                      </a:endParaRPr>
+                    </a:p>
+                  </a:txBody>
+                  <a:tcPr>
+                    <a:lnL w="12700" cmpd="sng">
+                      <a:solidFill>
+                        <a:schemeClr val="tx1"/>
+                      </a:solidFill>
+                      <a:prstDash val="solid"/>
+                    </a:lnL>
+                    <a:lnR w="12700" cmpd="sng">
+                      <a:solidFill>
+                        <a:schemeClr val="tx1"/>
+                      </a:solidFill>
+                      <a:prstDash val="solid"/>
+                    </a:lnR>
+                    <a:lnT w="12700" cmpd="sng">
+                      <a:solidFill>
+                        <a:schemeClr val="tx1"/>
+                      </a:solidFill>
+                      <a:prstDash val="solid"/>
+                    </a:lnT>
+                    <a:lnB w="12700" cmpd="sng">
+                      <a:solidFill>
+                        <a:schemeClr val="tx1"/>
+                      </a:solidFill>
+                      <a:prstDash val="solid"/>
+                    </a:lnB>
+                    <a:solidFill>
+                      <a:schemeClr val="tx1"/>
+                    </a:solidFill>
+                  </a:tcPr>
+                </a:tc>
+                <a:tc>
+                  <a:txBody>
+                    <a:bodyPr/>
+                    <a:p>
+                      <a:pPr>
+                        <a:buNone/>
+                      </a:pPr>
+                      <a:endParaRPr lang="zh-CN" altLang="en-US">
+                        <a:solidFill>
+                          <a:schemeClr val="tx1"/>
+                        </a:solidFill>
+                      </a:endParaRPr>
+                    </a:p>
+                  </a:txBody>
+                  <a:tcPr>
+                    <a:lnL w="12700" cmpd="sng">
+                      <a:solidFill>
+                        <a:schemeClr val="tx1"/>
+                      </a:solidFill>
+                      <a:prstDash val="solid"/>
+                    </a:lnL>
+                    <a:lnR w="12700" cmpd="sng">
+                      <a:solidFill>
+                        <a:schemeClr val="tx1"/>
+                      </a:solidFill>
+                      <a:prstDash val="solid"/>
+                    </a:lnR>
+                    <a:lnT w="12700" cmpd="sng">
+                      <a:solidFill>
+                        <a:schemeClr val="tx1"/>
+                      </a:solidFill>
+                      <a:prstDash val="solid"/>
+                    </a:lnT>
+                    <a:lnB w="12700" cmpd="sng">
+                      <a:solidFill>
+                        <a:schemeClr val="tx1"/>
+                      </a:solidFill>
+                      <a:prstDash val="solid"/>
+                    </a:lnB>
+                    <a:solidFill>
+                      <a:schemeClr val="bg1"/>
+                    </a:solidFill>
+                  </a:tcPr>
+                </a:tc>
+                <a:tc>
+                  <a:txBody>
+                    <a:bodyPr/>
+                    <a:p>
+                      <a:pPr>
+                        <a:buNone/>
+                      </a:pPr>
+                      <a:endParaRPr lang="zh-CN" altLang="en-US">
+                        <a:solidFill>
+                          <a:schemeClr val="tx1"/>
+                        </a:solidFill>
+                      </a:endParaRPr>
+                    </a:p>
+                  </a:txBody>
+                  <a:tcPr>
+                    <a:lnL w="12700" cmpd="sng">
+                      <a:solidFill>
+                        <a:schemeClr val="tx1"/>
+                      </a:solidFill>
+                      <a:prstDash val="solid"/>
+                    </a:lnL>
+                    <a:lnR w="12700" cmpd="sng">
+                      <a:solidFill>
+                        <a:schemeClr val="tx1"/>
+                      </a:solidFill>
+                      <a:prstDash val="solid"/>
+                    </a:lnR>
+                    <a:lnT w="12700" cmpd="sng">
+                      <a:solidFill>
+                        <a:schemeClr val="tx1"/>
+                      </a:solidFill>
+                      <a:prstDash val="solid"/>
+                    </a:lnT>
+                    <a:lnB w="12700" cmpd="sng">
+                      <a:solidFill>
+                        <a:schemeClr val="tx1"/>
+                      </a:solidFill>
+                      <a:prstDash val="solid"/>
+                    </a:lnB>
+                    <a:solidFill>
+                      <a:schemeClr val="tx1"/>
+                    </a:solidFill>
+                  </a:tcPr>
+                </a:tc>
+              </a:tr>
+              <a:tr h="540000">
+                <a:tc>
+                  <a:txBody>
+                    <a:bodyPr/>
+                    <a:p>
+                      <a:pPr>
+                        <a:buNone/>
+                      </a:pPr>
+                      <a:endParaRPr lang="zh-CN" altLang="en-US">
+                        <a:solidFill>
+                          <a:schemeClr val="tx1"/>
+                        </a:solidFill>
+                      </a:endParaRPr>
+                    </a:p>
+                  </a:txBody>
+                  <a:tcPr>
+                    <a:lnL w="12700" cmpd="sng">
+                      <a:solidFill>
+                        <a:schemeClr val="tx1"/>
+                      </a:solidFill>
+                      <a:prstDash val="solid"/>
+                    </a:lnL>
+                    <a:lnR w="12700" cmpd="sng">
+                      <a:solidFill>
+                        <a:schemeClr val="tx1"/>
+                      </a:solidFill>
+                      <a:prstDash val="solid"/>
+                    </a:lnR>
+                    <a:lnT w="12700" cmpd="sng">
+                      <a:solidFill>
+                        <a:schemeClr val="tx1"/>
+                      </a:solidFill>
+                      <a:prstDash val="solid"/>
+                    </a:lnT>
+                    <a:lnB w="12700" cmpd="sng">
+                      <a:solidFill>
+                        <a:schemeClr val="tx1"/>
+                      </a:solidFill>
+                      <a:prstDash val="solid"/>
+                    </a:lnB>
+                    <a:solidFill>
+                      <a:schemeClr val="tx1"/>
+                    </a:solidFill>
+                  </a:tcPr>
+                </a:tc>
+                <a:tc>
+                  <a:txBody>
+                    <a:bodyPr/>
+                    <a:p>
+                      <a:pPr>
+                        <a:buNone/>
+                      </a:pPr>
+                      <a:endParaRPr lang="zh-CN" altLang="en-US">
+                        <a:solidFill>
+                          <a:schemeClr val="tx1"/>
+                        </a:solidFill>
+                      </a:endParaRPr>
+                    </a:p>
+                  </a:txBody>
+                  <a:tcPr>
+                    <a:lnL w="12700" cmpd="sng">
+                      <a:solidFill>
+                        <a:schemeClr val="tx1"/>
+                      </a:solidFill>
+                      <a:prstDash val="solid"/>
+                    </a:lnL>
+                    <a:lnR w="12700" cmpd="sng">
+                      <a:solidFill>
+                        <a:schemeClr val="tx1"/>
+                      </a:solidFill>
+                      <a:prstDash val="solid"/>
+                    </a:lnR>
+                    <a:lnT w="12700" cmpd="sng">
+                      <a:solidFill>
+                        <a:schemeClr val="tx1"/>
+                      </a:solidFill>
+                      <a:prstDash val="solid"/>
+                    </a:lnT>
+                    <a:lnB w="12700" cmpd="sng">
+                      <a:solidFill>
+                        <a:schemeClr val="tx1"/>
+                      </a:solidFill>
+                      <a:prstDash val="solid"/>
+                    </a:lnB>
+                    <a:solidFill>
+                      <a:schemeClr val="accent6">
+                        <a:lumMod val="75000"/>
+                      </a:schemeClr>
+                    </a:solidFill>
+                  </a:tcPr>
+                </a:tc>
+                <a:tc>
+                  <a:txBody>
+                    <a:bodyPr/>
+                    <a:p>
+                      <a:pPr>
+                        <a:buNone/>
+                      </a:pPr>
+                      <a:endParaRPr lang="zh-CN" altLang="en-US">
+                        <a:solidFill>
+                          <a:schemeClr val="tx1"/>
+                        </a:solidFill>
+                      </a:endParaRPr>
+                    </a:p>
+                  </a:txBody>
+                  <a:tcPr>
+                    <a:lnL w="12700" cmpd="sng">
+                      <a:solidFill>
+                        <a:schemeClr val="tx1"/>
+                      </a:solidFill>
+                      <a:prstDash val="solid"/>
+                    </a:lnL>
+                    <a:lnR w="12700" cmpd="sng">
+                      <a:solidFill>
+                        <a:schemeClr val="tx1"/>
+                      </a:solidFill>
+                      <a:prstDash val="solid"/>
+                    </a:lnR>
+                    <a:lnT w="12700" cmpd="sng">
+                      <a:solidFill>
+                        <a:schemeClr val="tx1"/>
+                      </a:solidFill>
+                      <a:prstDash val="solid"/>
+                    </a:lnT>
+                    <a:lnB w="12700" cmpd="sng">
+                      <a:solidFill>
+                        <a:schemeClr val="tx1"/>
+                      </a:solidFill>
+                      <a:prstDash val="solid"/>
+                    </a:lnB>
+                    <a:solidFill>
+                      <a:schemeClr val="tx1"/>
+                    </a:solidFill>
+                  </a:tcPr>
+                </a:tc>
+                <a:tc>
+                  <a:txBody>
+                    <a:bodyPr/>
+                    <a:p>
+                      <a:pPr>
+                        <a:buNone/>
+                      </a:pPr>
+                      <a:endParaRPr lang="zh-CN" altLang="en-US">
+                        <a:solidFill>
+                          <a:schemeClr val="tx1"/>
+                        </a:solidFill>
+                      </a:endParaRPr>
+                    </a:p>
+                  </a:txBody>
+                  <a:tcPr>
+                    <a:lnL w="12700" cmpd="sng">
+                      <a:solidFill>
+                        <a:schemeClr val="tx1"/>
+                      </a:solidFill>
+                      <a:prstDash val="solid"/>
+                    </a:lnL>
+                    <a:lnR w="12700" cmpd="sng">
+                      <a:solidFill>
+                        <a:schemeClr val="tx1"/>
+                      </a:solidFill>
+                      <a:prstDash val="solid"/>
+                    </a:lnR>
+                    <a:lnT w="12700" cmpd="sng">
+                      <a:solidFill>
+                        <a:schemeClr val="tx1"/>
+                      </a:solidFill>
+                      <a:prstDash val="solid"/>
+                    </a:lnT>
+                    <a:lnB w="12700" cmpd="sng">
+                      <a:solidFill>
+                        <a:schemeClr val="tx1"/>
+                      </a:solidFill>
+                      <a:prstDash val="solid"/>
+                    </a:lnB>
+                    <a:solidFill>
+                      <a:schemeClr val="bg1"/>
+                    </a:solidFill>
+                  </a:tcPr>
+                </a:tc>
+              </a:tr>
+            </a:tbl>
+          </a:graphicData>
+        </a:graphic>
+      </p:graphicFrame>
+      <p:graphicFrame>
+        <p:nvGraphicFramePr>
+          <p:cNvPr id="6" name="表格 5"/>
+          <p:cNvGraphicFramePr/>
+          <p:nvPr>
+            <p:custDataLst>
+              <p:tags r:id="rId2"/>
+            </p:custDataLst>
+          </p:nvPr>
+        </p:nvGraphicFramePr>
+        <p:xfrm>
+          <a:off x="5676900" y="2263140"/>
+          <a:ext cx="3240000" cy="3240000"/>
+        </p:xfrm>
+        <a:graphic>
+          <a:graphicData uri="http://schemas.openxmlformats.org/drawingml/2006/table">
+            <a:tbl>
+              <a:tblPr firstRow="1" bandRow="1">
+                <a:tableStyleId>{5C22544A-7EE6-4342-B048-85BDC9FD1C3A}</a:tableStyleId>
+              </a:tblPr>
+              <a:tblGrid>
+                <a:gridCol w="540000"/>
+                <a:gridCol w="540000"/>
+                <a:gridCol w="540000"/>
+                <a:gridCol w="540000"/>
+                <a:gridCol w="540000"/>
+                <a:gridCol w="540000"/>
+              </a:tblGrid>
+              <a:tr h="540000">
+                <a:tc>
+                  <a:txBody>
+                    <a:bodyPr/>
+                    <a:p>
+                      <a:pPr>
+                        <a:buNone/>
+                      </a:pPr>
+                      <a:endParaRPr lang="zh-CN" altLang="en-US">
+                        <a:solidFill>
+                          <a:schemeClr val="tx1"/>
+                        </a:solidFill>
+                      </a:endParaRPr>
+                    </a:p>
+                  </a:txBody>
+                  <a:tcPr>
+                    <a:lnL w="12700" cmpd="sng">
+                      <a:solidFill>
+                        <a:schemeClr val="tx1"/>
+                      </a:solidFill>
+                      <a:prstDash val="solid"/>
+                    </a:lnL>
+                    <a:lnR w="12700" cmpd="sng">
+                      <a:solidFill>
+                        <a:schemeClr val="tx1"/>
+                      </a:solidFill>
+                      <a:prstDash val="solid"/>
+                    </a:lnR>
+                    <a:lnT w="12700" cmpd="sng">
+                      <a:solidFill>
+                        <a:schemeClr val="tx1"/>
+                      </a:solidFill>
+                      <a:prstDash val="solid"/>
+                    </a:lnT>
+                    <a:lnB w="12700" cmpd="sng">
+                      <a:solidFill>
+                        <a:schemeClr val="tx1"/>
+                      </a:solidFill>
+                      <a:prstDash val="solid"/>
+                    </a:lnB>
+                    <a:solidFill>
+                      <a:schemeClr val="accent6">
+                        <a:lumMod val="75000"/>
+                      </a:schemeClr>
+                    </a:solidFill>
+                  </a:tcPr>
+                </a:tc>
+                <a:tc>
+                  <a:txBody>
+                    <a:bodyPr/>
+                    <a:p>
+                      <a:pPr>
+                        <a:buNone/>
+                      </a:pPr>
+                      <a:endParaRPr lang="zh-CN" altLang="en-US">
+                        <a:solidFill>
+                          <a:schemeClr val="tx1"/>
+                        </a:solidFill>
+                      </a:endParaRPr>
+                    </a:p>
+                  </a:txBody>
+                  <a:tcPr>
+                    <a:lnL w="12700" cmpd="sng">
+                      <a:solidFill>
+                        <a:schemeClr val="tx1"/>
+                      </a:solidFill>
+                      <a:prstDash val="solid"/>
+                    </a:lnL>
+                    <a:lnR w="12700" cmpd="sng">
+                      <a:solidFill>
+                        <a:schemeClr val="tx1"/>
+                      </a:solidFill>
+                      <a:prstDash val="solid"/>
+                    </a:lnR>
+                    <a:lnT w="12700" cmpd="sng">
+                      <a:solidFill>
+                        <a:schemeClr val="tx1"/>
+                      </a:solidFill>
+                      <a:prstDash val="solid"/>
+                    </a:lnT>
+                    <a:lnB w="12700" cmpd="sng">
+                      <a:solidFill>
+                        <a:schemeClr val="tx1"/>
+                      </a:solidFill>
+                      <a:prstDash val="solid"/>
+                    </a:lnB>
+                    <a:solidFill>
+                      <a:schemeClr val="tx1"/>
+                    </a:solidFill>
+                  </a:tcPr>
+                </a:tc>
+                <a:tc>
+                  <a:txBody>
+                    <a:bodyPr/>
+                    <a:p>
+                      <a:pPr>
+                        <a:buNone/>
+                      </a:pPr>
+                      <a:endParaRPr lang="zh-CN" altLang="en-US">
+                        <a:solidFill>
+                          <a:schemeClr val="tx1"/>
+                        </a:solidFill>
+                      </a:endParaRPr>
+                    </a:p>
+                  </a:txBody>
+                  <a:tcPr>
+                    <a:lnL w="12700" cmpd="sng">
+                      <a:solidFill>
+                        <a:schemeClr val="tx1"/>
+                      </a:solidFill>
+                      <a:prstDash val="solid"/>
+                    </a:lnL>
+                    <a:lnR w="12700" cmpd="sng">
+                      <a:solidFill>
+                        <a:schemeClr val="tx1"/>
+                      </a:solidFill>
+                      <a:prstDash val="solid"/>
+                    </a:lnR>
+                    <a:lnT w="12700" cmpd="sng">
+                      <a:solidFill>
+                        <a:schemeClr val="tx1"/>
+                      </a:solidFill>
+                      <a:prstDash val="solid"/>
+                    </a:lnT>
+                    <a:lnB w="12700" cmpd="sng">
+                      <a:solidFill>
+                        <a:schemeClr val="tx1"/>
+                      </a:solidFill>
+                      <a:prstDash val="solid"/>
+                    </a:lnB>
+                    <a:solidFill>
+                      <a:schemeClr val="bg1"/>
+                    </a:solidFill>
+                  </a:tcPr>
+                </a:tc>
+                <a:tc>
+                  <a:txBody>
+                    <a:bodyPr/>
+                    <a:p>
+                      <a:pPr>
+                        <a:buNone/>
+                      </a:pPr>
+                      <a:endParaRPr lang="zh-CN" altLang="en-US">
+                        <a:solidFill>
+                          <a:schemeClr val="tx1"/>
+                        </a:solidFill>
+                      </a:endParaRPr>
+                    </a:p>
+                  </a:txBody>
+                  <a:tcPr>
+                    <a:lnL w="12700" cmpd="sng">
+                      <a:solidFill>
+                        <a:schemeClr val="tx1"/>
+                      </a:solidFill>
+                      <a:prstDash val="solid"/>
+                    </a:lnL>
+                    <a:lnR w="12700" cmpd="sng">
+                      <a:solidFill>
+                        <a:schemeClr val="tx1"/>
+                      </a:solidFill>
+                      <a:prstDash val="solid"/>
+                    </a:lnR>
+                    <a:lnT w="12700" cmpd="sng">
+                      <a:solidFill>
+                        <a:schemeClr val="tx1"/>
+                      </a:solidFill>
+                      <a:prstDash val="solid"/>
+                    </a:lnT>
+                    <a:lnB w="12700" cmpd="sng">
+                      <a:solidFill>
+                        <a:schemeClr val="tx1"/>
+                      </a:solidFill>
+                      <a:prstDash val="solid"/>
+                    </a:lnB>
+                    <a:solidFill>
+                      <a:schemeClr val="tx1"/>
+                    </a:solidFill>
+                  </a:tcPr>
+                </a:tc>
+                <a:tc>
+                  <a:txBody>
+                    <a:bodyPr/>
+                    <a:p>
+                      <a:pPr>
+                        <a:buNone/>
+                      </a:pPr>
+                      <a:endParaRPr lang="zh-CN" altLang="en-US">
+                        <a:solidFill>
+                          <a:schemeClr val="tx1"/>
+                        </a:solidFill>
+                      </a:endParaRPr>
+                    </a:p>
+                  </a:txBody>
+                  <a:tcPr>
+                    <a:lnL w="12700" cmpd="sng">
+                      <a:solidFill>
+                        <a:schemeClr val="tx1"/>
+                      </a:solidFill>
+                      <a:prstDash val="solid"/>
+                    </a:lnL>
+                    <a:lnR w="12700" cmpd="sng">
+                      <a:solidFill>
+                        <a:schemeClr val="tx1"/>
+                      </a:solidFill>
+                      <a:prstDash val="solid"/>
+                    </a:lnR>
+                    <a:lnT w="12700" cmpd="sng">
+                      <a:solidFill>
+                        <a:schemeClr val="tx1"/>
+                      </a:solidFill>
+                      <a:prstDash val="solid"/>
+                    </a:lnT>
+                    <a:lnB w="12700" cmpd="sng">
+                      <a:solidFill>
+                        <a:schemeClr val="tx1"/>
+                      </a:solidFill>
+                      <a:prstDash val="solid"/>
+                    </a:lnB>
+                    <a:solidFill>
+                      <a:schemeClr val="accent6">
+                        <a:lumMod val="75000"/>
+                      </a:schemeClr>
+                    </a:solidFill>
+                  </a:tcPr>
+                </a:tc>
+                <a:tc>
+                  <a:txBody>
+                    <a:bodyPr/>
+                    <a:p>
+                      <a:pPr>
+                        <a:buNone/>
+                      </a:pPr>
+                      <a:endParaRPr lang="zh-CN" altLang="en-US">
+                        <a:solidFill>
+                          <a:schemeClr val="tx1"/>
+                        </a:solidFill>
+                      </a:endParaRPr>
+                    </a:p>
+                  </a:txBody>
+                  <a:tcPr>
+                    <a:lnL w="12700" cmpd="sng">
+                      <a:solidFill>
+                        <a:schemeClr val="tx1"/>
+                      </a:solidFill>
+                      <a:prstDash val="solid"/>
+                    </a:lnL>
+                    <a:lnR w="12700" cmpd="sng">
+                      <a:solidFill>
+                        <a:schemeClr val="tx1"/>
+                      </a:solidFill>
+                      <a:prstDash val="solid"/>
+                    </a:lnR>
+                    <a:lnT w="12700" cmpd="sng">
+                      <a:solidFill>
+                        <a:schemeClr val="tx1"/>
+                      </a:solidFill>
+                      <a:prstDash val="solid"/>
+                    </a:lnT>
+                    <a:lnB w="12700" cmpd="sng">
+                      <a:solidFill>
+                        <a:schemeClr val="tx1"/>
+                      </a:solidFill>
+                      <a:prstDash val="solid"/>
+                    </a:lnB>
+                    <a:solidFill>
+                      <a:schemeClr val="tx1"/>
+                    </a:solidFill>
+                  </a:tcPr>
+                </a:tc>
+              </a:tr>
+              <a:tr h="540000">
+                <a:tc>
+                  <a:txBody>
+                    <a:bodyPr/>
+                    <a:p>
+                      <a:pPr>
+                        <a:buNone/>
+                      </a:pPr>
+                      <a:endParaRPr lang="zh-CN" altLang="en-US">
+                        <a:solidFill>
+                          <a:schemeClr val="tx1"/>
+                        </a:solidFill>
+                      </a:endParaRPr>
+                    </a:p>
+                  </a:txBody>
+                  <a:tcPr>
+                    <a:lnL w="12700" cmpd="sng">
+                      <a:solidFill>
+                        <a:schemeClr val="tx1"/>
+                      </a:solidFill>
+                      <a:prstDash val="solid"/>
+                    </a:lnL>
+                    <a:lnR w="12700" cmpd="sng">
+                      <a:solidFill>
+                        <a:schemeClr val="tx1"/>
+                      </a:solidFill>
+                      <a:prstDash val="solid"/>
+                    </a:lnR>
+                    <a:lnT w="12700" cmpd="sng">
+                      <a:solidFill>
+                        <a:schemeClr val="tx1"/>
+                      </a:solidFill>
+                      <a:prstDash val="solid"/>
+                    </a:lnT>
+                    <a:lnB w="12700" cmpd="sng">
+                      <a:solidFill>
+                        <a:schemeClr val="tx1"/>
+                      </a:solidFill>
+                      <a:prstDash val="solid"/>
+                    </a:lnB>
+                    <a:solidFill>
+                      <a:schemeClr val="tx1"/>
+                    </a:solidFill>
+                  </a:tcPr>
+                </a:tc>
+                <a:tc>
+                  <a:txBody>
+                    <a:bodyPr/>
+                    <a:p>
+                      <a:pPr>
+                        <a:buNone/>
+                      </a:pPr>
+                      <a:endParaRPr lang="zh-CN" altLang="en-US">
+                        <a:solidFill>
+                          <a:schemeClr val="tx1"/>
+                        </a:solidFill>
+                      </a:endParaRPr>
+                    </a:p>
+                  </a:txBody>
+                  <a:tcPr>
+                    <a:lnL w="12700" cmpd="sng">
+                      <a:solidFill>
+                        <a:schemeClr val="tx1"/>
+                      </a:solidFill>
+                      <a:prstDash val="solid"/>
+                    </a:lnL>
+                    <a:lnR w="12700" cmpd="sng">
+                      <a:solidFill>
+                        <a:schemeClr val="tx1"/>
+                      </a:solidFill>
+                      <a:prstDash val="solid"/>
+                    </a:lnR>
+                    <a:lnT w="12700" cmpd="sng">
+                      <a:solidFill>
+                        <a:schemeClr val="tx1"/>
+                      </a:solidFill>
+                      <a:prstDash val="solid"/>
+                    </a:lnT>
+                    <a:lnB w="12700" cmpd="sng">
+                      <a:solidFill>
+                        <a:schemeClr val="tx1"/>
+                      </a:solidFill>
+                      <a:prstDash val="solid"/>
+                    </a:lnB>
+                    <a:solidFill>
+                      <a:schemeClr val="bg1"/>
+                    </a:solidFill>
+                  </a:tcPr>
+                </a:tc>
+                <a:tc>
+                  <a:txBody>
+                    <a:bodyPr/>
+                    <a:p>
+                      <a:pPr>
+                        <a:buNone/>
+                      </a:pPr>
+                      <a:endParaRPr lang="zh-CN" altLang="en-US">
+                        <a:solidFill>
+                          <a:schemeClr val="tx1"/>
+                        </a:solidFill>
+                      </a:endParaRPr>
+                    </a:p>
+                  </a:txBody>
+                  <a:tcPr>
+                    <a:lnL w="12700" cmpd="sng">
+                      <a:solidFill>
+                        <a:schemeClr val="tx1"/>
+                      </a:solidFill>
+                      <a:prstDash val="solid"/>
+                    </a:lnL>
+                    <a:lnR w="12700" cmpd="sng">
+                      <a:solidFill>
+                        <a:schemeClr val="tx1"/>
+                      </a:solidFill>
+                      <a:prstDash val="solid"/>
+                    </a:lnR>
+                    <a:lnT w="12700" cmpd="sng">
+                      <a:solidFill>
+                        <a:schemeClr val="tx1"/>
+                      </a:solidFill>
+                      <a:prstDash val="solid"/>
+                    </a:lnT>
+                    <a:lnB w="12700" cmpd="sng">
+                      <a:solidFill>
+                        <a:schemeClr val="tx1"/>
+                      </a:solidFill>
+                      <a:prstDash val="solid"/>
+                    </a:lnB>
+                    <a:solidFill>
+                      <a:schemeClr val="tx1"/>
+                    </a:solidFill>
+                  </a:tcPr>
+                </a:tc>
+                <a:tc>
+                  <a:txBody>
+                    <a:bodyPr/>
+                    <a:p>
+                      <a:pPr>
+                        <a:buNone/>
+                      </a:pPr>
+                      <a:endParaRPr lang="zh-CN" altLang="en-US">
+                        <a:solidFill>
+                          <a:schemeClr val="tx1"/>
+                        </a:solidFill>
+                      </a:endParaRPr>
+                    </a:p>
+                  </a:txBody>
+                  <a:tcPr>
+                    <a:lnL w="12700" cmpd="sng">
+                      <a:solidFill>
+                        <a:schemeClr val="tx1"/>
+                      </a:solidFill>
+                      <a:prstDash val="solid"/>
+                    </a:lnL>
+                    <a:lnR w="12700" cmpd="sng">
+                      <a:solidFill>
+                        <a:schemeClr val="tx1"/>
+                      </a:solidFill>
+                      <a:prstDash val="solid"/>
+                    </a:lnR>
+                    <a:lnT w="12700" cmpd="sng">
+                      <a:solidFill>
+                        <a:schemeClr val="tx1"/>
+                      </a:solidFill>
+                      <a:prstDash val="solid"/>
+                    </a:lnT>
+                    <a:lnB w="12700" cmpd="sng">
+                      <a:solidFill>
+                        <a:schemeClr val="tx1"/>
+                      </a:solidFill>
+                      <a:prstDash val="solid"/>
+                    </a:lnB>
+                    <a:solidFill>
+                      <a:schemeClr val="bg1"/>
+                    </a:solidFill>
+                  </a:tcPr>
+                </a:tc>
+                <a:tc>
+                  <a:txBody>
+                    <a:bodyPr/>
+                    <a:p>
+                      <a:pPr>
+                        <a:buNone/>
+                      </a:pPr>
+                      <a:endParaRPr lang="zh-CN" altLang="en-US">
+                        <a:solidFill>
+                          <a:schemeClr val="tx1"/>
+                        </a:solidFill>
+                      </a:endParaRPr>
+                    </a:p>
+                  </a:txBody>
+                  <a:tcPr>
+                    <a:lnL w="12700" cmpd="sng">
+                      <a:solidFill>
+                        <a:schemeClr val="tx1"/>
+                      </a:solidFill>
+                      <a:prstDash val="solid"/>
+                    </a:lnL>
+                    <a:lnR w="12700" cmpd="sng">
+                      <a:solidFill>
+                        <a:schemeClr val="tx1"/>
+                      </a:solidFill>
+                      <a:prstDash val="solid"/>
+                    </a:lnR>
+                    <a:lnT w="12700" cmpd="sng">
+                      <a:solidFill>
+                        <a:schemeClr val="tx1"/>
+                      </a:solidFill>
+                      <a:prstDash val="solid"/>
+                    </a:lnT>
+                    <a:lnB w="12700" cmpd="sng">
+                      <a:solidFill>
+                        <a:schemeClr val="tx1"/>
+                      </a:solidFill>
+                      <a:prstDash val="solid"/>
+                    </a:lnB>
+                    <a:solidFill>
+                      <a:schemeClr val="tx1"/>
+                    </a:solidFill>
+                  </a:tcPr>
+                </a:tc>
+                <a:tc>
+                  <a:txBody>
+                    <a:bodyPr/>
+                    <a:p>
+                      <a:pPr>
+                        <a:buNone/>
+                      </a:pPr>
+                      <a:endParaRPr lang="zh-CN" altLang="en-US">
+                        <a:solidFill>
+                          <a:schemeClr val="tx1"/>
+                        </a:solidFill>
+                      </a:endParaRPr>
+                    </a:p>
+                  </a:txBody>
+                  <a:tcPr>
+                    <a:lnL w="12700" cmpd="sng">
+                      <a:solidFill>
+                        <a:schemeClr val="tx1"/>
+                      </a:solidFill>
+                      <a:prstDash val="solid"/>
+                    </a:lnL>
+                    <a:lnR w="12700" cmpd="sng">
+                      <a:solidFill>
+                        <a:schemeClr val="tx1"/>
+                      </a:solidFill>
+                      <a:prstDash val="solid"/>
+                    </a:lnR>
+                    <a:lnT w="12700" cmpd="sng">
+                      <a:solidFill>
+                        <a:schemeClr val="tx1"/>
+                      </a:solidFill>
+                      <a:prstDash val="solid"/>
+                    </a:lnT>
+                    <a:lnB w="12700" cmpd="sng">
+                      <a:solidFill>
+                        <a:schemeClr val="tx1"/>
+                      </a:solidFill>
+                      <a:prstDash val="solid"/>
+                    </a:lnB>
+                    <a:solidFill>
+                      <a:schemeClr val="bg1"/>
+                    </a:solidFill>
+                  </a:tcPr>
+                </a:tc>
+              </a:tr>
+              <a:tr h="540000">
+                <a:tc>
+                  <a:txBody>
+                    <a:bodyPr/>
+                    <a:p>
+                      <a:pPr>
+                        <a:buNone/>
+                      </a:pPr>
+                      <a:endParaRPr lang="zh-CN" altLang="en-US">
+                        <a:solidFill>
+                          <a:schemeClr val="tx1"/>
+                        </a:solidFill>
+                      </a:endParaRPr>
+                    </a:p>
+                  </a:txBody>
+                  <a:tcPr>
+                    <a:lnL w="12700" cmpd="sng">
+                      <a:solidFill>
+                        <a:schemeClr val="tx1"/>
+                      </a:solidFill>
+                      <a:prstDash val="solid"/>
+                    </a:lnL>
+                    <a:lnR w="12700" cmpd="sng">
+                      <a:solidFill>
+                        <a:schemeClr val="tx1"/>
+                      </a:solidFill>
+                      <a:prstDash val="solid"/>
+                    </a:lnR>
+                    <a:lnT w="12700" cmpd="sng">
+                      <a:solidFill>
+                        <a:schemeClr val="tx1"/>
+                      </a:solidFill>
+                      <a:prstDash val="solid"/>
+                    </a:lnT>
+                    <a:lnB w="12700" cmpd="sng">
+                      <a:solidFill>
+                        <a:schemeClr val="tx1"/>
+                      </a:solidFill>
+                      <a:prstDash val="solid"/>
+                    </a:lnB>
+                    <a:solidFill>
+                      <a:schemeClr val="bg1"/>
+                    </a:solidFill>
+                  </a:tcPr>
+                </a:tc>
+                <a:tc>
+                  <a:txBody>
+                    <a:bodyPr/>
+                    <a:p>
+                      <a:pPr>
+                        <a:buNone/>
+                      </a:pPr>
+                      <a:endParaRPr lang="zh-CN" altLang="en-US">
+                        <a:solidFill>
+                          <a:schemeClr val="tx1"/>
+                        </a:solidFill>
+                      </a:endParaRPr>
+                    </a:p>
+                  </a:txBody>
+                  <a:tcPr>
+                    <a:lnL w="12700" cmpd="sng">
+                      <a:solidFill>
+                        <a:schemeClr val="tx1"/>
+                      </a:solidFill>
+                      <a:prstDash val="solid"/>
+                    </a:lnL>
+                    <a:lnR w="12700" cmpd="sng">
+                      <a:solidFill>
+                        <a:schemeClr val="tx1"/>
+                      </a:solidFill>
+                      <a:prstDash val="solid"/>
+                    </a:lnR>
+                    <a:lnT w="12700" cmpd="sng">
+                      <a:solidFill>
+                        <a:schemeClr val="tx1"/>
+                      </a:solidFill>
+                      <a:prstDash val="solid"/>
+                    </a:lnT>
+                    <a:lnB w="12700" cmpd="sng">
+                      <a:solidFill>
+                        <a:schemeClr val="tx1"/>
+                      </a:solidFill>
+                      <a:prstDash val="solid"/>
+                    </a:lnB>
+                    <a:solidFill>
+                      <a:schemeClr val="tx1"/>
+                    </a:solidFill>
+                  </a:tcPr>
+                </a:tc>
+                <a:tc>
+                  <a:txBody>
+                    <a:bodyPr/>
+                    <a:p>
+                      <a:pPr>
+                        <a:buNone/>
+                      </a:pPr>
+                      <a:endParaRPr lang="zh-CN" altLang="en-US">
+                        <a:solidFill>
+                          <a:schemeClr val="tx1"/>
+                        </a:solidFill>
+                      </a:endParaRPr>
+                    </a:p>
+                  </a:txBody>
+                  <a:tcPr>
+                    <a:lnL w="12700" cmpd="sng">
+                      <a:solidFill>
+                        <a:schemeClr val="tx1"/>
+                      </a:solidFill>
+                      <a:prstDash val="solid"/>
+                    </a:lnL>
+                    <a:lnR w="12700" cmpd="sng">
+                      <a:solidFill>
+                        <a:schemeClr val="tx1"/>
+                      </a:solidFill>
+                      <a:prstDash val="solid"/>
+                    </a:lnR>
+                    <a:lnT w="12700" cmpd="sng">
+                      <a:solidFill>
+                        <a:schemeClr val="tx1"/>
+                      </a:solidFill>
+                      <a:prstDash val="solid"/>
+                    </a:lnT>
+                    <a:lnB w="12700" cmpd="sng">
+                      <a:solidFill>
+                        <a:schemeClr val="tx1"/>
+                      </a:solidFill>
+                      <a:prstDash val="solid"/>
+                    </a:lnB>
+                    <a:solidFill>
+                      <a:schemeClr val="accent6">
+                        <a:lumMod val="75000"/>
+                      </a:schemeClr>
+                    </a:solidFill>
+                  </a:tcPr>
+                </a:tc>
+                <a:tc>
+                  <a:txBody>
+                    <a:bodyPr/>
+                    <a:p>
+                      <a:pPr>
+                        <a:buNone/>
+                      </a:pPr>
+                      <a:endParaRPr lang="zh-CN" altLang="en-US">
+                        <a:solidFill>
+                          <a:schemeClr val="tx1"/>
+                        </a:solidFill>
+                      </a:endParaRPr>
+                    </a:p>
+                  </a:txBody>
+                  <a:tcPr>
+                    <a:lnL w="12700" cmpd="sng">
+                      <a:solidFill>
+                        <a:schemeClr val="tx1"/>
+                      </a:solidFill>
+                      <a:prstDash val="solid"/>
+                    </a:lnL>
+                    <a:lnR w="12700" cmpd="sng">
+                      <a:solidFill>
+                        <a:schemeClr val="tx1"/>
+                      </a:solidFill>
+                      <a:prstDash val="solid"/>
+                    </a:lnR>
+                    <a:lnT w="12700" cmpd="sng">
+                      <a:solidFill>
+                        <a:schemeClr val="tx1"/>
+                      </a:solidFill>
+                      <a:prstDash val="solid"/>
+                    </a:lnT>
+                    <a:lnB w="12700" cmpd="sng">
+                      <a:solidFill>
+                        <a:schemeClr val="tx1"/>
+                      </a:solidFill>
+                      <a:prstDash val="solid"/>
+                    </a:lnB>
+                    <a:solidFill>
+                      <a:schemeClr val="tx1"/>
+                    </a:solidFill>
+                  </a:tcPr>
+                </a:tc>
+                <a:tc>
+                  <a:txBody>
+                    <a:bodyPr/>
+                    <a:p>
+                      <a:pPr>
+                        <a:buNone/>
+                      </a:pPr>
+                      <a:endParaRPr lang="zh-CN" altLang="en-US">
+                        <a:solidFill>
+                          <a:schemeClr val="tx1"/>
+                        </a:solidFill>
+                      </a:endParaRPr>
+                    </a:p>
+                  </a:txBody>
+                  <a:tcPr>
+                    <a:lnL w="12700" cmpd="sng">
+                      <a:solidFill>
+                        <a:schemeClr val="tx1"/>
+                      </a:solidFill>
+                      <a:prstDash val="solid"/>
+                    </a:lnL>
+                    <a:lnR w="12700" cmpd="sng">
+                      <a:solidFill>
+                        <a:schemeClr val="tx1"/>
+                      </a:solidFill>
+                      <a:prstDash val="solid"/>
+                    </a:lnR>
+                    <a:lnT w="12700" cmpd="sng">
+                      <a:solidFill>
+                        <a:schemeClr val="tx1"/>
+                      </a:solidFill>
+                      <a:prstDash val="solid"/>
+                    </a:lnT>
+                    <a:lnB w="12700" cmpd="sng">
+                      <a:solidFill>
+                        <a:schemeClr val="tx1"/>
+                      </a:solidFill>
+                      <a:prstDash val="solid"/>
+                    </a:lnB>
+                    <a:solidFill>
+                      <a:schemeClr val="bg1"/>
+                    </a:solidFill>
+                  </a:tcPr>
+                </a:tc>
+                <a:tc>
+                  <a:txBody>
+                    <a:bodyPr/>
+                    <a:p>
+                      <a:pPr>
+                        <a:buNone/>
+                      </a:pPr>
+                      <a:endParaRPr lang="zh-CN" altLang="en-US">
+                        <a:solidFill>
+                          <a:schemeClr val="tx1"/>
+                        </a:solidFill>
+                      </a:endParaRPr>
+                    </a:p>
+                  </a:txBody>
+                  <a:tcPr>
+                    <a:lnL w="12700" cmpd="sng">
+                      <a:solidFill>
+                        <a:schemeClr val="tx1"/>
+                      </a:solidFill>
+                      <a:prstDash val="solid"/>
+                    </a:lnL>
+                    <a:lnR w="12700" cmpd="sng">
+                      <a:solidFill>
+                        <a:schemeClr val="tx1"/>
+                      </a:solidFill>
+                      <a:prstDash val="solid"/>
+                    </a:lnR>
+                    <a:lnT w="12700" cmpd="sng">
+                      <a:solidFill>
+                        <a:schemeClr val="tx1"/>
+                      </a:solidFill>
+                      <a:prstDash val="solid"/>
+                    </a:lnT>
+                    <a:lnB w="12700" cmpd="sng">
+                      <a:solidFill>
+                        <a:schemeClr val="tx1"/>
+                      </a:solidFill>
+                      <a:prstDash val="solid"/>
+                    </a:lnB>
+                    <a:solidFill>
+                      <a:schemeClr val="tx1"/>
+                    </a:solidFill>
+                  </a:tcPr>
+                </a:tc>
+              </a:tr>
+              <a:tr h="540000">
+                <a:tc>
+                  <a:txBody>
+                    <a:bodyPr/>
+                    <a:p>
+                      <a:pPr>
+                        <a:buNone/>
+                      </a:pPr>
+                      <a:endParaRPr lang="zh-CN" altLang="en-US">
+                        <a:solidFill>
+                          <a:schemeClr val="tx1"/>
+                        </a:solidFill>
+                      </a:endParaRPr>
+                    </a:p>
+                  </a:txBody>
+                  <a:tcPr>
+                    <a:lnL w="12700" cmpd="sng">
+                      <a:solidFill>
+                        <a:schemeClr val="tx1"/>
+                      </a:solidFill>
+                      <a:prstDash val="solid"/>
+                    </a:lnL>
+                    <a:lnR w="12700" cmpd="sng">
+                      <a:solidFill>
+                        <a:schemeClr val="tx1"/>
+                      </a:solidFill>
+                      <a:prstDash val="solid"/>
+                    </a:lnR>
+                    <a:lnT w="12700" cmpd="sng">
+                      <a:solidFill>
+                        <a:schemeClr val="tx1"/>
+                      </a:solidFill>
+                      <a:prstDash val="solid"/>
+                    </a:lnT>
+                    <a:lnB w="12700" cmpd="sng">
+                      <a:solidFill>
+                        <a:schemeClr val="tx1"/>
+                      </a:solidFill>
+                      <a:prstDash val="solid"/>
+                    </a:lnB>
+                    <a:solidFill>
+                      <a:schemeClr val="tx1"/>
+                    </a:solidFill>
+                  </a:tcPr>
+                </a:tc>
+                <a:tc>
+                  <a:txBody>
+                    <a:bodyPr/>
+                    <a:p>
+                      <a:pPr>
+                        <a:buNone/>
+                      </a:pPr>
+                      <a:endParaRPr lang="zh-CN" altLang="en-US">
+                        <a:solidFill>
+                          <a:schemeClr val="tx1"/>
+                        </a:solidFill>
+                      </a:endParaRPr>
+                    </a:p>
+                  </a:txBody>
+                  <a:tcPr>
+                    <a:lnL w="12700" cmpd="sng">
+                      <a:solidFill>
+                        <a:schemeClr val="tx1"/>
+                      </a:solidFill>
+                      <a:prstDash val="solid"/>
+                    </a:lnL>
+                    <a:lnR w="12700" cmpd="sng">
+                      <a:solidFill>
+                        <a:schemeClr val="tx1"/>
+                      </a:solidFill>
+                      <a:prstDash val="solid"/>
+                    </a:lnR>
+                    <a:lnT w="12700" cmpd="sng">
+                      <a:solidFill>
+                        <a:schemeClr val="tx1"/>
+                      </a:solidFill>
+                      <a:prstDash val="solid"/>
+                    </a:lnT>
+                    <a:lnB w="12700" cmpd="sng">
+                      <a:solidFill>
+                        <a:schemeClr val="tx1"/>
+                      </a:solidFill>
+                      <a:prstDash val="solid"/>
+                    </a:lnB>
+                    <a:solidFill>
+                      <a:schemeClr val="bg1"/>
+                    </a:solidFill>
+                  </a:tcPr>
+                </a:tc>
+                <a:tc>
+                  <a:txBody>
+                    <a:bodyPr/>
+                    <a:p>
+                      <a:pPr>
+                        <a:buNone/>
+                      </a:pPr>
+                      <a:endParaRPr lang="zh-CN" altLang="en-US">
+                        <a:solidFill>
+                          <a:schemeClr val="tx1"/>
+                        </a:solidFill>
+                      </a:endParaRPr>
+                    </a:p>
+                  </a:txBody>
+                  <a:tcPr>
+                    <a:lnL w="12700" cmpd="sng">
+                      <a:solidFill>
+                        <a:schemeClr val="tx1"/>
+                      </a:solidFill>
+                      <a:prstDash val="solid"/>
+                    </a:lnL>
+                    <a:lnR w="12700" cmpd="sng">
+                      <a:solidFill>
+                        <a:schemeClr val="tx1"/>
+                      </a:solidFill>
+                      <a:prstDash val="solid"/>
+                    </a:lnR>
+                    <a:lnT w="12700" cmpd="sng">
+                      <a:solidFill>
+                        <a:schemeClr val="tx1"/>
+                      </a:solidFill>
+                      <a:prstDash val="solid"/>
+                    </a:lnT>
+                    <a:lnB w="12700" cmpd="sng">
+                      <a:solidFill>
+                        <a:schemeClr val="tx1"/>
+                      </a:solidFill>
+                      <a:prstDash val="solid"/>
+                    </a:lnB>
+                    <a:solidFill>
+                      <a:schemeClr val="tx1"/>
+                    </a:solidFill>
+                  </a:tcPr>
+                </a:tc>
+                <a:tc>
+                  <a:txBody>
+                    <a:bodyPr/>
+                    <a:p>
+                      <a:pPr>
+                        <a:buNone/>
+                      </a:pPr>
+                      <a:endParaRPr lang="zh-CN" altLang="en-US">
+                        <a:solidFill>
+                          <a:schemeClr val="tx1"/>
+                        </a:solidFill>
+                      </a:endParaRPr>
+                    </a:p>
+                  </a:txBody>
+                  <a:tcPr>
+                    <a:lnL w="12700" cmpd="sng">
+                      <a:solidFill>
+                        <a:schemeClr val="tx1"/>
+                      </a:solidFill>
+                      <a:prstDash val="solid"/>
+                    </a:lnL>
+                    <a:lnR w="12700" cmpd="sng">
+                      <a:solidFill>
+                        <a:schemeClr val="tx1"/>
+                      </a:solidFill>
+                      <a:prstDash val="solid"/>
+                    </a:lnR>
+                    <a:lnT w="12700" cmpd="sng">
+                      <a:solidFill>
+                        <a:schemeClr val="tx1"/>
+                      </a:solidFill>
+                      <a:prstDash val="solid"/>
+                    </a:lnT>
+                    <a:lnB w="12700" cmpd="sng">
+                      <a:solidFill>
+                        <a:schemeClr val="tx1"/>
+                      </a:solidFill>
+                      <a:prstDash val="solid"/>
+                    </a:lnB>
+                    <a:solidFill>
+                      <a:schemeClr val="bg1"/>
+                    </a:solidFill>
+                  </a:tcPr>
+                </a:tc>
+                <a:tc>
+                  <a:txBody>
+                    <a:bodyPr/>
+                    <a:p>
+                      <a:pPr>
+                        <a:buNone/>
+                      </a:pPr>
+                      <a:endParaRPr lang="zh-CN" altLang="en-US">
+                        <a:solidFill>
+                          <a:schemeClr val="tx1"/>
+                        </a:solidFill>
+                      </a:endParaRPr>
+                    </a:p>
+                  </a:txBody>
+                  <a:tcPr>
+                    <a:lnL w="12700" cmpd="sng">
+                      <a:solidFill>
+                        <a:schemeClr val="tx1"/>
+                      </a:solidFill>
+                      <a:prstDash val="solid"/>
+                    </a:lnL>
+                    <a:lnR w="12700" cmpd="sng">
+                      <a:solidFill>
+                        <a:schemeClr val="tx1"/>
+                      </a:solidFill>
+                      <a:prstDash val="solid"/>
+                    </a:lnR>
+                    <a:lnT w="12700" cmpd="sng">
+                      <a:solidFill>
+                        <a:schemeClr val="tx1"/>
+                      </a:solidFill>
+                      <a:prstDash val="solid"/>
+                    </a:lnT>
+                    <a:lnB w="12700" cmpd="sng">
+                      <a:solidFill>
+                        <a:schemeClr val="tx1"/>
+                      </a:solidFill>
+                      <a:prstDash val="solid"/>
+                    </a:lnB>
+                    <a:solidFill>
+                      <a:schemeClr val="tx1"/>
+                    </a:solidFill>
+                  </a:tcPr>
+                </a:tc>
+                <a:tc>
+                  <a:txBody>
+                    <a:bodyPr/>
+                    <a:p>
+                      <a:pPr>
+                        <a:buNone/>
+                      </a:pPr>
+                      <a:endParaRPr lang="zh-CN" altLang="en-US">
+                        <a:solidFill>
+                          <a:schemeClr val="tx1"/>
+                        </a:solidFill>
+                      </a:endParaRPr>
+                    </a:p>
+                  </a:txBody>
+                  <a:tcPr>
+                    <a:lnL w="12700" cmpd="sng">
+                      <a:solidFill>
+                        <a:schemeClr val="tx1"/>
+                      </a:solidFill>
+                      <a:prstDash val="solid"/>
+                    </a:lnL>
+                    <a:lnR w="12700" cmpd="sng">
+                      <a:solidFill>
+                        <a:schemeClr val="tx1"/>
+                      </a:solidFill>
+                      <a:prstDash val="solid"/>
+                    </a:lnR>
+                    <a:lnT w="12700" cmpd="sng">
+                      <a:solidFill>
+                        <a:schemeClr val="tx1"/>
+                      </a:solidFill>
+                      <a:prstDash val="solid"/>
+                    </a:lnT>
+                    <a:lnB w="12700" cmpd="sng">
+                      <a:solidFill>
+                        <a:schemeClr val="tx1"/>
+                      </a:solidFill>
+                      <a:prstDash val="solid"/>
+                    </a:lnB>
+                    <a:solidFill>
+                      <a:schemeClr val="accent6">
+                        <a:lumMod val="75000"/>
+                      </a:schemeClr>
+                    </a:solidFill>
+                  </a:tcPr>
+                </a:tc>
+              </a:tr>
+              <a:tr h="540000">
+                <a:tc>
+                  <a:txBody>
+                    <a:bodyPr/>
+                    <a:p>
+                      <a:pPr>
+                        <a:buNone/>
+                      </a:pPr>
+                      <a:endParaRPr lang="zh-CN" altLang="en-US">
+                        <a:solidFill>
+                          <a:schemeClr val="tx1"/>
+                        </a:solidFill>
+                      </a:endParaRPr>
+                    </a:p>
+                  </a:txBody>
+                  <a:tcPr>
+                    <a:lnL w="12700" cmpd="sng">
+                      <a:solidFill>
+                        <a:schemeClr val="tx1"/>
+                      </a:solidFill>
+                      <a:prstDash val="solid"/>
+                    </a:lnL>
+                    <a:lnR w="12700" cmpd="sng">
+                      <a:solidFill>
+                        <a:schemeClr val="tx1"/>
+                      </a:solidFill>
+                      <a:prstDash val="solid"/>
+                    </a:lnR>
+                    <a:lnT w="12700" cmpd="sng">
+                      <a:solidFill>
+                        <a:schemeClr val="tx1"/>
+                      </a:solidFill>
+                      <a:prstDash val="solid"/>
+                    </a:lnT>
+                    <a:lnB w="12700" cmpd="sng">
+                      <a:solidFill>
+                        <a:schemeClr val="tx1"/>
+                      </a:solidFill>
+                      <a:prstDash val="solid"/>
+                    </a:lnB>
+                    <a:solidFill>
+                      <a:schemeClr val="accent6">
+                        <a:lumMod val="75000"/>
+                      </a:schemeClr>
+                    </a:solidFill>
+                  </a:tcPr>
+                </a:tc>
+                <a:tc>
+                  <a:txBody>
+                    <a:bodyPr/>
+                    <a:p>
+                      <a:pPr>
+                        <a:buNone/>
+                      </a:pPr>
+                      <a:endParaRPr lang="zh-CN" altLang="en-US">
+                        <a:solidFill>
+                          <a:schemeClr val="tx1"/>
+                        </a:solidFill>
+                      </a:endParaRPr>
+                    </a:p>
+                  </a:txBody>
+                  <a:tcPr>
+                    <a:lnL w="12700" cmpd="sng">
+                      <a:solidFill>
+                        <a:schemeClr val="tx1"/>
+                      </a:solidFill>
+                      <a:prstDash val="solid"/>
+                    </a:lnL>
+                    <a:lnR w="12700" cmpd="sng">
+                      <a:solidFill>
+                        <a:schemeClr val="tx1"/>
+                      </a:solidFill>
+                      <a:prstDash val="solid"/>
+                    </a:lnR>
+                    <a:lnT w="12700" cmpd="sng">
+                      <a:solidFill>
+                        <a:schemeClr val="tx1"/>
+                      </a:solidFill>
+                      <a:prstDash val="solid"/>
+                    </a:lnT>
+                    <a:lnB w="12700" cmpd="sng">
+                      <a:solidFill>
+                        <a:schemeClr val="tx1"/>
+                      </a:solidFill>
+                      <a:prstDash val="solid"/>
+                    </a:lnB>
+                    <a:solidFill>
+                      <a:schemeClr val="tx1"/>
+                    </a:solidFill>
+                  </a:tcPr>
+                </a:tc>
+                <a:tc>
+                  <a:txBody>
+                    <a:bodyPr/>
+                    <a:p>
+                      <a:pPr>
+                        <a:buNone/>
+                      </a:pPr>
+                      <a:endParaRPr lang="zh-CN" altLang="en-US">
+                        <a:solidFill>
+                          <a:schemeClr val="tx1"/>
+                        </a:solidFill>
+                      </a:endParaRPr>
+                    </a:p>
+                  </a:txBody>
+                  <a:tcPr>
+                    <a:lnL w="12700" cmpd="sng">
+                      <a:solidFill>
+                        <a:schemeClr val="tx1"/>
+                      </a:solidFill>
+                      <a:prstDash val="solid"/>
+                    </a:lnL>
+                    <a:lnR w="12700" cmpd="sng">
+                      <a:solidFill>
+                        <a:schemeClr val="tx1"/>
+                      </a:solidFill>
+                      <a:prstDash val="solid"/>
+                    </a:lnR>
+                    <a:lnT w="12700" cmpd="sng">
+                      <a:solidFill>
+                        <a:schemeClr val="tx1"/>
+                      </a:solidFill>
+                      <a:prstDash val="solid"/>
+                    </a:lnT>
+                    <a:lnB w="12700" cmpd="sng">
+                      <a:solidFill>
+                        <a:schemeClr val="tx1"/>
+                      </a:solidFill>
+                      <a:prstDash val="solid"/>
+                    </a:lnB>
+                    <a:solidFill>
+                      <a:schemeClr val="bg1"/>
+                    </a:solidFill>
+                  </a:tcPr>
+                </a:tc>
+                <a:tc>
+                  <a:txBody>
+                    <a:bodyPr/>
+                    <a:p>
+                      <a:pPr>
+                        <a:buNone/>
+                      </a:pPr>
+                      <a:endParaRPr lang="zh-CN" altLang="en-US">
+                        <a:solidFill>
+                          <a:schemeClr val="tx1"/>
+                        </a:solidFill>
+                      </a:endParaRPr>
+                    </a:p>
+                  </a:txBody>
+                  <a:tcPr>
+                    <a:lnL w="12700" cmpd="sng">
+                      <a:solidFill>
+                        <a:schemeClr val="tx1"/>
+                      </a:solidFill>
+                      <a:prstDash val="solid"/>
+                    </a:lnL>
+                    <a:lnR w="12700" cmpd="sng">
+                      <a:solidFill>
+                        <a:schemeClr val="tx1"/>
+                      </a:solidFill>
+                      <a:prstDash val="solid"/>
+                    </a:lnR>
+                    <a:lnT w="12700" cmpd="sng">
+                      <a:solidFill>
+                        <a:schemeClr val="tx1"/>
+                      </a:solidFill>
+                      <a:prstDash val="solid"/>
+                    </a:lnT>
+                    <a:lnB w="12700" cmpd="sng">
+                      <a:solidFill>
+                        <a:schemeClr val="tx1"/>
+                      </a:solidFill>
+                      <a:prstDash val="solid"/>
+                    </a:lnB>
+                    <a:solidFill>
+                      <a:schemeClr val="tx1"/>
+                    </a:solidFill>
+                  </a:tcPr>
+                </a:tc>
+                <a:tc>
+                  <a:txBody>
+                    <a:bodyPr/>
+                    <a:p>
+                      <a:pPr>
+                        <a:buNone/>
+                      </a:pPr>
+                      <a:endParaRPr lang="zh-CN" altLang="en-US">
+                        <a:solidFill>
+                          <a:schemeClr val="tx1"/>
+                        </a:solidFill>
+                      </a:endParaRPr>
+                    </a:p>
+                  </a:txBody>
+                  <a:tcPr>
+                    <a:lnL w="12700" cmpd="sng">
+                      <a:solidFill>
+                        <a:schemeClr val="tx1"/>
+                      </a:solidFill>
+                      <a:prstDash val="solid"/>
+                    </a:lnL>
+                    <a:lnR w="12700" cmpd="sng">
+                      <a:solidFill>
+                        <a:schemeClr val="tx1"/>
+                      </a:solidFill>
+                      <a:prstDash val="solid"/>
+                    </a:lnR>
+                    <a:lnT w="12700" cmpd="sng">
+                      <a:solidFill>
+                        <a:schemeClr val="tx1"/>
+                      </a:solidFill>
+                      <a:prstDash val="solid"/>
+                    </a:lnT>
+                    <a:lnB w="12700" cmpd="sng">
+                      <a:solidFill>
+                        <a:schemeClr val="tx1"/>
+                      </a:solidFill>
+                      <a:prstDash val="solid"/>
+                    </a:lnB>
+                    <a:solidFill>
+                      <a:schemeClr val="bg1"/>
+                    </a:solidFill>
+                  </a:tcPr>
+                </a:tc>
+                <a:tc>
+                  <a:txBody>
+                    <a:bodyPr/>
+                    <a:p>
+                      <a:pPr>
+                        <a:buNone/>
+                      </a:pPr>
+                      <a:endParaRPr lang="zh-CN" altLang="en-US">
+                        <a:solidFill>
+                          <a:schemeClr val="tx1"/>
+                        </a:solidFill>
+                      </a:endParaRPr>
+                    </a:p>
+                  </a:txBody>
+                  <a:tcPr>
+                    <a:lnL w="12700" cmpd="sng">
+                      <a:solidFill>
+                        <a:schemeClr val="tx1"/>
+                      </a:solidFill>
+                      <a:prstDash val="solid"/>
+                    </a:lnL>
+                    <a:lnR w="12700" cmpd="sng">
+                      <a:solidFill>
+                        <a:schemeClr val="tx1"/>
+                      </a:solidFill>
+                      <a:prstDash val="solid"/>
+                    </a:lnR>
+                    <a:lnT w="12700" cmpd="sng">
+                      <a:solidFill>
+                        <a:schemeClr val="tx1"/>
+                      </a:solidFill>
+                      <a:prstDash val="solid"/>
+                    </a:lnT>
+                    <a:lnB w="12700" cmpd="sng">
+                      <a:solidFill>
+                        <a:schemeClr val="tx1"/>
+                      </a:solidFill>
+                      <a:prstDash val="solid"/>
+                    </a:lnB>
+                    <a:solidFill>
+                      <a:schemeClr val="tx1"/>
+                    </a:solidFill>
+                  </a:tcPr>
+                </a:tc>
+              </a:tr>
+              <a:tr h="540000">
+                <a:tc>
+                  <a:txBody>
+                    <a:bodyPr/>
+                    <a:p>
+                      <a:pPr>
+                        <a:buNone/>
+                      </a:pPr>
+                      <a:endParaRPr lang="zh-CN" altLang="en-US">
+                        <a:solidFill>
+                          <a:schemeClr val="tx1"/>
+                        </a:solidFill>
+                      </a:endParaRPr>
+                    </a:p>
+                  </a:txBody>
+                  <a:tcPr>
+                    <a:lnL w="12700" cmpd="sng">
+                      <a:solidFill>
+                        <a:schemeClr val="tx1"/>
+                      </a:solidFill>
+                      <a:prstDash val="solid"/>
+                    </a:lnL>
+                    <a:lnR w="12700" cmpd="sng">
+                      <a:solidFill>
+                        <a:schemeClr val="tx1"/>
+                      </a:solidFill>
+                      <a:prstDash val="solid"/>
+                    </a:lnR>
+                    <a:lnT w="12700" cmpd="sng">
+                      <a:solidFill>
+                        <a:schemeClr val="tx1"/>
+                      </a:solidFill>
+                      <a:prstDash val="solid"/>
+                    </a:lnT>
+                    <a:lnB w="12700" cmpd="sng">
+                      <a:solidFill>
+                        <a:schemeClr val="tx1"/>
+                      </a:solidFill>
+                      <a:prstDash val="solid"/>
+                    </a:lnB>
+                    <a:solidFill>
+                      <a:schemeClr val="tx1"/>
+                    </a:solidFill>
+                  </a:tcPr>
+                </a:tc>
+                <a:tc>
+                  <a:txBody>
+                    <a:bodyPr/>
+                    <a:p>
+                      <a:pPr>
+                        <a:buNone/>
+                      </a:pPr>
+                      <a:endParaRPr lang="zh-CN" altLang="en-US">
+                        <a:solidFill>
+                          <a:schemeClr val="tx1"/>
+                        </a:solidFill>
+                      </a:endParaRPr>
+                    </a:p>
+                  </a:txBody>
+                  <a:tcPr>
+                    <a:lnL w="12700" cmpd="sng">
+                      <a:solidFill>
+                        <a:schemeClr val="tx1"/>
+                      </a:solidFill>
+                      <a:prstDash val="solid"/>
+                    </a:lnL>
+                    <a:lnR w="12700" cmpd="sng">
+                      <a:solidFill>
+                        <a:schemeClr val="tx1"/>
+                      </a:solidFill>
+                      <a:prstDash val="solid"/>
+                    </a:lnR>
+                    <a:lnT w="12700" cmpd="sng">
+                      <a:solidFill>
+                        <a:schemeClr val="tx1"/>
+                      </a:solidFill>
+                      <a:prstDash val="solid"/>
+                    </a:lnT>
+                    <a:lnB w="12700" cmpd="sng">
+                      <a:solidFill>
+                        <a:schemeClr val="tx1"/>
+                      </a:solidFill>
+                      <a:prstDash val="solid"/>
+                    </a:lnB>
+                    <a:solidFill>
+                      <a:schemeClr val="bg1"/>
+                    </a:solidFill>
+                  </a:tcPr>
+                </a:tc>
+                <a:tc>
+                  <a:txBody>
+                    <a:bodyPr/>
+                    <a:p>
+                      <a:pPr>
+                        <a:buNone/>
+                      </a:pPr>
+                      <a:endParaRPr lang="zh-CN" altLang="en-US">
+                        <a:solidFill>
+                          <a:schemeClr val="tx1"/>
+                        </a:solidFill>
+                      </a:endParaRPr>
+                    </a:p>
+                  </a:txBody>
+                  <a:tcPr>
+                    <a:lnL w="12700" cmpd="sng">
+                      <a:solidFill>
+                        <a:schemeClr val="tx1"/>
+                      </a:solidFill>
+                      <a:prstDash val="solid"/>
+                    </a:lnL>
+                    <a:lnR w="12700" cmpd="sng">
+                      <a:solidFill>
+                        <a:schemeClr val="tx1"/>
+                      </a:solidFill>
+                      <a:prstDash val="solid"/>
+                    </a:lnR>
+                    <a:lnT w="12700" cmpd="sng">
+                      <a:solidFill>
+                        <a:schemeClr val="tx1"/>
+                      </a:solidFill>
+                      <a:prstDash val="solid"/>
+                    </a:lnT>
+                    <a:lnB w="12700" cmpd="sng">
+                      <a:solidFill>
+                        <a:schemeClr val="tx1"/>
+                      </a:solidFill>
+                      <a:prstDash val="solid"/>
+                    </a:lnB>
+                    <a:solidFill>
+                      <a:schemeClr val="tx1"/>
+                    </a:solidFill>
+                  </a:tcPr>
+                </a:tc>
+                <a:tc>
+                  <a:txBody>
+                    <a:bodyPr/>
+                    <a:p>
+                      <a:pPr>
+                        <a:buNone/>
+                      </a:pPr>
+                      <a:endParaRPr lang="zh-CN" altLang="en-US">
+                        <a:solidFill>
+                          <a:schemeClr val="tx1"/>
+                        </a:solidFill>
+                      </a:endParaRPr>
+                    </a:p>
+                  </a:txBody>
+                  <a:tcPr>
+                    <a:lnL w="12700" cmpd="sng">
+                      <a:solidFill>
+                        <a:schemeClr val="tx1"/>
+                      </a:solidFill>
+                      <a:prstDash val="solid"/>
+                    </a:lnL>
+                    <a:lnR w="12700" cmpd="sng">
+                      <a:solidFill>
+                        <a:schemeClr val="tx1"/>
+                      </a:solidFill>
+                      <a:prstDash val="solid"/>
+                    </a:lnR>
+                    <a:lnT w="12700" cmpd="sng">
+                      <a:solidFill>
+                        <a:schemeClr val="tx1"/>
+                      </a:solidFill>
+                      <a:prstDash val="solid"/>
+                    </a:lnT>
+                    <a:lnB w="12700" cmpd="sng">
+                      <a:solidFill>
+                        <a:schemeClr val="tx1"/>
+                      </a:solidFill>
+                      <a:prstDash val="solid"/>
+                    </a:lnB>
+                    <a:solidFill>
+                      <a:schemeClr val="accent6">
+                        <a:lumMod val="75000"/>
+                      </a:schemeClr>
+                    </a:solidFill>
+                  </a:tcPr>
+                </a:tc>
+                <a:tc>
+                  <a:txBody>
+                    <a:bodyPr/>
+                    <a:p>
+                      <a:pPr>
+                        <a:buNone/>
+                      </a:pPr>
+                      <a:endParaRPr lang="zh-CN" altLang="en-US">
+                        <a:solidFill>
+                          <a:schemeClr val="tx1"/>
+                        </a:solidFill>
+                      </a:endParaRPr>
+                    </a:p>
+                  </a:txBody>
+                  <a:tcPr>
+                    <a:lnL w="12700" cmpd="sng">
+                      <a:solidFill>
+                        <a:schemeClr val="tx1"/>
+                      </a:solidFill>
+                      <a:prstDash val="solid"/>
+                    </a:lnL>
+                    <a:lnR w="12700" cmpd="sng">
+                      <a:solidFill>
+                        <a:schemeClr val="tx1"/>
+                      </a:solidFill>
+                      <a:prstDash val="solid"/>
+                    </a:lnR>
+                    <a:lnT w="12700" cmpd="sng">
+                      <a:solidFill>
+                        <a:schemeClr val="tx1"/>
+                      </a:solidFill>
+                      <a:prstDash val="solid"/>
+                    </a:lnT>
+                    <a:lnB w="12700" cmpd="sng">
+                      <a:solidFill>
+                        <a:schemeClr val="tx1"/>
+                      </a:solidFill>
+                      <a:prstDash val="solid"/>
+                    </a:lnB>
+                    <a:solidFill>
+                      <a:schemeClr val="tx1"/>
+                    </a:solidFill>
+                  </a:tcPr>
+                </a:tc>
+                <a:tc>
+                  <a:txBody>
+                    <a:bodyPr/>
+                    <a:p>
+                      <a:pPr>
+                        <a:buNone/>
+                      </a:pPr>
+                      <a:endParaRPr lang="zh-CN" altLang="en-US">
+                        <a:solidFill>
+                          <a:schemeClr val="tx1"/>
+                        </a:solidFill>
+                      </a:endParaRPr>
+                    </a:p>
+                  </a:txBody>
+                  <a:tcPr>
+                    <a:lnL w="12700" cmpd="sng">
+                      <a:solidFill>
+                        <a:schemeClr val="tx1"/>
+                      </a:solidFill>
+                      <a:prstDash val="solid"/>
+                    </a:lnL>
+                    <a:lnR w="12700" cmpd="sng">
+                      <a:solidFill>
+                        <a:schemeClr val="tx1"/>
+                      </a:solidFill>
+                      <a:prstDash val="solid"/>
+                    </a:lnR>
+                    <a:lnT w="12700" cmpd="sng">
+                      <a:solidFill>
+                        <a:schemeClr val="tx1"/>
+                      </a:solidFill>
+                      <a:prstDash val="solid"/>
+                    </a:lnT>
+                    <a:lnB w="12700" cmpd="sng">
+                      <a:solidFill>
+                        <a:schemeClr val="tx1"/>
+                      </a:solidFill>
+                      <a:prstDash val="solid"/>
+                    </a:lnB>
+                    <a:solidFill>
+                      <a:schemeClr val="bg1"/>
+                    </a:solidFill>
+                  </a:tcPr>
+                </a:tc>
+              </a:tr>
+            </a:tbl>
+          </a:graphicData>
+        </a:graphic>
+      </p:graphicFrame>
+      <p:cxnSp>
+        <p:nvCxnSpPr>
+          <p:cNvPr id="3" name="直接连接符 2"/>
+          <p:cNvCxnSpPr/>
+          <p:nvPr/>
+        </p:nvCxnSpPr>
+        <p:spPr>
+          <a:xfrm flipV="1">
+            <a:off x="5673725" y="2256155"/>
+            <a:ext cx="3232150" cy="3254375"/>
+          </a:xfrm>
+          <a:prstGeom prst="line">
+            <a:avLst/>
+          </a:prstGeom>
+          <a:ln w="12700" cap="flat" cmpd="sng" algn="ctr">
+            <a:solidFill>
+              <a:schemeClr val="bg1"/>
+            </a:solidFill>
+            <a:prstDash val="dash"/>
+            <a:miter lim="800000"/>
+          </a:ln>
+        </p:spPr>
+        <p:style>
+          <a:lnRef idx="0">
+            <a:schemeClr val="accent1"/>
+          </a:lnRef>
+          <a:fillRef idx="0">
+            <a:srgbClr val="FFFFFF"/>
+          </a:fillRef>
+          <a:effectRef idx="0">
+            <a:srgbClr val="FFFFFF"/>
+          </a:effectRef>
+          <a:fontRef idx="minor">
+            <a:schemeClr val="tx1"/>
+          </a:fontRef>
+        </p:style>
+      </p:cxnSp>
+      <p:cxnSp>
+        <p:nvCxnSpPr>
+          <p:cNvPr id="5" name="直接箭头连接符 4"/>
+          <p:cNvCxnSpPr/>
+          <p:nvPr/>
+        </p:nvCxnSpPr>
+        <p:spPr>
+          <a:xfrm>
+            <a:off x="5947410" y="2515870"/>
+            <a:ext cx="1140460" cy="1176020"/>
+          </a:xfrm>
+          <a:prstGeom prst="straightConnector1">
+            <a:avLst/>
+          </a:prstGeom>
+          <a:ln w="31750" cap="rnd">
+            <a:solidFill>
+              <a:schemeClr val="accent1"/>
+            </a:solidFill>
+            <a:round/>
+            <a:tailEnd type="arrow" w="med" len="med"/>
+          </a:ln>
+        </p:spPr>
+        <p:style>
+          <a:lnRef idx="0">
+            <a:srgbClr val="FFFFFF"/>
+          </a:lnRef>
+          <a:fillRef idx="0">
+            <a:srgbClr val="FFFFFF"/>
+          </a:fillRef>
+          <a:effectRef idx="0">
+            <a:srgbClr val="FFFFFF"/>
+          </a:effectRef>
+          <a:fontRef idx="minor">
+            <a:schemeClr val="tx1"/>
+          </a:fontRef>
+        </p:style>
+      </p:cxnSp>
+      <p:cxnSp>
+        <p:nvCxnSpPr>
+          <p:cNvPr id="7" name="直接箭头连接符 6"/>
+          <p:cNvCxnSpPr/>
+          <p:nvPr/>
+        </p:nvCxnSpPr>
+        <p:spPr>
+          <a:xfrm flipH="1" flipV="1">
+            <a:off x="7556500" y="4131945"/>
+            <a:ext cx="1162050" cy="1205230"/>
+          </a:xfrm>
+          <a:prstGeom prst="straightConnector1">
+            <a:avLst/>
+          </a:prstGeom>
+          <a:ln w="31750" cap="rnd">
+            <a:solidFill>
+              <a:schemeClr val="accent1"/>
+            </a:solidFill>
+            <a:round/>
+            <a:tailEnd type="arrow" w="med" len="med"/>
+          </a:ln>
+        </p:spPr>
+        <p:style>
+          <a:lnRef idx="0">
+            <a:srgbClr val="FFFFFF"/>
+          </a:lnRef>
+          <a:fillRef idx="0">
+            <a:srgbClr val="FFFFFF"/>
+          </a:fillRef>
+          <a:effectRef idx="0">
+            <a:srgbClr val="FFFFFF"/>
+          </a:effectRef>
+          <a:fontRef idx="minor">
+            <a:schemeClr val="tx1"/>
+          </a:fontRef>
+        </p:style>
+      </p:cxnSp>
+    </p:spTree>
+  </p:cSld>
+  <p:clrMapOvr>
+    <a:masterClrMapping/>
+  </p:clrMapOvr>
+</p:sld>
+</file>
+
+<file path=ppt/tags/tag1.xml><?xml version="1.0" encoding="utf-8"?>
+<p:tagLst xmlns:p="http://schemas.openxmlformats.org/presentationml/2006/main">
+  <p:tag name="TABLE_ENDDRAG_ORIGIN_RECT" val="164*158"/>
+  <p:tag name="TABLE_ENDDRAG_RECT" val="66*143*164*158"/>
+</p:tagLst>
+</file>
+
+<file path=ppt/tags/tag2.xml><?xml version="1.0" encoding="utf-8"?>
+<p:tagLst xmlns:p="http://schemas.openxmlformats.org/presentationml/2006/main">
+  <p:tag name="TABLE_ENDDRAG_ORIGIN_RECT" val="164*158"/>
+  <p:tag name="TABLE_ENDDRAG_RECT" val="66*143*164*158"/>
+</p:tagLst>
+</file>
+
+<file path=ppt/tags/tag3.xml><?xml version="1.0" encoding="utf-8"?>
+<p:tagLst xmlns:p="http://schemas.openxmlformats.org/presentationml/2006/main">
+  <p:tag name="TABLE_ENDDRAG_ORIGIN_RECT" val="164*158"/>
+  <p:tag name="TABLE_ENDDRAG_RECT" val="66*143*164*158"/>
+</p:tagLst>
+</file>
+
+<file path=ppt/tags/tag4.xml><?xml version="1.0" encoding="utf-8"?>
+<p:tagLst xmlns:p="http://schemas.openxmlformats.org/presentationml/2006/main">
+  <p:tag name="TABLE_ENDDRAG_ORIGIN_RECT" val="164*158"/>
+  <p:tag name="TABLE_ENDDRAG_RECT" val="66*143*164*158"/>
+</p:tagLst>
+</file>
+
+<file path=ppt/tags/tag5.xml><?xml version="1.0" encoding="utf-8"?>
+<p:tagLst xmlns:p="http://schemas.openxmlformats.org/presentationml/2006/main">
+  <p:tag name="TABLE_ENDDRAG_ORIGIN_RECT" val="164*158"/>
+  <p:tag name="TABLE_ENDDRAG_RECT" val="66*143*164*158"/>
+</p:tagLst>
+</file>
+
+<file path=ppt/tags/tag6.xml><?xml version="1.0" encoding="utf-8"?>
+<p:tagLst xmlns:p="http://schemas.openxmlformats.org/presentationml/2006/main">
+  <p:tag name="TABLE_ENDDRAG_ORIGIN_RECT" val="164*158"/>
+  <p:tag name="TABLE_ENDDRAG_RECT" val="66*143*164*158"/>
+</p:tagLst>
+</file>
+
 <file path=ppt/theme/theme1.xml><?xml version="1.0" encoding="utf-8"?>
 <a:theme xmlns:a="http://schemas.openxmlformats.org/drawingml/2006/main" name="WPS">
   <a:themeElements>
